--- a/docs/DunaFlow_Apresentacao.pptx
+++ b/docs/DunaFlow_Apresentacao.pptx
@@ -19,9 +19,10 @@
     <p:sldId id="267" r:id="rId13"/>
     <p:sldId id="268" r:id="rId14"/>
     <p:sldId id="269" r:id="rId15"/>
+    <p:sldId id="270" r:id="rId16"/>
   </p:sldIdLst>
   <p:notesMasterIdLst>
-    <p:notesMasterId r:id="rId16"/>
+    <p:notesMasterId r:id="rId17"/>
   </p:notesMasterIdLst>
   <p:sldSz cx="12192000" cy="6858000"/>
   <p:notesSz cx="6858000" cy="12192000"/>
@@ -979,6 +980,94 @@
             <a:fld id="{F7021451-1387-4CA6-816F-3879F97B5CBC}" type="slidenum">
               <a:rPr lang="en-US"/>
               <a:t>14</a:t>
+            </a:fld>
+            <a:endParaRPr lang="en-US"/>
+          </a:p>
+        </p:txBody>
+      </p:sp>
+    </p:spTree>
+    <p:extLst>
+      <p:ext uri="{BB962C8B-B14F-4D97-AF65-F5344CB8AC3E}">
+        <p14:creationId xmlns:p14="http://schemas.microsoft.com/office/powerpoint/2010/main" val="1024086991"/>
+      </p:ext>
+    </p:extLst>
+  </p:cSld>
+  <p:clrMapOvr>
+    <a:masterClrMapping/>
+  </p:clrMapOvr>
+</p:notes>
+</file>
+
+<file path=ppt/notesSlides/notesSlide15.xml><?xml version="1.0" encoding="utf-8"?>
+<p:notes xmlns:a="http://schemas.openxmlformats.org/drawingml/2006/main" xmlns:r="http://schemas.openxmlformats.org/officeDocument/2006/relationships" xmlns:p="http://schemas.openxmlformats.org/presentationml/2006/main">
+  <p:cSld>
+    <p:spTree>
+      <p:nvGrpSpPr>
+        <p:cNvPr id="1" name=""/>
+        <p:cNvGrpSpPr/>
+        <p:nvPr/>
+      </p:nvGrpSpPr>
+      <p:grpSpPr>
+        <a:xfrm>
+          <a:off x="0" y="0"/>
+          <a:ext cx="0" cy="0"/>
+          <a:chOff x="0" y="0"/>
+          <a:chExt cx="0" cy="0"/>
+        </a:xfrm>
+      </p:grpSpPr>
+      <p:sp>
+        <p:nvSpPr>
+          <p:cNvPr id="2" name="Slide Image Placeholder 1"/>
+          <p:cNvSpPr>
+            <a:spLocks noGrp="1" noRot="1" noChangeAspect="1"/>
+          </p:cNvSpPr>
+          <p:nvPr>
+            <p:ph type="sldImg"/>
+          </p:nvPr>
+        </p:nvSpPr>
+        <p:spPr/>
+      </p:sp>
+      <p:sp>
+        <p:nvSpPr>
+          <p:cNvPr id="3" name="Notes Placeholder 2"/>
+          <p:cNvSpPr>
+            <a:spLocks noGrp="1"/>
+          </p:cNvSpPr>
+          <p:nvPr>
+            <p:ph type="body" idx="1"/>
+          </p:nvPr>
+        </p:nvSpPr>
+        <p:spPr/>
+        <p:txBody>
+          <a:bodyPr/>
+          <a:lstStyle/>
+          <a:p>
+            <a:r>
+              <a:rPr lang="en-US" dirty="0"/>
+              <a:t/>
+            </a:r>
+            <a:endParaRPr lang="en-US" dirty="0"/>
+          </a:p>
+        </p:txBody>
+      </p:sp>
+      <p:sp>
+        <p:nvSpPr>
+          <p:cNvPr id="4" name="Slide Number Placeholder 3"/>
+          <p:cNvSpPr>
+            <a:spLocks noGrp="1"/>
+          </p:cNvSpPr>
+          <p:nvPr>
+            <p:ph type="sldNum" sz="quarter" idx="10"/>
+          </p:nvPr>
+        </p:nvSpPr>
+        <p:spPr/>
+        <p:txBody>
+          <a:bodyPr/>
+          <a:lstStyle/>
+          <a:p>
+            <a:fld id="{F7021451-1387-4CA6-816F-3879F97B5CBC}" type="slidenum">
+              <a:rPr lang="en-US"/>
+              <a:t>15</a:t>
             </a:fld>
             <a:endParaRPr lang="en-US"/>
           </a:p>
@@ -2532,7 +2621,7 @@
                 <a:ea typeface="Calibri" pitchFamily="34" charset="-122"/>
                 <a:cs typeface="Calibri" pitchFamily="34" charset="-120"/>
               </a:rPr>
-              <a:t>Abril · 2026   ·   v1.4</a:t>
+              <a:t>Abril · 2026   ·   v1.5</a:t>
             </a:r>
             <a:endParaRPr lang="en-US" sz="1100" dirty="0"/>
           </a:p>
@@ -2642,7 +2731,7 @@
                 <a:ea typeface="Calibri" pitchFamily="34" charset="-122"/>
                 <a:cs typeface="Calibri" pitchFamily="34" charset="-120"/>
               </a:rPr>
-              <a:t>ARQUITETURA EM UMA OLHADA</a:t>
+              <a:t>GANHO DE PRODUTIVIDADE</a:t>
             </a:r>
             <a:endParaRPr lang="en-US" sz="1100" dirty="0"/>
           </a:p>
@@ -2673,7 +2762,7 @@
               <a:buNone/>
             </a:pPr>
             <a:r>
-              <a:rPr lang="en-US" sz="3000" b="1" dirty="0">
+              <a:rPr lang="en-US" sz="2600" b="1" dirty="0">
                 <a:solidFill>
                   <a:srgbClr val="0A1940"/>
                 </a:solidFill>
@@ -2681,9 +2770,9 @@
                 <a:ea typeface="Georgia" pitchFamily="34" charset="-122"/>
                 <a:cs typeface="Georgia" pitchFamily="34" charset="-120"/>
               </a:rPr>
-              <a:t>Componentes principais e integrações</a:t>
-            </a:r>
-            <a:endParaRPr lang="en-US" sz="3000" dirty="0"/>
+              <a:t>10 pessoas × 1.000 publicações/dia: o que muda com DunaFlow</a:t>
+            </a:r>
+            <a:endParaRPr lang="en-US" sz="2600" dirty="0"/>
           </a:p>
         </p:txBody>
       </p:sp>
@@ -2714,14 +2803,53 @@
       </p:sp>
       <p:sp>
         <p:nvSpPr>
-          <p:cNvPr id="5" name="Shape 3"/>
-          <p:cNvSpPr/>
-          <p:nvPr/>
-        </p:nvSpPr>
-        <p:spPr>
-          <a:xfrm>
-            <a:off x="548640" y="1874520"/>
-            <a:ext cx="11064240" cy="1188720"/>
+          <p:cNvPr id="5" name="Text 3"/>
+          <p:cNvSpPr/>
+          <p:nvPr/>
+        </p:nvSpPr>
+        <p:spPr>
+          <a:xfrm>
+            <a:off x="548640" y="1508760"/>
+            <a:ext cx="11064240" cy="502920"/>
+          </a:xfrm>
+          <a:prstGeom prst="rect">
+            <a:avLst/>
+          </a:prstGeom>
+          <a:noFill/>
+          <a:ln/>
+        </p:spPr>
+        <p:txBody>
+          <a:bodyPr wrap="square" lIns="0" tIns="0" rIns="0" bIns="0" rtlCol="0" anchor="ctr"/>
+          <a:lstStyle/>
+          <a:p>
+            <a:pPr indent="0" marL="0">
+              <a:buNone/>
+            </a:pPr>
+            <a:r>
+              <a:rPr lang="en-US" sz="1200" i="1" dirty="0">
+                <a:solidFill>
+                  <a:srgbClr val="1E293B"/>
+                </a:solidFill>
+                <a:latin typeface="Calibri" pitchFamily="34" charset="0"/>
+                <a:ea typeface="Calibri" pitchFamily="34" charset="-122"/>
+                <a:cs typeface="Calibri" pitchFamily="34" charset="-120"/>
+              </a:rPr>
+              <a:t>Cenário-base: uma equipe dedicada de 10 pessoas lê e classifica 1.000 publicações/dia. Com o DunaFlow, o mesmo volume é tratado por uma fração do time — ou o mesmo time passa a dar conta de muito mais.</a:t>
+            </a:r>
+            <a:endParaRPr lang="en-US" sz="1200" dirty="0"/>
+          </a:p>
+        </p:txBody>
+      </p:sp>
+      <p:sp>
+        <p:nvSpPr>
+          <p:cNvPr id="6" name="Shape 4"/>
+          <p:cNvSpPr/>
+          <p:nvPr/>
+        </p:nvSpPr>
+        <p:spPr>
+          <a:xfrm>
+            <a:off x="548640" y="2148840"/>
+            <a:ext cx="5440680" cy="2103120"/>
           </a:xfrm>
           <a:prstGeom prst="rect">
             <a:avLst/>
@@ -2746,118 +2874,172 @@
       </p:sp>
       <p:sp>
         <p:nvSpPr>
-          <p:cNvPr id="6" name="Shape 4"/>
-          <p:cNvSpPr/>
-          <p:nvPr/>
-        </p:nvSpPr>
-        <p:spPr>
-          <a:xfrm>
-            <a:off x="548640" y="1874520"/>
-            <a:ext cx="128016" cy="1188720"/>
+          <p:cNvPr id="7" name="Shape 5"/>
+          <p:cNvSpPr/>
+          <p:nvPr/>
+        </p:nvSpPr>
+        <p:spPr>
+          <a:xfrm>
+            <a:off x="548640" y="2148840"/>
+            <a:ext cx="5440680" cy="502920"/>
           </a:xfrm>
           <a:prstGeom prst="rect">
             <a:avLst/>
           </a:prstGeom>
           <a:solidFill>
-            <a:srgbClr val="0EA5A4"/>
+            <a:srgbClr val="D65A4B"/>
           </a:solidFill>
           <a:ln w="12700">
             <a:solidFill>
-              <a:srgbClr val="0EA5A4"/>
+              <a:srgbClr val="D65A4B"/>
             </a:solidFill>
             <a:prstDash val="solid"/>
           </a:ln>
         </p:spPr>
       </p:sp>
-      <p:pic>
-        <p:nvPicPr>
-          <p:cNvPr id="7" name="Image 0" descr="preencoded.png">    </p:cNvPr>
-          <p:cNvPicPr>
-            <a:picLocks noChangeAspect="1"/>
-          </p:cNvPicPr>
-          <p:nvPr/>
-        </p:nvPicPr>
-        <p:blipFill>
-          <a:blip r:embed="rId1"/>
-          <a:stretch>
-            <a:fillRect/>
-          </a:stretch>
-        </p:blipFill>
-        <p:spPr>
-          <a:xfrm>
-            <a:off x="914400" y="2194560"/>
-            <a:ext cx="548640" cy="548640"/>
-          </a:xfrm>
-          <a:prstGeom prst="rect">
-            <a:avLst/>
-          </a:prstGeom>
-        </p:spPr>
-      </p:pic>
-      <p:sp>
-        <p:nvSpPr>
-          <p:cNvPr id="8" name="Text 5"/>
-          <p:cNvSpPr/>
-          <p:nvPr/>
-        </p:nvSpPr>
-        <p:spPr>
-          <a:xfrm>
-            <a:off x="1691640" y="2011680"/>
-            <a:ext cx="9784080" cy="411480"/>
-          </a:xfrm>
-          <a:prstGeom prst="rect">
-            <a:avLst/>
-          </a:prstGeom>
-          <a:noFill/>
-          <a:ln/>
-        </p:spPr>
-        <p:txBody>
-          <a:bodyPr wrap="square" lIns="0" tIns="0" rIns="0" bIns="0" rtlCol="0" anchor="ctr"/>
-          <a:lstStyle/>
-          <a:p>
-            <a:pPr indent="0" marL="0">
-              <a:buNone/>
-            </a:pPr>
-            <a:r>
-              <a:rPr lang="en-US" sz="1800" b="1" dirty="0">
-                <a:solidFill>
-                  <a:srgbClr val="0A1940"/>
+      <p:sp>
+        <p:nvSpPr>
+          <p:cNvPr id="8" name="Text 6"/>
+          <p:cNvSpPr/>
+          <p:nvPr/>
+        </p:nvSpPr>
+        <p:spPr>
+          <a:xfrm>
+            <a:off x="777240" y="2240280"/>
+            <a:ext cx="4983480" cy="320040"/>
+          </a:xfrm>
+          <a:prstGeom prst="rect">
+            <a:avLst/>
+          </a:prstGeom>
+          <a:noFill/>
+          <a:ln/>
+        </p:spPr>
+        <p:txBody>
+          <a:bodyPr wrap="square" lIns="0" tIns="0" rIns="0" bIns="0" rtlCol="0" anchor="ctr"/>
+          <a:lstStyle/>
+          <a:p>
+            <a:pPr indent="0" marL="0">
+              <a:buNone/>
+            </a:pPr>
+            <a:r>
+              <a:rPr lang="en-US" sz="1200" b="1" spc="400" kern="0" dirty="0">
+                <a:solidFill>
+                  <a:srgbClr val="FFFFFF"/>
+                </a:solidFill>
+                <a:latin typeface="Calibri" pitchFamily="34" charset="0"/>
+                <a:ea typeface="Calibri" pitchFamily="34" charset="-122"/>
+                <a:cs typeface="Calibri" pitchFamily="34" charset="-120"/>
+              </a:rPr>
+              <a:t>HOJE · TRIAGEM MANUAL</a:t>
+            </a:r>
+            <a:endParaRPr lang="en-US" sz="1200" dirty="0"/>
+          </a:p>
+        </p:txBody>
+      </p:sp>
+      <p:sp>
+        <p:nvSpPr>
+          <p:cNvPr id="9" name="Text 7"/>
+          <p:cNvSpPr/>
+          <p:nvPr/>
+        </p:nvSpPr>
+        <p:spPr>
+          <a:xfrm>
+            <a:off x="777240" y="2834640"/>
+            <a:ext cx="3383280" cy="320040"/>
+          </a:xfrm>
+          <a:prstGeom prst="rect">
+            <a:avLst/>
+          </a:prstGeom>
+          <a:noFill/>
+          <a:ln/>
+        </p:spPr>
+        <p:txBody>
+          <a:bodyPr wrap="square" lIns="0" tIns="0" rIns="0" bIns="0" rtlCol="0" anchor="ctr"/>
+          <a:lstStyle/>
+          <a:p>
+            <a:pPr indent="0" marL="0">
+              <a:buNone/>
+            </a:pPr>
+            <a:r>
+              <a:rPr lang="en-US" sz="1200" dirty="0">
+                <a:solidFill>
+                  <a:srgbClr val="1E293B"/>
+                </a:solidFill>
+                <a:latin typeface="Calibri" pitchFamily="34" charset="0"/>
+                <a:ea typeface="Calibri" pitchFamily="34" charset="-122"/>
+                <a:cs typeface="Calibri" pitchFamily="34" charset="-120"/>
+              </a:rPr>
+              <a:t>Equipe dedicada</a:t>
+            </a:r>
+            <a:endParaRPr lang="en-US" sz="1200" dirty="0"/>
+          </a:p>
+        </p:txBody>
+      </p:sp>
+      <p:sp>
+        <p:nvSpPr>
+          <p:cNvPr id="10" name="Text 8"/>
+          <p:cNvSpPr/>
+          <p:nvPr/>
+        </p:nvSpPr>
+        <p:spPr>
+          <a:xfrm>
+            <a:off x="4160520" y="2834640"/>
+            <a:ext cx="1600200" cy="320040"/>
+          </a:xfrm>
+          <a:prstGeom prst="rect">
+            <a:avLst/>
+          </a:prstGeom>
+          <a:noFill/>
+          <a:ln/>
+        </p:spPr>
+        <p:txBody>
+          <a:bodyPr wrap="square" lIns="0" tIns="0" rIns="0" bIns="0" rtlCol="0" anchor="ctr"/>
+          <a:lstStyle/>
+          <a:p>
+            <a:pPr algn="r" indent="0" marL="0">
+              <a:buNone/>
+            </a:pPr>
+            <a:r>
+              <a:rPr lang="en-US" sz="1400" b="1" dirty="0">
+                <a:solidFill>
+                  <a:srgbClr val="D65A4B"/>
                 </a:solidFill>
                 <a:latin typeface="Georgia" pitchFamily="34" charset="0"/>
                 <a:ea typeface="Georgia" pitchFamily="34" charset="-122"/>
                 <a:cs typeface="Georgia" pitchFamily="34" charset="-120"/>
               </a:rPr>
-              <a:t>Experiência</a:t>
-            </a:r>
-            <a:endParaRPr lang="en-US" sz="1800" dirty="0"/>
-          </a:p>
-        </p:txBody>
-      </p:sp>
-      <p:sp>
-        <p:nvSpPr>
-          <p:cNvPr id="9" name="Text 6"/>
-          <p:cNvSpPr/>
-          <p:nvPr/>
-        </p:nvSpPr>
-        <p:spPr>
-          <a:xfrm>
-            <a:off x="1691640" y="2441448"/>
-            <a:ext cx="9784080" cy="548640"/>
-          </a:xfrm>
-          <a:prstGeom prst="rect">
-            <a:avLst/>
-          </a:prstGeom>
-          <a:noFill/>
-          <a:ln/>
-        </p:spPr>
-        <p:txBody>
-          <a:bodyPr wrap="square" lIns="0" tIns="0" rIns="0" bIns="0" rtlCol="0" anchor="ctr"/>
-          <a:lstStyle/>
-          <a:p>
-            <a:pPr indent="0" marL="0">
-              <a:buNone/>
-            </a:pPr>
-            <a:r>
-              <a:rPr lang="en-US" sz="1300" dirty="0">
+              <a:t>10 pessoas</a:t>
+            </a:r>
+            <a:endParaRPr lang="en-US" sz="1400" dirty="0"/>
+          </a:p>
+        </p:txBody>
+      </p:sp>
+      <p:sp>
+        <p:nvSpPr>
+          <p:cNvPr id="11" name="Text 9"/>
+          <p:cNvSpPr/>
+          <p:nvPr/>
+        </p:nvSpPr>
+        <p:spPr>
+          <a:xfrm>
+            <a:off x="777240" y="3182112"/>
+            <a:ext cx="3383280" cy="320040"/>
+          </a:xfrm>
+          <a:prstGeom prst="rect">
+            <a:avLst/>
+          </a:prstGeom>
+          <a:noFill/>
+          <a:ln/>
+        </p:spPr>
+        <p:txBody>
+          <a:bodyPr wrap="square" lIns="0" tIns="0" rIns="0" bIns="0" rtlCol="0" anchor="ctr"/>
+          <a:lstStyle/>
+          <a:p>
+            <a:pPr indent="0" marL="0">
+              <a:buNone/>
+            </a:pPr>
+            <a:r>
+              <a:rPr lang="en-US" sz="1200" dirty="0">
                 <a:solidFill>
                   <a:srgbClr val="1E293B"/>
                 </a:solidFill>
@@ -2865,22 +3047,217 @@
                 <a:ea typeface="Calibri" pitchFamily="34" charset="-122"/>
                 <a:cs typeface="Calibri" pitchFamily="34" charset="-120"/>
               </a:rPr>
-              <a:t>React 18 · TypeScript · Vite · shadcn/ui · Tailwind</a:t>
-            </a:r>
-            <a:endParaRPr lang="en-US" sz="1300" dirty="0"/>
-          </a:p>
-        </p:txBody>
-      </p:sp>
-      <p:sp>
-        <p:nvSpPr>
-          <p:cNvPr id="10" name="Shape 7"/>
-          <p:cNvSpPr/>
-          <p:nvPr/>
-        </p:nvSpPr>
-        <p:spPr>
-          <a:xfrm>
-            <a:off x="548640" y="3291840"/>
-            <a:ext cx="11064240" cy="1188720"/>
+              <a:t>Publicações por pessoa/dia</a:t>
+            </a:r>
+            <a:endParaRPr lang="en-US" sz="1200" dirty="0"/>
+          </a:p>
+        </p:txBody>
+      </p:sp>
+      <p:sp>
+        <p:nvSpPr>
+          <p:cNvPr id="12" name="Text 10"/>
+          <p:cNvSpPr/>
+          <p:nvPr/>
+        </p:nvSpPr>
+        <p:spPr>
+          <a:xfrm>
+            <a:off x="4160520" y="3182112"/>
+            <a:ext cx="1600200" cy="320040"/>
+          </a:xfrm>
+          <a:prstGeom prst="rect">
+            <a:avLst/>
+          </a:prstGeom>
+          <a:noFill/>
+          <a:ln/>
+        </p:spPr>
+        <p:txBody>
+          <a:bodyPr wrap="square" lIns="0" tIns="0" rIns="0" bIns="0" rtlCol="0" anchor="ctr"/>
+          <a:lstStyle/>
+          <a:p>
+            <a:pPr algn="r" indent="0" marL="0">
+              <a:buNone/>
+            </a:pPr>
+            <a:r>
+              <a:rPr lang="en-US" sz="1400" b="1" dirty="0">
+                <a:solidFill>
+                  <a:srgbClr val="D65A4B"/>
+                </a:solidFill>
+                <a:latin typeface="Georgia" pitchFamily="34" charset="0"/>
+                <a:ea typeface="Georgia" pitchFamily="34" charset="-122"/>
+                <a:cs typeface="Georgia" pitchFamily="34" charset="-120"/>
+              </a:rPr>
+              <a:t>~100</a:t>
+            </a:r>
+            <a:endParaRPr lang="en-US" sz="1400" dirty="0"/>
+          </a:p>
+        </p:txBody>
+      </p:sp>
+      <p:sp>
+        <p:nvSpPr>
+          <p:cNvPr id="13" name="Text 11"/>
+          <p:cNvSpPr/>
+          <p:nvPr/>
+        </p:nvSpPr>
+        <p:spPr>
+          <a:xfrm>
+            <a:off x="777240" y="3529584"/>
+            <a:ext cx="3383280" cy="320040"/>
+          </a:xfrm>
+          <a:prstGeom prst="rect">
+            <a:avLst/>
+          </a:prstGeom>
+          <a:noFill/>
+          <a:ln/>
+        </p:spPr>
+        <p:txBody>
+          <a:bodyPr wrap="square" lIns="0" tIns="0" rIns="0" bIns="0" rtlCol="0" anchor="ctr"/>
+          <a:lstStyle/>
+          <a:p>
+            <a:pPr indent="0" marL="0">
+              <a:buNone/>
+            </a:pPr>
+            <a:r>
+              <a:rPr lang="en-US" sz="1200" dirty="0">
+                <a:solidFill>
+                  <a:srgbClr val="1E293B"/>
+                </a:solidFill>
+                <a:latin typeface="Calibri" pitchFamily="34" charset="0"/>
+                <a:ea typeface="Calibri" pitchFamily="34" charset="-122"/>
+                <a:cs typeface="Calibri" pitchFamily="34" charset="-120"/>
+              </a:rPr>
+              <a:t>Tempo humano por publicação</a:t>
+            </a:r>
+            <a:endParaRPr lang="en-US" sz="1200" dirty="0"/>
+          </a:p>
+        </p:txBody>
+      </p:sp>
+      <p:sp>
+        <p:nvSpPr>
+          <p:cNvPr id="14" name="Text 12"/>
+          <p:cNvSpPr/>
+          <p:nvPr/>
+        </p:nvSpPr>
+        <p:spPr>
+          <a:xfrm>
+            <a:off x="4160520" y="3529584"/>
+            <a:ext cx="1600200" cy="320040"/>
+          </a:xfrm>
+          <a:prstGeom prst="rect">
+            <a:avLst/>
+          </a:prstGeom>
+          <a:noFill/>
+          <a:ln/>
+        </p:spPr>
+        <p:txBody>
+          <a:bodyPr wrap="square" lIns="0" tIns="0" rIns="0" bIns="0" rtlCol="0" anchor="ctr"/>
+          <a:lstStyle/>
+          <a:p>
+            <a:pPr algn="r" indent="0" marL="0">
+              <a:buNone/>
+            </a:pPr>
+            <a:r>
+              <a:rPr lang="en-US" sz="1400" b="1" dirty="0">
+                <a:solidFill>
+                  <a:srgbClr val="D65A4B"/>
+                </a:solidFill>
+                <a:latin typeface="Georgia" pitchFamily="34" charset="0"/>
+                <a:ea typeface="Georgia" pitchFamily="34" charset="-122"/>
+                <a:cs typeface="Georgia" pitchFamily="34" charset="-120"/>
+              </a:rPr>
+              <a:t>~3–5 min</a:t>
+            </a:r>
+            <a:endParaRPr lang="en-US" sz="1400" dirty="0"/>
+          </a:p>
+        </p:txBody>
+      </p:sp>
+      <p:sp>
+        <p:nvSpPr>
+          <p:cNvPr id="15" name="Text 13"/>
+          <p:cNvSpPr/>
+          <p:nvPr/>
+        </p:nvSpPr>
+        <p:spPr>
+          <a:xfrm>
+            <a:off x="777240" y="3877056"/>
+            <a:ext cx="3383280" cy="320040"/>
+          </a:xfrm>
+          <a:prstGeom prst="rect">
+            <a:avLst/>
+          </a:prstGeom>
+          <a:noFill/>
+          <a:ln/>
+        </p:spPr>
+        <p:txBody>
+          <a:bodyPr wrap="square" lIns="0" tIns="0" rIns="0" bIns="0" rtlCol="0" anchor="ctr"/>
+          <a:lstStyle/>
+          <a:p>
+            <a:pPr indent="0" marL="0">
+              <a:buNone/>
+            </a:pPr>
+            <a:r>
+              <a:rPr lang="en-US" sz="1200" dirty="0">
+                <a:solidFill>
+                  <a:srgbClr val="1E293B"/>
+                </a:solidFill>
+                <a:latin typeface="Calibri" pitchFamily="34" charset="0"/>
+                <a:ea typeface="Calibri" pitchFamily="34" charset="-122"/>
+                <a:cs typeface="Calibri" pitchFamily="34" charset="-120"/>
+              </a:rPr>
+              <a:t>Capacidade total/dia</a:t>
+            </a:r>
+            <a:endParaRPr lang="en-US" sz="1200" dirty="0"/>
+          </a:p>
+        </p:txBody>
+      </p:sp>
+      <p:sp>
+        <p:nvSpPr>
+          <p:cNvPr id="16" name="Text 14"/>
+          <p:cNvSpPr/>
+          <p:nvPr/>
+        </p:nvSpPr>
+        <p:spPr>
+          <a:xfrm>
+            <a:off x="4160520" y="3877056"/>
+            <a:ext cx="1600200" cy="320040"/>
+          </a:xfrm>
+          <a:prstGeom prst="rect">
+            <a:avLst/>
+          </a:prstGeom>
+          <a:noFill/>
+          <a:ln/>
+        </p:spPr>
+        <p:txBody>
+          <a:bodyPr wrap="square" lIns="0" tIns="0" rIns="0" bIns="0" rtlCol="0" anchor="ctr"/>
+          <a:lstStyle/>
+          <a:p>
+            <a:pPr algn="r" indent="0" marL="0">
+              <a:buNone/>
+            </a:pPr>
+            <a:r>
+              <a:rPr lang="en-US" sz="1400" b="1" dirty="0">
+                <a:solidFill>
+                  <a:srgbClr val="D65A4B"/>
+                </a:solidFill>
+                <a:latin typeface="Georgia" pitchFamily="34" charset="0"/>
+                <a:ea typeface="Georgia" pitchFamily="34" charset="-122"/>
+                <a:cs typeface="Georgia" pitchFamily="34" charset="-120"/>
+              </a:rPr>
+              <a:t>1.000 pub.</a:t>
+            </a:r>
+            <a:endParaRPr lang="en-US" sz="1400" dirty="0"/>
+          </a:p>
+        </p:txBody>
+      </p:sp>
+      <p:sp>
+        <p:nvSpPr>
+          <p:cNvPr id="17" name="Shape 15"/>
+          <p:cNvSpPr/>
+          <p:nvPr/>
+        </p:nvSpPr>
+        <p:spPr>
+          <a:xfrm>
+            <a:off x="6172200" y="2148840"/>
+            <a:ext cx="5440680" cy="2103120"/>
           </a:xfrm>
           <a:prstGeom prst="rect">
             <a:avLst/>
@@ -2905,14 +3282,390 @@
       </p:sp>
       <p:sp>
         <p:nvSpPr>
-          <p:cNvPr id="11" name="Shape 8"/>
-          <p:cNvSpPr/>
-          <p:nvPr/>
-        </p:nvSpPr>
-        <p:spPr>
-          <a:xfrm>
-            <a:off x="548640" y="3291840"/>
-            <a:ext cx="128016" cy="1188720"/>
+          <p:cNvPr id="18" name="Shape 16"/>
+          <p:cNvSpPr/>
+          <p:nvPr/>
+        </p:nvSpPr>
+        <p:spPr>
+          <a:xfrm>
+            <a:off x="6172200" y="2148840"/>
+            <a:ext cx="5440680" cy="502920"/>
+          </a:xfrm>
+          <a:prstGeom prst="rect">
+            <a:avLst/>
+          </a:prstGeom>
+          <a:solidFill>
+            <a:srgbClr val="1E7BFF"/>
+          </a:solidFill>
+          <a:ln w="12700">
+            <a:solidFill>
+              <a:srgbClr val="1E7BFF"/>
+            </a:solidFill>
+            <a:prstDash val="solid"/>
+          </a:ln>
+        </p:spPr>
+      </p:sp>
+      <p:sp>
+        <p:nvSpPr>
+          <p:cNvPr id="19" name="Text 17"/>
+          <p:cNvSpPr/>
+          <p:nvPr/>
+        </p:nvSpPr>
+        <p:spPr>
+          <a:xfrm>
+            <a:off x="6400800" y="2240280"/>
+            <a:ext cx="4983480" cy="320040"/>
+          </a:xfrm>
+          <a:prstGeom prst="rect">
+            <a:avLst/>
+          </a:prstGeom>
+          <a:noFill/>
+          <a:ln/>
+        </p:spPr>
+        <p:txBody>
+          <a:bodyPr wrap="square" lIns="0" tIns="0" rIns="0" bIns="0" rtlCol="0" anchor="ctr"/>
+          <a:lstStyle/>
+          <a:p>
+            <a:pPr indent="0" marL="0">
+              <a:buNone/>
+            </a:pPr>
+            <a:r>
+              <a:rPr lang="en-US" sz="1200" b="1" spc="400" kern="0" dirty="0">
+                <a:solidFill>
+                  <a:srgbClr val="FFFFFF"/>
+                </a:solidFill>
+                <a:latin typeface="Calibri" pitchFamily="34" charset="0"/>
+                <a:ea typeface="Calibri" pitchFamily="34" charset="-122"/>
+                <a:cs typeface="Calibri" pitchFamily="34" charset="-120"/>
+              </a:rPr>
+              <a:t>COM DUNAFLOW · IA + AUTOMAÇÃO</a:t>
+            </a:r>
+            <a:endParaRPr lang="en-US" sz="1200" dirty="0"/>
+          </a:p>
+        </p:txBody>
+      </p:sp>
+      <p:sp>
+        <p:nvSpPr>
+          <p:cNvPr id="20" name="Text 18"/>
+          <p:cNvSpPr/>
+          <p:nvPr/>
+        </p:nvSpPr>
+        <p:spPr>
+          <a:xfrm>
+            <a:off x="6400800" y="2834640"/>
+            <a:ext cx="3383280" cy="320040"/>
+          </a:xfrm>
+          <a:prstGeom prst="rect">
+            <a:avLst/>
+          </a:prstGeom>
+          <a:noFill/>
+          <a:ln/>
+        </p:spPr>
+        <p:txBody>
+          <a:bodyPr wrap="square" lIns="0" tIns="0" rIns="0" bIns="0" rtlCol="0" anchor="ctr"/>
+          <a:lstStyle/>
+          <a:p>
+            <a:pPr indent="0" marL="0">
+              <a:buNone/>
+            </a:pPr>
+            <a:r>
+              <a:rPr lang="en-US" sz="1200" dirty="0">
+                <a:solidFill>
+                  <a:srgbClr val="1E293B"/>
+                </a:solidFill>
+                <a:latin typeface="Calibri" pitchFamily="34" charset="0"/>
+                <a:ea typeface="Calibri" pitchFamily="34" charset="-122"/>
+                <a:cs typeface="Calibri" pitchFamily="34" charset="-120"/>
+              </a:rPr>
+              <a:t>Equipe dedicada (revisão HITL)</a:t>
+            </a:r>
+            <a:endParaRPr lang="en-US" sz="1200" dirty="0"/>
+          </a:p>
+        </p:txBody>
+      </p:sp>
+      <p:sp>
+        <p:nvSpPr>
+          <p:cNvPr id="21" name="Text 19"/>
+          <p:cNvSpPr/>
+          <p:nvPr/>
+        </p:nvSpPr>
+        <p:spPr>
+          <a:xfrm>
+            <a:off x="9784080" y="2834640"/>
+            <a:ext cx="1600200" cy="320040"/>
+          </a:xfrm>
+          <a:prstGeom prst="rect">
+            <a:avLst/>
+          </a:prstGeom>
+          <a:noFill/>
+          <a:ln/>
+        </p:spPr>
+        <p:txBody>
+          <a:bodyPr wrap="square" lIns="0" tIns="0" rIns="0" bIns="0" rtlCol="0" anchor="ctr"/>
+          <a:lstStyle/>
+          <a:p>
+            <a:pPr algn="r" indent="0" marL="0">
+              <a:buNone/>
+            </a:pPr>
+            <a:r>
+              <a:rPr lang="en-US" sz="1400" b="1" dirty="0">
+                <a:solidFill>
+                  <a:srgbClr val="1558CC"/>
+                </a:solidFill>
+                <a:latin typeface="Georgia" pitchFamily="34" charset="0"/>
+                <a:ea typeface="Georgia" pitchFamily="34" charset="-122"/>
+                <a:cs typeface="Georgia" pitchFamily="34" charset="-120"/>
+              </a:rPr>
+              <a:t>2 pessoas</a:t>
+            </a:r>
+            <a:endParaRPr lang="en-US" sz="1400" dirty="0"/>
+          </a:p>
+        </p:txBody>
+      </p:sp>
+      <p:sp>
+        <p:nvSpPr>
+          <p:cNvPr id="22" name="Text 20"/>
+          <p:cNvSpPr/>
+          <p:nvPr/>
+        </p:nvSpPr>
+        <p:spPr>
+          <a:xfrm>
+            <a:off x="6400800" y="3182112"/>
+            <a:ext cx="3383280" cy="320040"/>
+          </a:xfrm>
+          <a:prstGeom prst="rect">
+            <a:avLst/>
+          </a:prstGeom>
+          <a:noFill/>
+          <a:ln/>
+        </p:spPr>
+        <p:txBody>
+          <a:bodyPr wrap="square" lIns="0" tIns="0" rIns="0" bIns="0" rtlCol="0" anchor="ctr"/>
+          <a:lstStyle/>
+          <a:p>
+            <a:pPr indent="0" marL="0">
+              <a:buNone/>
+            </a:pPr>
+            <a:r>
+              <a:rPr lang="en-US" sz="1200" dirty="0">
+                <a:solidFill>
+                  <a:srgbClr val="1E293B"/>
+                </a:solidFill>
+                <a:latin typeface="Calibri" pitchFamily="34" charset="0"/>
+                <a:ea typeface="Calibri" pitchFamily="34" charset="-122"/>
+                <a:cs typeface="Calibri" pitchFamily="34" charset="-120"/>
+              </a:rPr>
+              <a:t>Publicações por pessoa/dia</a:t>
+            </a:r>
+            <a:endParaRPr lang="en-US" sz="1200" dirty="0"/>
+          </a:p>
+        </p:txBody>
+      </p:sp>
+      <p:sp>
+        <p:nvSpPr>
+          <p:cNvPr id="23" name="Text 21"/>
+          <p:cNvSpPr/>
+          <p:nvPr/>
+        </p:nvSpPr>
+        <p:spPr>
+          <a:xfrm>
+            <a:off x="9784080" y="3182112"/>
+            <a:ext cx="1600200" cy="320040"/>
+          </a:xfrm>
+          <a:prstGeom prst="rect">
+            <a:avLst/>
+          </a:prstGeom>
+          <a:noFill/>
+          <a:ln/>
+        </p:spPr>
+        <p:txBody>
+          <a:bodyPr wrap="square" lIns="0" tIns="0" rIns="0" bIns="0" rtlCol="0" anchor="ctr"/>
+          <a:lstStyle/>
+          <a:p>
+            <a:pPr algn="r" indent="0" marL="0">
+              <a:buNone/>
+            </a:pPr>
+            <a:r>
+              <a:rPr lang="en-US" sz="1400" b="1" dirty="0">
+                <a:solidFill>
+                  <a:srgbClr val="1558CC"/>
+                </a:solidFill>
+                <a:latin typeface="Georgia" pitchFamily="34" charset="0"/>
+                <a:ea typeface="Georgia" pitchFamily="34" charset="-122"/>
+                <a:cs typeface="Georgia" pitchFamily="34" charset="-120"/>
+              </a:rPr>
+              <a:t>~500</a:t>
+            </a:r>
+            <a:endParaRPr lang="en-US" sz="1400" dirty="0"/>
+          </a:p>
+        </p:txBody>
+      </p:sp>
+      <p:sp>
+        <p:nvSpPr>
+          <p:cNvPr id="24" name="Text 22"/>
+          <p:cNvSpPr/>
+          <p:nvPr/>
+        </p:nvSpPr>
+        <p:spPr>
+          <a:xfrm>
+            <a:off x="6400800" y="3529584"/>
+            <a:ext cx="3383280" cy="320040"/>
+          </a:xfrm>
+          <a:prstGeom prst="rect">
+            <a:avLst/>
+          </a:prstGeom>
+          <a:noFill/>
+          <a:ln/>
+        </p:spPr>
+        <p:txBody>
+          <a:bodyPr wrap="square" lIns="0" tIns="0" rIns="0" bIns="0" rtlCol="0" anchor="ctr"/>
+          <a:lstStyle/>
+          <a:p>
+            <a:pPr indent="0" marL="0">
+              <a:buNone/>
+            </a:pPr>
+            <a:r>
+              <a:rPr lang="en-US" sz="1200" dirty="0">
+                <a:solidFill>
+                  <a:srgbClr val="1E293B"/>
+                </a:solidFill>
+                <a:latin typeface="Calibri" pitchFamily="34" charset="0"/>
+                <a:ea typeface="Calibri" pitchFamily="34" charset="-122"/>
+                <a:cs typeface="Calibri" pitchFamily="34" charset="-120"/>
+              </a:rPr>
+              <a:t>Tempo humano por publicação</a:t>
+            </a:r>
+            <a:endParaRPr lang="en-US" sz="1200" dirty="0"/>
+          </a:p>
+        </p:txBody>
+      </p:sp>
+      <p:sp>
+        <p:nvSpPr>
+          <p:cNvPr id="25" name="Text 23"/>
+          <p:cNvSpPr/>
+          <p:nvPr/>
+        </p:nvSpPr>
+        <p:spPr>
+          <a:xfrm>
+            <a:off x="9784080" y="3529584"/>
+            <a:ext cx="1600200" cy="320040"/>
+          </a:xfrm>
+          <a:prstGeom prst="rect">
+            <a:avLst/>
+          </a:prstGeom>
+          <a:noFill/>
+          <a:ln/>
+        </p:spPr>
+        <p:txBody>
+          <a:bodyPr wrap="square" lIns="0" tIns="0" rIns="0" bIns="0" rtlCol="0" anchor="ctr"/>
+          <a:lstStyle/>
+          <a:p>
+            <a:pPr algn="r" indent="0" marL="0">
+              <a:buNone/>
+            </a:pPr>
+            <a:r>
+              <a:rPr lang="en-US" sz="1400" b="1" dirty="0">
+                <a:solidFill>
+                  <a:srgbClr val="1558CC"/>
+                </a:solidFill>
+                <a:latin typeface="Georgia" pitchFamily="34" charset="0"/>
+                <a:ea typeface="Georgia" pitchFamily="34" charset="-122"/>
+                <a:cs typeface="Georgia" pitchFamily="34" charset="-120"/>
+              </a:rPr>
+              <a:t>~5–10 s</a:t>
+            </a:r>
+            <a:endParaRPr lang="en-US" sz="1400" dirty="0"/>
+          </a:p>
+        </p:txBody>
+      </p:sp>
+      <p:sp>
+        <p:nvSpPr>
+          <p:cNvPr id="26" name="Text 24"/>
+          <p:cNvSpPr/>
+          <p:nvPr/>
+        </p:nvSpPr>
+        <p:spPr>
+          <a:xfrm>
+            <a:off x="6400800" y="3877056"/>
+            <a:ext cx="3383280" cy="320040"/>
+          </a:xfrm>
+          <a:prstGeom prst="rect">
+            <a:avLst/>
+          </a:prstGeom>
+          <a:noFill/>
+          <a:ln/>
+        </p:spPr>
+        <p:txBody>
+          <a:bodyPr wrap="square" lIns="0" tIns="0" rIns="0" bIns="0" rtlCol="0" anchor="ctr"/>
+          <a:lstStyle/>
+          <a:p>
+            <a:pPr indent="0" marL="0">
+              <a:buNone/>
+            </a:pPr>
+            <a:r>
+              <a:rPr lang="en-US" sz="1200" dirty="0">
+                <a:solidFill>
+                  <a:srgbClr val="1E293B"/>
+                </a:solidFill>
+                <a:latin typeface="Calibri" pitchFamily="34" charset="0"/>
+                <a:ea typeface="Calibri" pitchFamily="34" charset="-122"/>
+                <a:cs typeface="Calibri" pitchFamily="34" charset="-120"/>
+              </a:rPr>
+              <a:t>Capacidade total/dia</a:t>
+            </a:r>
+            <a:endParaRPr lang="en-US" sz="1200" dirty="0"/>
+          </a:p>
+        </p:txBody>
+      </p:sp>
+      <p:sp>
+        <p:nvSpPr>
+          <p:cNvPr id="27" name="Text 25"/>
+          <p:cNvSpPr/>
+          <p:nvPr/>
+        </p:nvSpPr>
+        <p:spPr>
+          <a:xfrm>
+            <a:off x="9784080" y="3877056"/>
+            <a:ext cx="1600200" cy="320040"/>
+          </a:xfrm>
+          <a:prstGeom prst="rect">
+            <a:avLst/>
+          </a:prstGeom>
+          <a:noFill/>
+          <a:ln/>
+        </p:spPr>
+        <p:txBody>
+          <a:bodyPr wrap="square" lIns="0" tIns="0" rIns="0" bIns="0" rtlCol="0" anchor="ctr"/>
+          <a:lstStyle/>
+          <a:p>
+            <a:pPr algn="r" indent="0" marL="0">
+              <a:buNone/>
+            </a:pPr>
+            <a:r>
+              <a:rPr lang="en-US" sz="1400" b="1" dirty="0">
+                <a:solidFill>
+                  <a:srgbClr val="1558CC"/>
+                </a:solidFill>
+                <a:latin typeface="Georgia" pitchFamily="34" charset="0"/>
+                <a:ea typeface="Georgia" pitchFamily="34" charset="-122"/>
+                <a:cs typeface="Georgia" pitchFamily="34" charset="-120"/>
+              </a:rPr>
+              <a:t>5.000+ pub.</a:t>
+            </a:r>
+            <a:endParaRPr lang="en-US" sz="1400" dirty="0"/>
+          </a:p>
+        </p:txBody>
+      </p:sp>
+      <p:sp>
+        <p:nvSpPr>
+          <p:cNvPr id="28" name="Shape 26"/>
+          <p:cNvSpPr/>
+          <p:nvPr/>
+        </p:nvSpPr>
+        <p:spPr>
+          <a:xfrm>
+            <a:off x="548640" y="4343400"/>
+            <a:ext cx="11064240" cy="2103120"/>
           </a:xfrm>
           <a:prstGeom prst="rect">
             <a:avLst/>
@@ -2926,11 +3679,237 @@
             </a:solidFill>
             <a:prstDash val="solid"/>
           </a:ln>
-        </p:spPr>
+          <a:effectLst>
+            <a:outerShdw sx="100000" sy="100000" kx="0" ky="0" algn="bl" rotWithShape="0" blurRad="177800" dist="50800" dir="5400000">
+              <a:srgbClr val="000000">
+                <a:alpha val="18000"/>
+              </a:srgbClr>
+            </a:outerShdw>
+          </a:effectLst>
+        </p:spPr>
+      </p:sp>
+      <p:sp>
+        <p:nvSpPr>
+          <p:cNvPr id="29" name="Shape 27"/>
+          <p:cNvSpPr/>
+          <p:nvPr/>
+        </p:nvSpPr>
+        <p:spPr>
+          <a:xfrm>
+            <a:off x="548640" y="4343400"/>
+            <a:ext cx="11064240" cy="73152"/>
+          </a:xfrm>
+          <a:prstGeom prst="rect">
+            <a:avLst/>
+          </a:prstGeom>
+          <a:solidFill>
+            <a:srgbClr val="1E7BFF"/>
+          </a:solidFill>
+          <a:ln w="12700">
+            <a:solidFill>
+              <a:srgbClr val="1E7BFF"/>
+            </a:solidFill>
+            <a:prstDash val="solid"/>
+          </a:ln>
+        </p:spPr>
+      </p:sp>
+      <p:sp>
+        <p:nvSpPr>
+          <p:cNvPr id="30" name="Text 28"/>
+          <p:cNvSpPr/>
+          <p:nvPr/>
+        </p:nvSpPr>
+        <p:spPr>
+          <a:xfrm>
+            <a:off x="777240" y="4480560"/>
+            <a:ext cx="10515600" cy="365760"/>
+          </a:xfrm>
+          <a:prstGeom prst="rect">
+            <a:avLst/>
+          </a:prstGeom>
+          <a:noFill/>
+          <a:ln/>
+        </p:spPr>
+        <p:txBody>
+          <a:bodyPr wrap="square" lIns="0" tIns="0" rIns="0" bIns="0" rtlCol="0" anchor="ctr"/>
+          <a:lstStyle/>
+          <a:p>
+            <a:pPr indent="0" marL="0">
+              <a:buNone/>
+            </a:pPr>
+            <a:r>
+              <a:rPr lang="en-US" sz="1800" b="1" dirty="0">
+                <a:solidFill>
+                  <a:srgbClr val="FFFFFF"/>
+                </a:solidFill>
+                <a:latin typeface="Georgia" pitchFamily="34" charset="0"/>
+                <a:ea typeface="Georgia" pitchFamily="34" charset="-122"/>
+                <a:cs typeface="Georgia" pitchFamily="34" charset="-120"/>
+              </a:rPr>
+              <a:t>Duas formas de capturar o ganho</a:t>
+            </a:r>
+            <a:endParaRPr lang="en-US" sz="1800" dirty="0"/>
+          </a:p>
+        </p:txBody>
       </p:sp>
       <p:pic>
         <p:nvPicPr>
-          <p:cNvPr id="12" name="Image 1" descr="preencoded.png">    </p:cNvPr>
+          <p:cNvPr id="31" name="Image 0" descr="preencoded.png">    </p:cNvPr>
+          <p:cNvPicPr>
+            <a:picLocks noChangeAspect="1"/>
+          </p:cNvPicPr>
+          <p:nvPr/>
+        </p:nvPicPr>
+        <p:blipFill>
+          <a:blip r:embed="rId1"/>
+          <a:stretch>
+            <a:fillRect/>
+          </a:stretch>
+        </p:blipFill>
+        <p:spPr>
+          <a:xfrm>
+            <a:off x="777240" y="4983480"/>
+            <a:ext cx="384048" cy="384048"/>
+          </a:xfrm>
+          <a:prstGeom prst="rect">
+            <a:avLst/>
+          </a:prstGeom>
+        </p:spPr>
+      </p:pic>
+      <p:sp>
+        <p:nvSpPr>
+          <p:cNvPr id="32" name="Text 29"/>
+          <p:cNvSpPr/>
+          <p:nvPr/>
+        </p:nvSpPr>
+        <p:spPr>
+          <a:xfrm>
+            <a:off x="1280160" y="5001768"/>
+            <a:ext cx="4754880" cy="320040"/>
+          </a:xfrm>
+          <a:prstGeom prst="rect">
+            <a:avLst/>
+          </a:prstGeom>
+          <a:noFill/>
+          <a:ln/>
+        </p:spPr>
+        <p:txBody>
+          <a:bodyPr wrap="square" lIns="0" tIns="0" rIns="0" bIns="0" rtlCol="0" anchor="ctr"/>
+          <a:lstStyle/>
+          <a:p>
+            <a:pPr indent="0" marL="0">
+              <a:buNone/>
+            </a:pPr>
+            <a:r>
+              <a:rPr lang="en-US" sz="1100" b="1" spc="400" kern="0" dirty="0">
+                <a:solidFill>
+                  <a:srgbClr val="1E7BFF"/>
+                </a:solidFill>
+                <a:latin typeface="Calibri" pitchFamily="34" charset="0"/>
+                <a:ea typeface="Calibri" pitchFamily="34" charset="-122"/>
+                <a:cs typeface="Calibri" pitchFamily="34" charset="-120"/>
+              </a:rPr>
+              <a:t>REALOCAÇÃO DE TIME</a:t>
+            </a:r>
+            <a:endParaRPr lang="en-US" sz="1100" dirty="0"/>
+          </a:p>
+        </p:txBody>
+      </p:sp>
+      <p:sp>
+        <p:nvSpPr>
+          <p:cNvPr id="33" name="Text 30"/>
+          <p:cNvSpPr/>
+          <p:nvPr/>
+        </p:nvSpPr>
+        <p:spPr>
+          <a:xfrm>
+            <a:off x="777240" y="5440680"/>
+            <a:ext cx="5257800" cy="548640"/>
+          </a:xfrm>
+          <a:prstGeom prst="rect">
+            <a:avLst/>
+          </a:prstGeom>
+          <a:noFill/>
+          <a:ln/>
+        </p:spPr>
+        <p:txBody>
+          <a:bodyPr wrap="square" lIns="0" tIns="0" rIns="0" bIns="0" rtlCol="0" anchor="ctr"/>
+          <a:lstStyle/>
+          <a:p>
+            <a:pPr indent="0" marL="0">
+              <a:buNone/>
+            </a:pPr>
+            <a:r>
+              <a:rPr lang="en-US" sz="4000" b="1" dirty="0">
+                <a:solidFill>
+                  <a:srgbClr val="FFFFFF"/>
+                </a:solidFill>
+                <a:latin typeface="Georgia" pitchFamily="34" charset="0"/>
+                <a:ea typeface="Georgia" pitchFamily="34" charset="-122"/>
+                <a:cs typeface="Georgia" pitchFamily="34" charset="-120"/>
+              </a:rPr>
+              <a:t>8 </a:t>
+            </a:r>
+            <a:pPr indent="0" marL="0">
+              <a:buNone/>
+            </a:pPr>
+            <a:r>
+              <a:rPr lang="en-US" sz="1400" dirty="0">
+                <a:solidFill>
+                  <a:srgbClr val="DCE6F7"/>
+                </a:solidFill>
+                <a:latin typeface="Calibri" pitchFamily="34" charset="0"/>
+                <a:ea typeface="Calibri" pitchFamily="34" charset="-122"/>
+                <a:cs typeface="Calibri" pitchFamily="34" charset="-120"/>
+              </a:rPr>
+              <a:t>FTEs liberados</a:t>
+            </a:r>
+            <a:endParaRPr lang="en-US" sz="4000" dirty="0"/>
+          </a:p>
+        </p:txBody>
+      </p:sp>
+      <p:sp>
+        <p:nvSpPr>
+          <p:cNvPr id="34" name="Text 31"/>
+          <p:cNvSpPr/>
+          <p:nvPr/>
+        </p:nvSpPr>
+        <p:spPr>
+          <a:xfrm>
+            <a:off x="777240" y="6035040"/>
+            <a:ext cx="5257800" cy="502920"/>
+          </a:xfrm>
+          <a:prstGeom prst="rect">
+            <a:avLst/>
+          </a:prstGeom>
+          <a:noFill/>
+          <a:ln/>
+        </p:spPr>
+        <p:txBody>
+          <a:bodyPr wrap="square" lIns="0" tIns="0" rIns="0" bIns="0" rtlCol="0" anchor="ctr"/>
+          <a:lstStyle/>
+          <a:p>
+            <a:pPr indent="0" marL="0">
+              <a:buNone/>
+            </a:pPr>
+            <a:r>
+              <a:rPr lang="en-US" sz="1050" dirty="0">
+                <a:solidFill>
+                  <a:srgbClr val="DCE6F7"/>
+                </a:solidFill>
+                <a:latin typeface="Calibri" pitchFamily="34" charset="0"/>
+                <a:ea typeface="Calibri" pitchFamily="34" charset="-122"/>
+                <a:cs typeface="Calibri" pitchFamily="34" charset="-120"/>
+              </a:rPr>
+              <a:t>Mesmo volume (1.000 pub./dia) passa a ser processado por uma dupla em revisão HITL. Os 8 advogados liberados voltam ao jurídico de alto valor.</a:t>
+            </a:r>
+            <a:endParaRPr lang="en-US" sz="1050" dirty="0"/>
+          </a:p>
+        </p:txBody>
+      </p:sp>
+      <p:pic>
+        <p:nvPicPr>
+          <p:cNvPr id="35" name="Image 1" descr="preencoded.png">    </p:cNvPr>
           <p:cNvPicPr>
             <a:picLocks noChangeAspect="1"/>
           </p:cNvPicPr>
@@ -2944,8 +3923,8 @@
         </p:blipFill>
         <p:spPr>
           <a:xfrm>
-            <a:off x="914400" y="3611880"/>
-            <a:ext cx="548640" cy="548640"/>
+            <a:off x="6355080" y="4983480"/>
+            <a:ext cx="384048" cy="384048"/>
           </a:xfrm>
           <a:prstGeom prst="rect">
             <a:avLst/>
@@ -2954,308 +3933,138 @@
       </p:pic>
       <p:sp>
         <p:nvSpPr>
-          <p:cNvPr id="13" name="Text 9"/>
-          <p:cNvSpPr/>
-          <p:nvPr/>
-        </p:nvSpPr>
-        <p:spPr>
-          <a:xfrm>
-            <a:off x="1691640" y="3429000"/>
-            <a:ext cx="9784080" cy="411480"/>
-          </a:xfrm>
-          <a:prstGeom prst="rect">
-            <a:avLst/>
-          </a:prstGeom>
-          <a:noFill/>
-          <a:ln/>
-        </p:spPr>
-        <p:txBody>
-          <a:bodyPr wrap="square" lIns="0" tIns="0" rIns="0" bIns="0" rtlCol="0" anchor="ctr"/>
-          <a:lstStyle/>
-          <a:p>
-            <a:pPr indent="0" marL="0">
-              <a:buNone/>
-            </a:pPr>
-            <a:r>
-              <a:rPr lang="en-US" sz="1800" b="1" dirty="0">
-                <a:solidFill>
-                  <a:srgbClr val="0A1940"/>
+          <p:cNvPr id="36" name="Text 32"/>
+          <p:cNvSpPr/>
+          <p:nvPr/>
+        </p:nvSpPr>
+        <p:spPr>
+          <a:xfrm>
+            <a:off x="6858000" y="5001768"/>
+            <a:ext cx="4754880" cy="320040"/>
+          </a:xfrm>
+          <a:prstGeom prst="rect">
+            <a:avLst/>
+          </a:prstGeom>
+          <a:noFill/>
+          <a:ln/>
+        </p:spPr>
+        <p:txBody>
+          <a:bodyPr wrap="square" lIns="0" tIns="0" rIns="0" bIns="0" rtlCol="0" anchor="ctr"/>
+          <a:lstStyle/>
+          <a:p>
+            <a:pPr indent="0" marL="0">
+              <a:buNone/>
+            </a:pPr>
+            <a:r>
+              <a:rPr lang="en-US" sz="1100" b="1" spc="400" kern="0" dirty="0">
+                <a:solidFill>
+                  <a:srgbClr val="1E7BFF"/>
+                </a:solidFill>
+                <a:latin typeface="Calibri" pitchFamily="34" charset="0"/>
+                <a:ea typeface="Calibri" pitchFamily="34" charset="-122"/>
+                <a:cs typeface="Calibri" pitchFamily="34" charset="-120"/>
+              </a:rPr>
+              <a:t>ESCALA DE CAPACIDADE</a:t>
+            </a:r>
+            <a:endParaRPr lang="en-US" sz="1100" dirty="0"/>
+          </a:p>
+        </p:txBody>
+      </p:sp>
+      <p:sp>
+        <p:nvSpPr>
+          <p:cNvPr id="37" name="Text 33"/>
+          <p:cNvSpPr/>
+          <p:nvPr/>
+        </p:nvSpPr>
+        <p:spPr>
+          <a:xfrm>
+            <a:off x="6355080" y="5440680"/>
+            <a:ext cx="5257800" cy="548640"/>
+          </a:xfrm>
+          <a:prstGeom prst="rect">
+            <a:avLst/>
+          </a:prstGeom>
+          <a:noFill/>
+          <a:ln/>
+        </p:spPr>
+        <p:txBody>
+          <a:bodyPr wrap="square" lIns="0" tIns="0" rIns="0" bIns="0" rtlCol="0" anchor="ctr"/>
+          <a:lstStyle/>
+          <a:p>
+            <a:pPr indent="0" marL="0">
+              <a:buNone/>
+            </a:pPr>
+            <a:r>
+              <a:rPr lang="en-US" sz="4000" b="1" dirty="0">
+                <a:solidFill>
+                  <a:srgbClr val="FFFFFF"/>
                 </a:solidFill>
                 <a:latin typeface="Georgia" pitchFamily="34" charset="0"/>
                 <a:ea typeface="Georgia" pitchFamily="34" charset="-122"/>
                 <a:cs typeface="Georgia" pitchFamily="34" charset="-120"/>
               </a:rPr>
-              <a:t>Núcleo operacional</a:t>
-            </a:r>
-            <a:endParaRPr lang="en-US" sz="1800" dirty="0"/>
-          </a:p>
-        </p:txBody>
-      </p:sp>
-      <p:sp>
-        <p:nvSpPr>
-          <p:cNvPr id="14" name="Text 10"/>
-          <p:cNvSpPr/>
-          <p:nvPr/>
-        </p:nvSpPr>
-        <p:spPr>
-          <a:xfrm>
-            <a:off x="1691640" y="3858768"/>
-            <a:ext cx="9784080" cy="548640"/>
-          </a:xfrm>
-          <a:prstGeom prst="rect">
-            <a:avLst/>
-          </a:prstGeom>
-          <a:noFill/>
-          <a:ln/>
-        </p:spPr>
-        <p:txBody>
-          <a:bodyPr wrap="square" lIns="0" tIns="0" rIns="0" bIns="0" rtlCol="0" anchor="ctr"/>
-          <a:lstStyle/>
-          <a:p>
-            <a:pPr indent="0" marL="0">
-              <a:buNone/>
-            </a:pPr>
-            <a:r>
-              <a:rPr lang="en-US" sz="1300" dirty="0">
-                <a:solidFill>
-                  <a:srgbClr val="1E293B"/>
-                </a:solidFill>
-                <a:latin typeface="Calibri" pitchFamily="34" charset="0"/>
-                <a:ea typeface="Calibri" pitchFamily="34" charset="-122"/>
-                <a:cs typeface="Calibri" pitchFamily="34" charset="-120"/>
-              </a:rPr>
-              <a:t>FastAPI (Python 3.10) · PostgreSQL · SQLAlchemy · Alembic · APScheduler</a:t>
-            </a:r>
-            <a:endParaRPr lang="en-US" sz="1300" dirty="0"/>
-          </a:p>
-        </p:txBody>
-      </p:sp>
-      <p:sp>
-        <p:nvSpPr>
-          <p:cNvPr id="15" name="Shape 11"/>
-          <p:cNvSpPr/>
-          <p:nvPr/>
-        </p:nvSpPr>
-        <p:spPr>
-          <a:xfrm>
-            <a:off x="548640" y="4709160"/>
-            <a:ext cx="11064240" cy="1188720"/>
-          </a:xfrm>
-          <a:prstGeom prst="rect">
-            <a:avLst/>
-          </a:prstGeom>
-          <a:solidFill>
-            <a:srgbClr val="FFFFFF"/>
-          </a:solidFill>
-          <a:ln w="6350">
-            <a:solidFill>
-              <a:srgbClr val="E2E8F0"/>
-            </a:solidFill>
-            <a:prstDash val="solid"/>
-          </a:ln>
-          <a:effectLst>
-            <a:outerShdw sx="100000" sy="100000" kx="0" ky="0" algn="bl" rotWithShape="0" blurRad="127000" dist="38100" dir="5400000">
-              <a:srgbClr val="000000">
-                <a:alpha val="10000"/>
-              </a:srgbClr>
-            </a:outerShdw>
-          </a:effectLst>
-        </p:spPr>
-      </p:sp>
-      <p:sp>
-        <p:nvSpPr>
-          <p:cNvPr id="16" name="Shape 12"/>
-          <p:cNvSpPr/>
-          <p:nvPr/>
-        </p:nvSpPr>
-        <p:spPr>
-          <a:xfrm>
-            <a:off x="548640" y="4709160"/>
-            <a:ext cx="128016" cy="1188720"/>
-          </a:xfrm>
-          <a:prstGeom prst="rect">
-            <a:avLst/>
-          </a:prstGeom>
-          <a:solidFill>
-            <a:srgbClr val="1558CC"/>
-          </a:solidFill>
-          <a:ln w="12700">
-            <a:solidFill>
-              <a:srgbClr val="1558CC"/>
-            </a:solidFill>
-            <a:prstDash val="solid"/>
-          </a:ln>
-        </p:spPr>
-      </p:sp>
-      <p:pic>
-        <p:nvPicPr>
-          <p:cNvPr id="17" name="Image 2" descr="preencoded.png">    </p:cNvPr>
-          <p:cNvPicPr>
-            <a:picLocks noChangeAspect="1"/>
-          </p:cNvPicPr>
-          <p:nvPr/>
-        </p:nvPicPr>
-        <p:blipFill>
-          <a:blip r:embed="rId3"/>
-          <a:stretch>
-            <a:fillRect/>
-          </a:stretch>
-        </p:blipFill>
-        <p:spPr>
-          <a:xfrm>
-            <a:off x="914400" y="5029200"/>
-            <a:ext cx="548640" cy="548640"/>
-          </a:xfrm>
-          <a:prstGeom prst="rect">
-            <a:avLst/>
-          </a:prstGeom>
-        </p:spPr>
-      </p:pic>
-      <p:sp>
-        <p:nvSpPr>
-          <p:cNvPr id="18" name="Text 13"/>
-          <p:cNvSpPr/>
-          <p:nvPr/>
-        </p:nvSpPr>
-        <p:spPr>
-          <a:xfrm>
-            <a:off x="1691640" y="4846320"/>
-            <a:ext cx="9784080" cy="411480"/>
-          </a:xfrm>
-          <a:prstGeom prst="rect">
-            <a:avLst/>
-          </a:prstGeom>
-          <a:noFill/>
-          <a:ln/>
-        </p:spPr>
-        <p:txBody>
-          <a:bodyPr wrap="square" lIns="0" tIns="0" rIns="0" bIns="0" rtlCol="0" anchor="ctr"/>
-          <a:lstStyle/>
-          <a:p>
-            <a:pPr indent="0" marL="0">
-              <a:buNone/>
-            </a:pPr>
-            <a:r>
-              <a:rPr lang="en-US" sz="1800" b="1" dirty="0">
-                <a:solidFill>
-                  <a:srgbClr val="0A1940"/>
-                </a:solidFill>
-                <a:latin typeface="Georgia" pitchFamily="34" charset="0"/>
-                <a:ea typeface="Georgia" pitchFamily="34" charset="-122"/>
-                <a:cs typeface="Georgia" pitchFamily="34" charset="-120"/>
-              </a:rPr>
-              <a:t>Integrações e IA</a:t>
-            </a:r>
-            <a:endParaRPr lang="en-US" sz="1800" dirty="0"/>
-          </a:p>
-        </p:txBody>
-      </p:sp>
-      <p:sp>
-        <p:nvSpPr>
-          <p:cNvPr id="19" name="Text 14"/>
-          <p:cNvSpPr/>
-          <p:nvPr/>
-        </p:nvSpPr>
-        <p:spPr>
-          <a:xfrm>
-            <a:off x="1691640" y="5276088"/>
-            <a:ext cx="9784080" cy="548640"/>
-          </a:xfrm>
-          <a:prstGeom prst="rect">
-            <a:avLst/>
-          </a:prstGeom>
-          <a:noFill/>
-          <a:ln/>
-        </p:spPr>
-        <p:txBody>
-          <a:bodyPr wrap="square" lIns="0" tIns="0" rIns="0" bIns="0" rtlCol="0" anchor="ctr"/>
-          <a:lstStyle/>
-          <a:p>
-            <a:pPr indent="0" marL="0">
-              <a:buNone/>
-            </a:pPr>
-            <a:r>
-              <a:rPr lang="en-US" sz="1300" dirty="0">
-                <a:solidFill>
-                  <a:srgbClr val="1E293B"/>
-                </a:solidFill>
-                <a:latin typeface="Calibri" pitchFamily="34" charset="0"/>
-                <a:ea typeface="Calibri" pitchFamily="34" charset="-122"/>
-                <a:cs typeface="Calibri" pitchFamily="34" charset="-120"/>
-              </a:rPr>
-              <a:t>Legal One (REST + RPA/Playwright) · Claude Haiku 4.5 (Batch API) · DataJud (CNJ) · DJEN / Comunica</a:t>
-            </a:r>
-            <a:endParaRPr lang="en-US" sz="1300" dirty="0"/>
-          </a:p>
-        </p:txBody>
-      </p:sp>
-      <p:sp>
-        <p:nvSpPr>
-          <p:cNvPr id="20" name="Shape 15"/>
-          <p:cNvSpPr/>
-          <p:nvPr/>
-        </p:nvSpPr>
-        <p:spPr>
-          <a:xfrm>
-            <a:off x="548640" y="6172200"/>
-            <a:ext cx="11064240" cy="347472"/>
-          </a:xfrm>
-          <a:prstGeom prst="rect">
-            <a:avLst/>
-          </a:prstGeom>
-          <a:solidFill>
-            <a:srgbClr val="BFD7FF"/>
-          </a:solidFill>
-          <a:ln w="12700">
-            <a:solidFill>
-              <a:srgbClr val="BFD7FF"/>
-            </a:solidFill>
-            <a:prstDash val="solid"/>
-          </a:ln>
-        </p:spPr>
-      </p:sp>
-      <p:sp>
-        <p:nvSpPr>
-          <p:cNvPr id="21" name="Text 16"/>
-          <p:cNvSpPr/>
-          <p:nvPr/>
-        </p:nvSpPr>
-        <p:spPr>
-          <a:xfrm>
-            <a:off x="548640" y="6172200"/>
-            <a:ext cx="11064240" cy="347472"/>
-          </a:xfrm>
-          <a:prstGeom prst="rect">
-            <a:avLst/>
-          </a:prstGeom>
-          <a:noFill/>
-          <a:ln/>
-        </p:spPr>
-        <p:txBody>
-          <a:bodyPr wrap="square" lIns="0" tIns="0" rIns="0" bIns="0" rtlCol="0" anchor="ctr"/>
-          <a:lstStyle/>
-          <a:p>
-            <a:pPr algn="ctr" indent="0" marL="0">
-              <a:buNone/>
-            </a:pPr>
-            <a:r>
-              <a:rPr lang="en-US" sz="1100" i="1" dirty="0">
-                <a:solidFill>
-                  <a:srgbClr val="0A1940"/>
-                </a:solidFill>
-                <a:latin typeface="Calibri" pitchFamily="34" charset="0"/>
-                <a:ea typeface="Calibri" pitchFamily="34" charset="-122"/>
-                <a:cs typeface="Calibri" pitchFamily="34" charset="-120"/>
-              </a:rPr>
-              <a:t>Deploy em Coolify · Docker Compose · observabilidade estruturada em logs</a:t>
-            </a:r>
-            <a:endParaRPr lang="en-US" sz="1100" dirty="0"/>
-          </a:p>
-        </p:txBody>
-      </p:sp>
-      <p:sp>
-        <p:nvSpPr>
-          <p:cNvPr id="22" name="Shape 17"/>
+              <a:t>5× </a:t>
+            </a:r>
+            <a:pPr indent="0" marL="0">
+              <a:buNone/>
+            </a:pPr>
+            <a:r>
+              <a:rPr lang="en-US" sz="1400" dirty="0">
+                <a:solidFill>
+                  <a:srgbClr val="DCE6F7"/>
+                </a:solidFill>
+                <a:latin typeface="Calibri" pitchFamily="34" charset="0"/>
+                <a:ea typeface="Calibri" pitchFamily="34" charset="-122"/>
+                <a:cs typeface="Calibri" pitchFamily="34" charset="-120"/>
+              </a:rPr>
+              <a:t>volume com a mesma equipe</a:t>
+            </a:r>
+            <a:endParaRPr lang="en-US" sz="4000" dirty="0"/>
+          </a:p>
+        </p:txBody>
+      </p:sp>
+      <p:sp>
+        <p:nvSpPr>
+          <p:cNvPr id="38" name="Text 34"/>
+          <p:cNvSpPr/>
+          <p:nvPr/>
+        </p:nvSpPr>
+        <p:spPr>
+          <a:xfrm>
+            <a:off x="6355080" y="6035040"/>
+            <a:ext cx="5257800" cy="502920"/>
+          </a:xfrm>
+          <a:prstGeom prst="rect">
+            <a:avLst/>
+          </a:prstGeom>
+          <a:noFill/>
+          <a:ln/>
+        </p:spPr>
+        <p:txBody>
+          <a:bodyPr wrap="square" lIns="0" tIns="0" rIns="0" bIns="0" rtlCol="0" anchor="ctr"/>
+          <a:lstStyle/>
+          <a:p>
+            <a:pPr indent="0" marL="0">
+              <a:buNone/>
+            </a:pPr>
+            <a:r>
+              <a:rPr lang="en-US" sz="1050" dirty="0">
+                <a:solidFill>
+                  <a:srgbClr val="DCE6F7"/>
+                </a:solidFill>
+                <a:latin typeface="Calibri" pitchFamily="34" charset="0"/>
+                <a:ea typeface="Calibri" pitchFamily="34" charset="-122"/>
+                <a:cs typeface="Calibri" pitchFamily="34" charset="-120"/>
+              </a:rPr>
+              <a:t>Mantendo os 10, a capacidade sobe de 1.000 para ~5.000 publicações/dia sem contratar — acurácia IA de 85–90% com revisão humana só onde importa.</a:t>
+            </a:r>
+            <a:endParaRPr lang="en-US" sz="1050" dirty="0"/>
+          </a:p>
+        </p:txBody>
+      </p:sp>
+      <p:sp>
+        <p:nvSpPr>
+          <p:cNvPr id="39" name="Shape 35"/>
           <p:cNvSpPr/>
           <p:nvPr/>
         </p:nvSpPr>
@@ -3278,7 +4087,7 @@
       </p:sp>
       <p:sp>
         <p:nvSpPr>
-          <p:cNvPr id="23" name="Text 18"/>
+          <p:cNvPr id="40" name="Text 36"/>
           <p:cNvSpPr/>
           <p:nvPr/>
         </p:nvSpPr>
@@ -3317,7 +4126,7 @@
       </p:sp>
       <p:sp>
         <p:nvSpPr>
-          <p:cNvPr id="24" name="Text 19"/>
+          <p:cNvPr id="41" name="Text 37"/>
           <p:cNvSpPr/>
           <p:nvPr/>
         </p:nvSpPr>
@@ -3348,7 +4157,7 @@
                 <a:ea typeface="Calibri" pitchFamily="34" charset="-122"/>
                 <a:cs typeface="Calibri" pitchFamily="34" charset="-120"/>
               </a:rPr>
-              <a:t>10 / 14</a:t>
+              <a:t>10 / 15</a:t>
             </a:r>
             <a:endParaRPr lang="en-US" sz="900" dirty="0"/>
           </a:p>
@@ -3419,7 +4228,7 @@
                 <a:ea typeface="Calibri" pitchFamily="34" charset="-122"/>
                 <a:cs typeface="Calibri" pitchFamily="34" charset="-120"/>
               </a:rPr>
-              <a:t>PARA ONDE ESTAMOS INDO</a:t>
+              <a:t>ARQUITETURA EM UMA OLHADA</a:t>
             </a:r>
             <a:endParaRPr lang="en-US" sz="1100" dirty="0"/>
           </a:p>
@@ -3458,7 +4267,7 @@
                 <a:ea typeface="Georgia" pitchFamily="34" charset="-122"/>
                 <a:cs typeface="Georgia" pitchFamily="34" charset="-120"/>
               </a:rPr>
-              <a:t>Próximos passos do roadmap</a:t>
+              <a:t>Componentes principais e integrações</a:t>
             </a:r>
             <a:endParaRPr lang="en-US" sz="3000" dirty="0"/>
           </a:p>
@@ -3497,8 +4306,8 @@
         </p:nvSpPr>
         <p:spPr>
           <a:xfrm>
-            <a:off x="548640" y="1783080"/>
-            <a:ext cx="11064240" cy="749808"/>
+            <a:off x="548640" y="1874520"/>
+            <a:ext cx="11064240" cy="1188720"/>
           </a:xfrm>
           <a:prstGeom prst="rect">
             <a:avLst/>
@@ -3529,150 +4338,135 @@
         </p:nvSpPr>
         <p:spPr>
           <a:xfrm>
-            <a:off x="548640" y="1783080"/>
-            <a:ext cx="822960" cy="749808"/>
+            <a:off x="548640" y="1874520"/>
+            <a:ext cx="128016" cy="1188720"/>
           </a:xfrm>
           <a:prstGeom prst="rect">
             <a:avLst/>
           </a:prstGeom>
           <a:solidFill>
-            <a:srgbClr val="0A1940"/>
+            <a:srgbClr val="0EA5A4"/>
           </a:solidFill>
           <a:ln w="12700">
             <a:solidFill>
-              <a:srgbClr val="0A1940"/>
+              <a:srgbClr val="0EA5A4"/>
             </a:solidFill>
             <a:prstDash val="solid"/>
           </a:ln>
         </p:spPr>
       </p:sp>
-      <p:sp>
-        <p:nvSpPr>
-          <p:cNvPr id="7" name="Text 5"/>
-          <p:cNvSpPr/>
-          <p:nvPr/>
-        </p:nvSpPr>
-        <p:spPr>
-          <a:xfrm>
-            <a:off x="548640" y="1783080"/>
-            <a:ext cx="822960" cy="749808"/>
-          </a:xfrm>
-          <a:prstGeom prst="rect">
-            <a:avLst/>
-          </a:prstGeom>
-          <a:noFill/>
-          <a:ln/>
-        </p:spPr>
-        <p:txBody>
-          <a:bodyPr wrap="square" lIns="0" tIns="0" rIns="0" bIns="0" rtlCol="0" anchor="ctr"/>
-          <a:lstStyle/>
-          <a:p>
-            <a:pPr algn="ctr" indent="0" marL="0">
-              <a:buNone/>
-            </a:pPr>
-            <a:r>
-              <a:rPr lang="en-US" sz="2800" b="1" dirty="0">
-                <a:solidFill>
-                  <a:srgbClr val="1E7BFF"/>
+      <p:pic>
+        <p:nvPicPr>
+          <p:cNvPr id="7" name="Image 0" descr="preencoded.png">    </p:cNvPr>
+          <p:cNvPicPr>
+            <a:picLocks noChangeAspect="1"/>
+          </p:cNvPicPr>
+          <p:nvPr/>
+        </p:nvPicPr>
+        <p:blipFill>
+          <a:blip r:embed="rId1"/>
+          <a:stretch>
+            <a:fillRect/>
+          </a:stretch>
+        </p:blipFill>
+        <p:spPr>
+          <a:xfrm>
+            <a:off x="914400" y="2194560"/>
+            <a:ext cx="548640" cy="548640"/>
+          </a:xfrm>
+          <a:prstGeom prst="rect">
+            <a:avLst/>
+          </a:prstGeom>
+        </p:spPr>
+      </p:pic>
+      <p:sp>
+        <p:nvSpPr>
+          <p:cNvPr id="8" name="Text 5"/>
+          <p:cNvSpPr/>
+          <p:nvPr/>
+        </p:nvSpPr>
+        <p:spPr>
+          <a:xfrm>
+            <a:off x="1691640" y="2011680"/>
+            <a:ext cx="9784080" cy="411480"/>
+          </a:xfrm>
+          <a:prstGeom prst="rect">
+            <a:avLst/>
+          </a:prstGeom>
+          <a:noFill/>
+          <a:ln/>
+        </p:spPr>
+        <p:txBody>
+          <a:bodyPr wrap="square" lIns="0" tIns="0" rIns="0" bIns="0" rtlCol="0" anchor="ctr"/>
+          <a:lstStyle/>
+          <a:p>
+            <a:pPr indent="0" marL="0">
+              <a:buNone/>
+            </a:pPr>
+            <a:r>
+              <a:rPr lang="en-US" sz="1800" b="1" dirty="0">
+                <a:solidFill>
+                  <a:srgbClr val="0A1940"/>
                 </a:solidFill>
                 <a:latin typeface="Georgia" pitchFamily="34" charset="0"/>
                 <a:ea typeface="Georgia" pitchFamily="34" charset="-122"/>
                 <a:cs typeface="Georgia" pitchFamily="34" charset="-120"/>
               </a:rPr>
-              <a:t>1</a:t>
-            </a:r>
-            <a:endParaRPr lang="en-US" sz="2800" dirty="0"/>
-          </a:p>
-        </p:txBody>
-      </p:sp>
-      <p:sp>
-        <p:nvSpPr>
-          <p:cNvPr id="8" name="Text 6"/>
-          <p:cNvSpPr/>
-          <p:nvPr/>
-        </p:nvSpPr>
-        <p:spPr>
-          <a:xfrm>
-            <a:off x="1554480" y="1856232"/>
-            <a:ext cx="9966960" cy="347472"/>
-          </a:xfrm>
-          <a:prstGeom prst="rect">
-            <a:avLst/>
-          </a:prstGeom>
-          <a:noFill/>
-          <a:ln/>
-        </p:spPr>
-        <p:txBody>
-          <a:bodyPr wrap="square" lIns="0" tIns="0" rIns="0" bIns="0" rtlCol="0" anchor="ctr"/>
-          <a:lstStyle/>
-          <a:p>
-            <a:pPr indent="0" marL="0">
-              <a:buNone/>
-            </a:pPr>
-            <a:r>
-              <a:rPr lang="en-US" sz="1400" b="1" dirty="0">
-                <a:solidFill>
-                  <a:srgbClr val="111827"/>
-                </a:solidFill>
-                <a:latin typeface="Calibri" pitchFamily="34" charset="0"/>
-                <a:ea typeface="Calibri" pitchFamily="34" charset="-122"/>
-                <a:cs typeface="Calibri" pitchFamily="34" charset="-120"/>
-              </a:rPr>
-              <a:t>Ampliar a régua de maturidade</a:t>
-            </a:r>
-            <a:endParaRPr lang="en-US" sz="1400" dirty="0"/>
-          </a:p>
-        </p:txBody>
-      </p:sp>
-      <p:sp>
-        <p:nvSpPr>
-          <p:cNvPr id="9" name="Text 7"/>
-          <p:cNvSpPr/>
-          <p:nvPr/>
-        </p:nvSpPr>
-        <p:spPr>
-          <a:xfrm>
-            <a:off x="1554480" y="2167128"/>
-            <a:ext cx="9966960" cy="347472"/>
-          </a:xfrm>
-          <a:prstGeom prst="rect">
-            <a:avLst/>
-          </a:prstGeom>
-          <a:noFill/>
-          <a:ln/>
-        </p:spPr>
-        <p:txBody>
-          <a:bodyPr wrap="square" lIns="0" tIns="0" rIns="0" bIns="0" rtlCol="0" anchor="ctr"/>
-          <a:lstStyle/>
-          <a:p>
-            <a:pPr indent="0" marL="0">
-              <a:buNone/>
-            </a:pPr>
-            <a:r>
-              <a:rPr lang="en-US" sz="1150" dirty="0">
-                <a:solidFill>
-                  <a:srgbClr val="64748B"/>
-                </a:solidFill>
-                <a:latin typeface="Calibri" pitchFamily="34" charset="0"/>
-                <a:ea typeface="Calibri" pitchFamily="34" charset="-122"/>
-                <a:cs typeface="Calibri" pitchFamily="34" charset="-120"/>
-              </a:rPr>
-              <a:t>Incorporar movimentos processuais críticos e prazos sugeridos.</a:t>
-            </a:r>
-            <a:endParaRPr lang="en-US" sz="1150" dirty="0"/>
-          </a:p>
-        </p:txBody>
-      </p:sp>
-      <p:sp>
-        <p:nvSpPr>
-          <p:cNvPr id="10" name="Shape 8"/>
-          <p:cNvSpPr/>
-          <p:nvPr/>
-        </p:nvSpPr>
-        <p:spPr>
-          <a:xfrm>
-            <a:off x="548640" y="2670048"/>
-            <a:ext cx="11064240" cy="749808"/>
+              <a:t>Experiência</a:t>
+            </a:r>
+            <a:endParaRPr lang="en-US" sz="1800" dirty="0"/>
+          </a:p>
+        </p:txBody>
+      </p:sp>
+      <p:sp>
+        <p:nvSpPr>
+          <p:cNvPr id="9" name="Text 6"/>
+          <p:cNvSpPr/>
+          <p:nvPr/>
+        </p:nvSpPr>
+        <p:spPr>
+          <a:xfrm>
+            <a:off x="1691640" y="2441448"/>
+            <a:ext cx="9784080" cy="548640"/>
+          </a:xfrm>
+          <a:prstGeom prst="rect">
+            <a:avLst/>
+          </a:prstGeom>
+          <a:noFill/>
+          <a:ln/>
+        </p:spPr>
+        <p:txBody>
+          <a:bodyPr wrap="square" lIns="0" tIns="0" rIns="0" bIns="0" rtlCol="0" anchor="ctr"/>
+          <a:lstStyle/>
+          <a:p>
+            <a:pPr indent="0" marL="0">
+              <a:buNone/>
+            </a:pPr>
+            <a:r>
+              <a:rPr lang="en-US" sz="1300" dirty="0">
+                <a:solidFill>
+                  <a:srgbClr val="1E293B"/>
+                </a:solidFill>
+                <a:latin typeface="Calibri" pitchFamily="34" charset="0"/>
+                <a:ea typeface="Calibri" pitchFamily="34" charset="-122"/>
+                <a:cs typeface="Calibri" pitchFamily="34" charset="-120"/>
+              </a:rPr>
+              <a:t>React 18 · TypeScript · Vite · shadcn/ui · Tailwind</a:t>
+            </a:r>
+            <a:endParaRPr lang="en-US" sz="1300" dirty="0"/>
+          </a:p>
+        </p:txBody>
+      </p:sp>
+      <p:sp>
+        <p:nvSpPr>
+          <p:cNvPr id="10" name="Shape 7"/>
+          <p:cNvSpPr/>
+          <p:nvPr/>
+        </p:nvSpPr>
+        <p:spPr>
+          <a:xfrm>
+            <a:off x="548640" y="3291840"/>
+            <a:ext cx="11064240" cy="1188720"/>
           </a:xfrm>
           <a:prstGeom prst="rect">
             <a:avLst/>
@@ -3697,14 +4491,14 @@
       </p:sp>
       <p:sp>
         <p:nvSpPr>
-          <p:cNvPr id="11" name="Shape 9"/>
-          <p:cNvSpPr/>
-          <p:nvPr/>
-        </p:nvSpPr>
-        <p:spPr>
-          <a:xfrm>
-            <a:off x="548640" y="2670048"/>
-            <a:ext cx="822960" cy="749808"/>
+          <p:cNvPr id="11" name="Shape 8"/>
+          <p:cNvSpPr/>
+          <p:nvPr/>
+        </p:nvSpPr>
+        <p:spPr>
+          <a:xfrm>
+            <a:off x="548640" y="3291840"/>
+            <a:ext cx="128016" cy="1188720"/>
           </a:xfrm>
           <a:prstGeom prst="rect">
             <a:avLst/>
@@ -3720,133 +4514,118 @@
           </a:ln>
         </p:spPr>
       </p:sp>
-      <p:sp>
-        <p:nvSpPr>
-          <p:cNvPr id="12" name="Text 10"/>
-          <p:cNvSpPr/>
-          <p:nvPr/>
-        </p:nvSpPr>
-        <p:spPr>
-          <a:xfrm>
-            <a:off x="548640" y="2670048"/>
-            <a:ext cx="822960" cy="749808"/>
-          </a:xfrm>
-          <a:prstGeom prst="rect">
-            <a:avLst/>
-          </a:prstGeom>
-          <a:noFill/>
-          <a:ln/>
-        </p:spPr>
-        <p:txBody>
-          <a:bodyPr wrap="square" lIns="0" tIns="0" rIns="0" bIns="0" rtlCol="0" anchor="ctr"/>
-          <a:lstStyle/>
-          <a:p>
-            <a:pPr algn="ctr" indent="0" marL="0">
-              <a:buNone/>
-            </a:pPr>
-            <a:r>
-              <a:rPr lang="en-US" sz="2800" b="1" dirty="0">
-                <a:solidFill>
-                  <a:srgbClr val="1E7BFF"/>
+      <p:pic>
+        <p:nvPicPr>
+          <p:cNvPr id="12" name="Image 1" descr="preencoded.png">    </p:cNvPr>
+          <p:cNvPicPr>
+            <a:picLocks noChangeAspect="1"/>
+          </p:cNvPicPr>
+          <p:nvPr/>
+        </p:nvPicPr>
+        <p:blipFill>
+          <a:blip r:embed="rId2"/>
+          <a:stretch>
+            <a:fillRect/>
+          </a:stretch>
+        </p:blipFill>
+        <p:spPr>
+          <a:xfrm>
+            <a:off x="914400" y="3611880"/>
+            <a:ext cx="548640" cy="548640"/>
+          </a:xfrm>
+          <a:prstGeom prst="rect">
+            <a:avLst/>
+          </a:prstGeom>
+        </p:spPr>
+      </p:pic>
+      <p:sp>
+        <p:nvSpPr>
+          <p:cNvPr id="13" name="Text 9"/>
+          <p:cNvSpPr/>
+          <p:nvPr/>
+        </p:nvSpPr>
+        <p:spPr>
+          <a:xfrm>
+            <a:off x="1691640" y="3429000"/>
+            <a:ext cx="9784080" cy="411480"/>
+          </a:xfrm>
+          <a:prstGeom prst="rect">
+            <a:avLst/>
+          </a:prstGeom>
+          <a:noFill/>
+          <a:ln/>
+        </p:spPr>
+        <p:txBody>
+          <a:bodyPr wrap="square" lIns="0" tIns="0" rIns="0" bIns="0" rtlCol="0" anchor="ctr"/>
+          <a:lstStyle/>
+          <a:p>
+            <a:pPr indent="0" marL="0">
+              <a:buNone/>
+            </a:pPr>
+            <a:r>
+              <a:rPr lang="en-US" sz="1800" b="1" dirty="0">
+                <a:solidFill>
+                  <a:srgbClr val="0A1940"/>
                 </a:solidFill>
                 <a:latin typeface="Georgia" pitchFamily="34" charset="0"/>
                 <a:ea typeface="Georgia" pitchFamily="34" charset="-122"/>
                 <a:cs typeface="Georgia" pitchFamily="34" charset="-120"/>
               </a:rPr>
-              <a:t>2</a:t>
-            </a:r>
-            <a:endParaRPr lang="en-US" sz="2800" dirty="0"/>
-          </a:p>
-        </p:txBody>
-      </p:sp>
-      <p:sp>
-        <p:nvSpPr>
-          <p:cNvPr id="13" name="Text 11"/>
-          <p:cNvSpPr/>
-          <p:nvPr/>
-        </p:nvSpPr>
-        <p:spPr>
-          <a:xfrm>
-            <a:off x="1554480" y="2743200"/>
-            <a:ext cx="9966960" cy="347472"/>
-          </a:xfrm>
-          <a:prstGeom prst="rect">
-            <a:avLst/>
-          </a:prstGeom>
-          <a:noFill/>
-          <a:ln/>
-        </p:spPr>
-        <p:txBody>
-          <a:bodyPr wrap="square" lIns="0" tIns="0" rIns="0" bIns="0" rtlCol="0" anchor="ctr"/>
-          <a:lstStyle/>
-          <a:p>
-            <a:pPr indent="0" marL="0">
-              <a:buNone/>
-            </a:pPr>
-            <a:r>
-              <a:rPr lang="en-US" sz="1400" b="1" dirty="0">
-                <a:solidFill>
-                  <a:srgbClr val="111827"/>
-                </a:solidFill>
-                <a:latin typeface="Calibri" pitchFamily="34" charset="0"/>
-                <a:ea typeface="Calibri" pitchFamily="34" charset="-122"/>
-                <a:cs typeface="Calibri" pitchFamily="34" charset="-120"/>
-              </a:rPr>
-              <a:t>Expandir as classes detectadas por IA</a:t>
-            </a:r>
-            <a:endParaRPr lang="en-US" sz="1400" dirty="0"/>
-          </a:p>
-        </p:txBody>
-      </p:sp>
-      <p:sp>
-        <p:nvSpPr>
-          <p:cNvPr id="14" name="Text 12"/>
-          <p:cNvSpPr/>
-          <p:nvPr/>
-        </p:nvSpPr>
-        <p:spPr>
-          <a:xfrm>
-            <a:off x="1554480" y="3054096"/>
-            <a:ext cx="9966960" cy="347472"/>
-          </a:xfrm>
-          <a:prstGeom prst="rect">
-            <a:avLst/>
-          </a:prstGeom>
-          <a:noFill/>
-          <a:ln/>
-        </p:spPr>
-        <p:txBody>
-          <a:bodyPr wrap="square" lIns="0" tIns="0" rIns="0" bIns="0" rtlCol="0" anchor="ctr"/>
-          <a:lstStyle/>
-          <a:p>
-            <a:pPr indent="0" marL="0">
-              <a:buNone/>
-            </a:pPr>
-            <a:r>
-              <a:rPr lang="en-US" sz="1150" dirty="0">
-                <a:solidFill>
-                  <a:srgbClr val="64748B"/>
-                </a:solidFill>
-                <a:latin typeface="Calibri" pitchFamily="34" charset="0"/>
-                <a:ea typeface="Calibri" pitchFamily="34" charset="-122"/>
-                <a:cs typeface="Calibri" pitchFamily="34" charset="-120"/>
-              </a:rPr>
-              <a:t>A partir dos embargos e agravos, alcançar execuções fiscais, tutelas e recursos especiais.</a:t>
-            </a:r>
-            <a:endParaRPr lang="en-US" sz="1150" dirty="0"/>
-          </a:p>
-        </p:txBody>
-      </p:sp>
-      <p:sp>
-        <p:nvSpPr>
-          <p:cNvPr id="15" name="Shape 13"/>
-          <p:cNvSpPr/>
-          <p:nvPr/>
-        </p:nvSpPr>
-        <p:spPr>
-          <a:xfrm>
-            <a:off x="548640" y="3557016"/>
-            <a:ext cx="11064240" cy="749808"/>
+              <a:t>Núcleo operacional</a:t>
+            </a:r>
+            <a:endParaRPr lang="en-US" sz="1800" dirty="0"/>
+          </a:p>
+        </p:txBody>
+      </p:sp>
+      <p:sp>
+        <p:nvSpPr>
+          <p:cNvPr id="14" name="Text 10"/>
+          <p:cNvSpPr/>
+          <p:nvPr/>
+        </p:nvSpPr>
+        <p:spPr>
+          <a:xfrm>
+            <a:off x="1691640" y="3858768"/>
+            <a:ext cx="9784080" cy="548640"/>
+          </a:xfrm>
+          <a:prstGeom prst="rect">
+            <a:avLst/>
+          </a:prstGeom>
+          <a:noFill/>
+          <a:ln/>
+        </p:spPr>
+        <p:txBody>
+          <a:bodyPr wrap="square" lIns="0" tIns="0" rIns="0" bIns="0" rtlCol="0" anchor="ctr"/>
+          <a:lstStyle/>
+          <a:p>
+            <a:pPr indent="0" marL="0">
+              <a:buNone/>
+            </a:pPr>
+            <a:r>
+              <a:rPr lang="en-US" sz="1300" dirty="0">
+                <a:solidFill>
+                  <a:srgbClr val="1E293B"/>
+                </a:solidFill>
+                <a:latin typeface="Calibri" pitchFamily="34" charset="0"/>
+                <a:ea typeface="Calibri" pitchFamily="34" charset="-122"/>
+                <a:cs typeface="Calibri" pitchFamily="34" charset="-120"/>
+              </a:rPr>
+              <a:t>FastAPI (Python 3.10) · PostgreSQL · SQLAlchemy · Alembic · APScheduler</a:t>
+            </a:r>
+            <a:endParaRPr lang="en-US" sz="1300" dirty="0"/>
+          </a:p>
+        </p:txBody>
+      </p:sp>
+      <p:sp>
+        <p:nvSpPr>
+          <p:cNvPr id="15" name="Shape 11"/>
+          <p:cNvSpPr/>
+          <p:nvPr/>
+        </p:nvSpPr>
+        <p:spPr>
+          <a:xfrm>
+            <a:off x="548640" y="4709160"/>
+            <a:ext cx="11064240" cy="1188720"/>
           </a:xfrm>
           <a:prstGeom prst="rect">
             <a:avLst/>
@@ -3871,213 +4650,166 @@
       </p:sp>
       <p:sp>
         <p:nvSpPr>
-          <p:cNvPr id="16" name="Shape 14"/>
-          <p:cNvSpPr/>
-          <p:nvPr/>
-        </p:nvSpPr>
-        <p:spPr>
-          <a:xfrm>
-            <a:off x="548640" y="3557016"/>
-            <a:ext cx="822960" cy="749808"/>
+          <p:cNvPr id="16" name="Shape 12"/>
+          <p:cNvSpPr/>
+          <p:nvPr/>
+        </p:nvSpPr>
+        <p:spPr>
+          <a:xfrm>
+            <a:off x="548640" y="4709160"/>
+            <a:ext cx="128016" cy="1188720"/>
           </a:xfrm>
           <a:prstGeom prst="rect">
             <a:avLst/>
           </a:prstGeom>
           <a:solidFill>
-            <a:srgbClr val="0A1940"/>
+            <a:srgbClr val="1558CC"/>
           </a:solidFill>
           <a:ln w="12700">
             <a:solidFill>
-              <a:srgbClr val="0A1940"/>
+              <a:srgbClr val="1558CC"/>
             </a:solidFill>
             <a:prstDash val="solid"/>
           </a:ln>
         </p:spPr>
       </p:sp>
-      <p:sp>
-        <p:nvSpPr>
-          <p:cNvPr id="17" name="Text 15"/>
-          <p:cNvSpPr/>
-          <p:nvPr/>
-        </p:nvSpPr>
-        <p:spPr>
-          <a:xfrm>
-            <a:off x="548640" y="3557016"/>
-            <a:ext cx="822960" cy="749808"/>
-          </a:xfrm>
-          <a:prstGeom prst="rect">
-            <a:avLst/>
-          </a:prstGeom>
-          <a:noFill/>
-          <a:ln/>
-        </p:spPr>
-        <p:txBody>
-          <a:bodyPr wrap="square" lIns="0" tIns="0" rIns="0" bIns="0" rtlCol="0" anchor="ctr"/>
-          <a:lstStyle/>
-          <a:p>
-            <a:pPr algn="ctr" indent="0" marL="0">
-              <a:buNone/>
-            </a:pPr>
-            <a:r>
-              <a:rPr lang="en-US" sz="2800" b="1" dirty="0">
-                <a:solidFill>
-                  <a:srgbClr val="1E7BFF"/>
+      <p:pic>
+        <p:nvPicPr>
+          <p:cNvPr id="17" name="Image 2" descr="preencoded.png">    </p:cNvPr>
+          <p:cNvPicPr>
+            <a:picLocks noChangeAspect="1"/>
+          </p:cNvPicPr>
+          <p:nvPr/>
+        </p:nvPicPr>
+        <p:blipFill>
+          <a:blip r:embed="rId3"/>
+          <a:stretch>
+            <a:fillRect/>
+          </a:stretch>
+        </p:blipFill>
+        <p:spPr>
+          <a:xfrm>
+            <a:off x="914400" y="5029200"/>
+            <a:ext cx="548640" cy="548640"/>
+          </a:xfrm>
+          <a:prstGeom prst="rect">
+            <a:avLst/>
+          </a:prstGeom>
+        </p:spPr>
+      </p:pic>
+      <p:sp>
+        <p:nvSpPr>
+          <p:cNvPr id="18" name="Text 13"/>
+          <p:cNvSpPr/>
+          <p:nvPr/>
+        </p:nvSpPr>
+        <p:spPr>
+          <a:xfrm>
+            <a:off x="1691640" y="4846320"/>
+            <a:ext cx="9784080" cy="411480"/>
+          </a:xfrm>
+          <a:prstGeom prst="rect">
+            <a:avLst/>
+          </a:prstGeom>
+          <a:noFill/>
+          <a:ln/>
+        </p:spPr>
+        <p:txBody>
+          <a:bodyPr wrap="square" lIns="0" tIns="0" rIns="0" bIns="0" rtlCol="0" anchor="ctr"/>
+          <a:lstStyle/>
+          <a:p>
+            <a:pPr indent="0" marL="0">
+              <a:buNone/>
+            </a:pPr>
+            <a:r>
+              <a:rPr lang="en-US" sz="1800" b="1" dirty="0">
+                <a:solidFill>
+                  <a:srgbClr val="0A1940"/>
                 </a:solidFill>
                 <a:latin typeface="Georgia" pitchFamily="34" charset="0"/>
                 <a:ea typeface="Georgia" pitchFamily="34" charset="-122"/>
                 <a:cs typeface="Georgia" pitchFamily="34" charset="-120"/>
               </a:rPr>
-              <a:t>3</a:t>
-            </a:r>
-            <a:endParaRPr lang="en-US" sz="2800" dirty="0"/>
-          </a:p>
-        </p:txBody>
-      </p:sp>
-      <p:sp>
-        <p:nvSpPr>
-          <p:cNvPr id="18" name="Text 16"/>
-          <p:cNvSpPr/>
-          <p:nvPr/>
-        </p:nvSpPr>
-        <p:spPr>
-          <a:xfrm>
-            <a:off x="1554480" y="3630168"/>
-            <a:ext cx="9966960" cy="347472"/>
-          </a:xfrm>
-          <a:prstGeom prst="rect">
-            <a:avLst/>
-          </a:prstGeom>
-          <a:noFill/>
-          <a:ln/>
-        </p:spPr>
-        <p:txBody>
-          <a:bodyPr wrap="square" lIns="0" tIns="0" rIns="0" bIns="0" rtlCol="0" anchor="ctr"/>
-          <a:lstStyle/>
-          <a:p>
-            <a:pPr indent="0" marL="0">
-              <a:buNone/>
-            </a:pPr>
-            <a:r>
-              <a:rPr lang="en-US" sz="1400" b="1" dirty="0">
-                <a:solidFill>
-                  <a:srgbClr val="111827"/>
-                </a:solidFill>
-                <a:latin typeface="Calibri" pitchFamily="34" charset="0"/>
-                <a:ea typeface="Calibri" pitchFamily="34" charset="-122"/>
-                <a:cs typeface="Calibri" pitchFamily="34" charset="-120"/>
-              </a:rPr>
-              <a:t>Ampliar o painel de riscos</a:t>
-            </a:r>
-            <a:endParaRPr lang="en-US" sz="1400" dirty="0"/>
-          </a:p>
-        </p:txBody>
-      </p:sp>
-      <p:sp>
-        <p:nvSpPr>
-          <p:cNvPr id="19" name="Text 17"/>
-          <p:cNvSpPr/>
-          <p:nvPr/>
-        </p:nvSpPr>
-        <p:spPr>
-          <a:xfrm>
-            <a:off x="1554480" y="3941064"/>
-            <a:ext cx="9966960" cy="347472"/>
-          </a:xfrm>
-          <a:prstGeom prst="rect">
-            <a:avLst/>
-          </a:prstGeom>
-          <a:noFill/>
-          <a:ln/>
-        </p:spPr>
-        <p:txBody>
-          <a:bodyPr wrap="square" lIns="0" tIns="0" rIns="0" bIns="0" rtlCol="0" anchor="ctr"/>
-          <a:lstStyle/>
-          <a:p>
-            <a:pPr indent="0" marL="0">
-              <a:buNone/>
-            </a:pPr>
-            <a:r>
-              <a:rPr lang="en-US" sz="1150" dirty="0">
-                <a:solidFill>
-                  <a:srgbClr val="64748B"/>
-                </a:solidFill>
-                <a:latin typeface="Calibri" pitchFamily="34" charset="0"/>
-                <a:ea typeface="Calibri" pitchFamily="34" charset="-122"/>
-                <a:cs typeface="Calibri" pitchFamily="34" charset="-120"/>
-              </a:rPr>
-              <a:t>Sobre o dashboard atual (KPIs, funil, velocidade), consolidar publicações órfãs, pastas em regressão e prazos em janela crítica.</a:t>
-            </a:r>
-            <a:endParaRPr lang="en-US" sz="1150" dirty="0"/>
-          </a:p>
-        </p:txBody>
-      </p:sp>
-      <p:sp>
-        <p:nvSpPr>
-          <p:cNvPr id="20" name="Shape 18"/>
-          <p:cNvSpPr/>
-          <p:nvPr/>
-        </p:nvSpPr>
-        <p:spPr>
-          <a:xfrm>
-            <a:off x="548640" y="4443984"/>
-            <a:ext cx="11064240" cy="749808"/>
+              <a:t>Integrações e IA</a:t>
+            </a:r>
+            <a:endParaRPr lang="en-US" sz="1800" dirty="0"/>
+          </a:p>
+        </p:txBody>
+      </p:sp>
+      <p:sp>
+        <p:nvSpPr>
+          <p:cNvPr id="19" name="Text 14"/>
+          <p:cNvSpPr/>
+          <p:nvPr/>
+        </p:nvSpPr>
+        <p:spPr>
+          <a:xfrm>
+            <a:off x="1691640" y="5276088"/>
+            <a:ext cx="9784080" cy="548640"/>
+          </a:xfrm>
+          <a:prstGeom prst="rect">
+            <a:avLst/>
+          </a:prstGeom>
+          <a:noFill/>
+          <a:ln/>
+        </p:spPr>
+        <p:txBody>
+          <a:bodyPr wrap="square" lIns="0" tIns="0" rIns="0" bIns="0" rtlCol="0" anchor="ctr"/>
+          <a:lstStyle/>
+          <a:p>
+            <a:pPr indent="0" marL="0">
+              <a:buNone/>
+            </a:pPr>
+            <a:r>
+              <a:rPr lang="en-US" sz="1300" dirty="0">
+                <a:solidFill>
+                  <a:srgbClr val="1E293B"/>
+                </a:solidFill>
+                <a:latin typeface="Calibri" pitchFamily="34" charset="0"/>
+                <a:ea typeface="Calibri" pitchFamily="34" charset="-122"/>
+                <a:cs typeface="Calibri" pitchFamily="34" charset="-120"/>
+              </a:rPr>
+              <a:t>Legal One (REST + RPA/Playwright) · Claude Haiku 4.5 (Batch API) · DataJud (CNJ) · DJEN / Comunica</a:t>
+            </a:r>
+            <a:endParaRPr lang="en-US" sz="1300" dirty="0"/>
+          </a:p>
+        </p:txBody>
+      </p:sp>
+      <p:sp>
+        <p:nvSpPr>
+          <p:cNvPr id="20" name="Shape 15"/>
+          <p:cNvSpPr/>
+          <p:nvPr/>
+        </p:nvSpPr>
+        <p:spPr>
+          <a:xfrm>
+            <a:off x="548640" y="6172200"/>
+            <a:ext cx="11064240" cy="347472"/>
           </a:xfrm>
           <a:prstGeom prst="rect">
             <a:avLst/>
           </a:prstGeom>
           <a:solidFill>
-            <a:srgbClr val="FFFFFF"/>
+            <a:srgbClr val="BFD7FF"/>
           </a:solidFill>
-          <a:ln w="6350">
+          <a:ln w="12700">
             <a:solidFill>
-              <a:srgbClr val="E2E8F0"/>
+              <a:srgbClr val="BFD7FF"/>
             </a:solidFill>
             <a:prstDash val="solid"/>
           </a:ln>
-          <a:effectLst>
-            <a:outerShdw sx="100000" sy="100000" kx="0" ky="0" algn="bl" rotWithShape="0" blurRad="127000" dist="38100" dir="5400000">
-              <a:srgbClr val="000000">
-                <a:alpha val="10000"/>
-              </a:srgbClr>
-            </a:outerShdw>
-          </a:effectLst>
-        </p:spPr>
-      </p:sp>
-      <p:sp>
-        <p:nvSpPr>
-          <p:cNvPr id="21" name="Shape 19"/>
-          <p:cNvSpPr/>
-          <p:nvPr/>
-        </p:nvSpPr>
-        <p:spPr>
-          <a:xfrm>
-            <a:off x="548640" y="4443984"/>
-            <a:ext cx="822960" cy="749808"/>
-          </a:xfrm>
-          <a:prstGeom prst="rect">
-            <a:avLst/>
-          </a:prstGeom>
-          <a:solidFill>
-            <a:srgbClr val="0A1940"/>
-          </a:solidFill>
-          <a:ln w="12700">
-            <a:solidFill>
-              <a:srgbClr val="0A1940"/>
-            </a:solidFill>
-            <a:prstDash val="solid"/>
-          </a:ln>
-        </p:spPr>
-      </p:sp>
-      <p:sp>
-        <p:nvSpPr>
-          <p:cNvPr id="22" name="Text 20"/>
-          <p:cNvSpPr/>
-          <p:nvPr/>
-        </p:nvSpPr>
-        <p:spPr>
-          <a:xfrm>
-            <a:off x="548640" y="4443984"/>
-            <a:ext cx="822960" cy="749808"/>
+        </p:spPr>
+      </p:sp>
+      <p:sp>
+        <p:nvSpPr>
+          <p:cNvPr id="21" name="Text 16"/>
+          <p:cNvSpPr/>
+          <p:nvPr/>
+        </p:nvSpPr>
+        <p:spPr>
+          <a:xfrm>
+            <a:off x="548640" y="6172200"/>
+            <a:ext cx="11064240" cy="347472"/>
           </a:xfrm>
           <a:prstGeom prst="rect">
             <a:avLst/>
@@ -4093,275 +4825,23 @@
               <a:buNone/>
             </a:pPr>
             <a:r>
-              <a:rPr lang="en-US" sz="2800" b="1" dirty="0">
-                <a:solidFill>
-                  <a:srgbClr val="1E7BFF"/>
-                </a:solidFill>
-                <a:latin typeface="Georgia" pitchFamily="34" charset="0"/>
-                <a:ea typeface="Georgia" pitchFamily="34" charset="-122"/>
-                <a:cs typeface="Georgia" pitchFamily="34" charset="-120"/>
-              </a:rPr>
-              <a:t>4</a:t>
-            </a:r>
-            <a:endParaRPr lang="en-US" sz="2800" dirty="0"/>
-          </a:p>
-        </p:txBody>
-      </p:sp>
-      <p:sp>
-        <p:nvSpPr>
-          <p:cNvPr id="23" name="Text 21"/>
-          <p:cNvSpPr/>
-          <p:nvPr/>
-        </p:nvSpPr>
-        <p:spPr>
-          <a:xfrm>
-            <a:off x="1554480" y="4517136"/>
-            <a:ext cx="9966960" cy="347472"/>
-          </a:xfrm>
-          <a:prstGeom prst="rect">
-            <a:avLst/>
-          </a:prstGeom>
-          <a:noFill/>
-          <a:ln/>
-        </p:spPr>
-        <p:txBody>
-          <a:bodyPr wrap="square" lIns="0" tIns="0" rIns="0" bIns="0" rtlCol="0" anchor="ctr"/>
-          <a:lstStyle/>
-          <a:p>
-            <a:pPr indent="0" marL="0">
-              <a:buNone/>
-            </a:pPr>
-            <a:r>
-              <a:rPr lang="en-US" sz="1400" b="1" dirty="0">
-                <a:solidFill>
-                  <a:srgbClr val="111827"/>
-                </a:solidFill>
-                <a:latin typeface="Calibri" pitchFamily="34" charset="0"/>
-                <a:ea typeface="Calibri" pitchFamily="34" charset="-122"/>
-                <a:cs typeface="Calibri" pitchFamily="34" charset="-120"/>
-              </a:rPr>
-              <a:t>Auto-sugestão de responsável</a:t>
-            </a:r>
-            <a:endParaRPr lang="en-US" sz="1400" dirty="0"/>
-          </a:p>
-        </p:txBody>
-      </p:sp>
-      <p:sp>
-        <p:nvSpPr>
-          <p:cNvPr id="24" name="Text 22"/>
-          <p:cNvSpPr/>
-          <p:nvPr/>
-        </p:nvSpPr>
-        <p:spPr>
-          <a:xfrm>
-            <a:off x="1554480" y="4828032"/>
-            <a:ext cx="9966960" cy="347472"/>
-          </a:xfrm>
-          <a:prstGeom prst="rect">
-            <a:avLst/>
-          </a:prstGeom>
-          <a:noFill/>
-          <a:ln/>
-        </p:spPr>
-        <p:txBody>
-          <a:bodyPr wrap="square" lIns="0" tIns="0" rIns="0" bIns="0" rtlCol="0" anchor="ctr"/>
-          <a:lstStyle/>
-          <a:p>
-            <a:pPr indent="0" marL="0">
-              <a:buNone/>
-            </a:pPr>
-            <a:r>
-              <a:rPr lang="en-US" sz="1150" dirty="0">
-                <a:solidFill>
-                  <a:srgbClr val="64748B"/>
-                </a:solidFill>
-                <a:latin typeface="Calibri" pitchFamily="34" charset="0"/>
-                <a:ea typeface="Calibri" pitchFamily="34" charset="-122"/>
-                <a:cs typeface="Calibri" pitchFamily="34" charset="-120"/>
-              </a:rPr>
-              <a:t>Usar histórico do Legal One para propor o advogado responsável da tarefa.</a:t>
-            </a:r>
-            <a:endParaRPr lang="en-US" sz="1150" dirty="0"/>
-          </a:p>
-        </p:txBody>
-      </p:sp>
-      <p:sp>
-        <p:nvSpPr>
-          <p:cNvPr id="25" name="Shape 23"/>
-          <p:cNvSpPr/>
-          <p:nvPr/>
-        </p:nvSpPr>
-        <p:spPr>
-          <a:xfrm>
-            <a:off x="548640" y="5330952"/>
-            <a:ext cx="11064240" cy="749808"/>
-          </a:xfrm>
-          <a:prstGeom prst="rect">
-            <a:avLst/>
-          </a:prstGeom>
-          <a:solidFill>
-            <a:srgbClr val="FFFFFF"/>
-          </a:solidFill>
-          <a:ln w="6350">
-            <a:solidFill>
-              <a:srgbClr val="E2E8F0"/>
-            </a:solidFill>
-            <a:prstDash val="solid"/>
-          </a:ln>
-          <a:effectLst>
-            <a:outerShdw sx="100000" sy="100000" kx="0" ky="0" algn="bl" rotWithShape="0" blurRad="127000" dist="38100" dir="5400000">
-              <a:srgbClr val="000000">
-                <a:alpha val="10000"/>
-              </a:srgbClr>
-            </a:outerShdw>
-          </a:effectLst>
-        </p:spPr>
-      </p:sp>
-      <p:sp>
-        <p:nvSpPr>
-          <p:cNvPr id="26" name="Shape 24"/>
-          <p:cNvSpPr/>
-          <p:nvPr/>
-        </p:nvSpPr>
-        <p:spPr>
-          <a:xfrm>
-            <a:off x="548640" y="5330952"/>
-            <a:ext cx="822960" cy="749808"/>
-          </a:xfrm>
-          <a:prstGeom prst="rect">
-            <a:avLst/>
-          </a:prstGeom>
-          <a:solidFill>
-            <a:srgbClr val="0A1940"/>
-          </a:solidFill>
-          <a:ln w="12700">
-            <a:solidFill>
-              <a:srgbClr val="0A1940"/>
-            </a:solidFill>
-            <a:prstDash val="solid"/>
-          </a:ln>
-        </p:spPr>
-      </p:sp>
-      <p:sp>
-        <p:nvSpPr>
-          <p:cNvPr id="27" name="Text 25"/>
-          <p:cNvSpPr/>
-          <p:nvPr/>
-        </p:nvSpPr>
-        <p:spPr>
-          <a:xfrm>
-            <a:off x="548640" y="5330952"/>
-            <a:ext cx="822960" cy="749808"/>
-          </a:xfrm>
-          <a:prstGeom prst="rect">
-            <a:avLst/>
-          </a:prstGeom>
-          <a:noFill/>
-          <a:ln/>
-        </p:spPr>
-        <p:txBody>
-          <a:bodyPr wrap="square" lIns="0" tIns="0" rIns="0" bIns="0" rtlCol="0" anchor="ctr"/>
-          <a:lstStyle/>
-          <a:p>
-            <a:pPr algn="ctr" indent="0" marL="0">
-              <a:buNone/>
-            </a:pPr>
-            <a:r>
-              <a:rPr lang="en-US" sz="2800" b="1" dirty="0">
-                <a:solidFill>
-                  <a:srgbClr val="1E7BFF"/>
-                </a:solidFill>
-                <a:latin typeface="Georgia" pitchFamily="34" charset="0"/>
-                <a:ea typeface="Georgia" pitchFamily="34" charset="-122"/>
-                <a:cs typeface="Georgia" pitchFamily="34" charset="-120"/>
-              </a:rPr>
-              <a:t>5</a:t>
-            </a:r>
-            <a:endParaRPr lang="en-US" sz="2800" dirty="0"/>
-          </a:p>
-        </p:txBody>
-      </p:sp>
-      <p:sp>
-        <p:nvSpPr>
-          <p:cNvPr id="28" name="Text 26"/>
-          <p:cNvSpPr/>
-          <p:nvPr/>
-        </p:nvSpPr>
-        <p:spPr>
-          <a:xfrm>
-            <a:off x="1554480" y="5404104"/>
-            <a:ext cx="9966960" cy="347472"/>
-          </a:xfrm>
-          <a:prstGeom prst="rect">
-            <a:avLst/>
-          </a:prstGeom>
-          <a:noFill/>
-          <a:ln/>
-        </p:spPr>
-        <p:txBody>
-          <a:bodyPr wrap="square" lIns="0" tIns="0" rIns="0" bIns="0" rtlCol="0" anchor="ctr"/>
-          <a:lstStyle/>
-          <a:p>
-            <a:pPr indent="0" marL="0">
-              <a:buNone/>
-            </a:pPr>
-            <a:r>
-              <a:rPr lang="en-US" sz="1400" b="1" dirty="0">
-                <a:solidFill>
-                  <a:srgbClr val="111827"/>
-                </a:solidFill>
-                <a:latin typeface="Calibri" pitchFamily="34" charset="0"/>
-                <a:ea typeface="Calibri" pitchFamily="34" charset="-122"/>
-                <a:cs typeface="Calibri" pitchFamily="34" charset="-120"/>
-              </a:rPr>
-              <a:t>APIs públicas internas</a:t>
-            </a:r>
-            <a:endParaRPr lang="en-US" sz="1400" dirty="0"/>
-          </a:p>
-        </p:txBody>
-      </p:sp>
-      <p:sp>
-        <p:nvSpPr>
-          <p:cNvPr id="29" name="Text 27"/>
-          <p:cNvSpPr/>
-          <p:nvPr/>
-        </p:nvSpPr>
-        <p:spPr>
-          <a:xfrm>
-            <a:off x="1554480" y="5715000"/>
-            <a:ext cx="9966960" cy="347472"/>
-          </a:xfrm>
-          <a:prstGeom prst="rect">
-            <a:avLst/>
-          </a:prstGeom>
-          <a:noFill/>
-          <a:ln/>
-        </p:spPr>
-        <p:txBody>
-          <a:bodyPr wrap="square" lIns="0" tIns="0" rIns="0" bIns="0" rtlCol="0" anchor="ctr"/>
-          <a:lstStyle/>
-          <a:p>
-            <a:pPr indent="0" marL="0">
-              <a:buNone/>
-            </a:pPr>
-            <a:r>
-              <a:rPr lang="en-US" sz="1150" dirty="0">
-                <a:solidFill>
-                  <a:srgbClr val="64748B"/>
-                </a:solidFill>
-                <a:latin typeface="Calibri" pitchFamily="34" charset="0"/>
-                <a:ea typeface="Calibri" pitchFamily="34" charset="-122"/>
-                <a:cs typeface="Calibri" pitchFamily="34" charset="-120"/>
-              </a:rPr>
-              <a:t>Abrir endpoints seguros para que outras áreas consumam dados consolidados.</a:t>
-            </a:r>
-            <a:endParaRPr lang="en-US" sz="1150" dirty="0"/>
-          </a:p>
-        </p:txBody>
-      </p:sp>
-      <p:sp>
-        <p:nvSpPr>
-          <p:cNvPr id="30" name="Shape 28"/>
+              <a:rPr lang="en-US" sz="1100" i="1" dirty="0">
+                <a:solidFill>
+                  <a:srgbClr val="0A1940"/>
+                </a:solidFill>
+                <a:latin typeface="Calibri" pitchFamily="34" charset="0"/>
+                <a:ea typeface="Calibri" pitchFamily="34" charset="-122"/>
+                <a:cs typeface="Calibri" pitchFamily="34" charset="-120"/>
+              </a:rPr>
+              <a:t>Deploy em Coolify · Docker Compose · observabilidade estruturada em logs</a:t>
+            </a:r>
+            <a:endParaRPr lang="en-US" sz="1100" dirty="0"/>
+          </a:p>
+        </p:txBody>
+      </p:sp>
+      <p:sp>
+        <p:nvSpPr>
+          <p:cNvPr id="22" name="Shape 17"/>
           <p:cNvSpPr/>
           <p:nvPr/>
         </p:nvSpPr>
@@ -4384,7 +4864,7 @@
       </p:sp>
       <p:sp>
         <p:nvSpPr>
-          <p:cNvPr id="31" name="Text 29"/>
+          <p:cNvPr id="23" name="Text 18"/>
           <p:cNvSpPr/>
           <p:nvPr/>
         </p:nvSpPr>
@@ -4423,7 +4903,7 @@
       </p:sp>
       <p:sp>
         <p:nvSpPr>
-          <p:cNvPr id="32" name="Text 30"/>
+          <p:cNvPr id="24" name="Text 19"/>
           <p:cNvSpPr/>
           <p:nvPr/>
         </p:nvSpPr>
@@ -4454,7 +4934,7 @@
                 <a:ea typeface="Calibri" pitchFamily="34" charset="-122"/>
                 <a:cs typeface="Calibri" pitchFamily="34" charset="-120"/>
               </a:rPr>
-              <a:t>11 / 14</a:t>
+              <a:t>11 / 15</a:t>
             </a:r>
             <a:endParaRPr lang="en-US" sz="900" dirty="0"/>
           </a:p>
@@ -4525,7 +5005,7 @@
                 <a:ea typeface="Calibri" pitchFamily="34" charset="-122"/>
                 <a:cs typeface="Calibri" pitchFamily="34" charset="-120"/>
               </a:rPr>
-              <a:t>PROPOSTA COMERCIAL</a:t>
+              <a:t>PARA ONDE ESTAMOS INDO</a:t>
             </a:r>
             <a:endParaRPr lang="en-US" sz="1100" dirty="0"/>
           </a:p>
@@ -4564,7 +5044,7 @@
                 <a:ea typeface="Georgia" pitchFamily="34" charset="-122"/>
                 <a:cs typeface="Georgia" pitchFamily="34" charset="-120"/>
               </a:rPr>
-              <a:t>Planos por volume de publicações</a:t>
+              <a:t>Próximos passos do roadmap</a:t>
             </a:r>
             <a:endParaRPr lang="en-US" sz="3000" dirty="0"/>
           </a:p>
@@ -4597,53 +5077,14 @@
       </p:sp>
       <p:sp>
         <p:nvSpPr>
-          <p:cNvPr id="5" name="Text 3"/>
-          <p:cNvSpPr/>
-          <p:nvPr/>
-        </p:nvSpPr>
-        <p:spPr>
-          <a:xfrm>
-            <a:off x="548640" y="1508760"/>
-            <a:ext cx="11064240" cy="457200"/>
-          </a:xfrm>
-          <a:prstGeom prst="rect">
-            <a:avLst/>
-          </a:prstGeom>
-          <a:noFill/>
-          <a:ln/>
-        </p:spPr>
-        <p:txBody>
-          <a:bodyPr wrap="square" lIns="0" tIns="0" rIns="0" bIns="0" rtlCol="0" anchor="ctr"/>
-          <a:lstStyle/>
-          <a:p>
-            <a:pPr indent="0" marL="0">
-              <a:buNone/>
-            </a:pPr>
-            <a:r>
-              <a:rPr lang="en-US" sz="1200" i="1" dirty="0">
-                <a:solidFill>
-                  <a:srgbClr val="64748B"/>
-                </a:solidFill>
-                <a:latin typeface="Calibri" pitchFamily="34" charset="0"/>
-                <a:ea typeface="Calibri" pitchFamily="34" charset="-122"/>
-                <a:cs typeface="Calibri" pitchFamily="34" charset="-120"/>
-              </a:rPr>
-              <a:t>Modelo SaaS sob medida para escritórios de porte (30+ advogados) — implementação única + mensalidade indexada ao volume efetivo de publicações processadas.</a:t>
-            </a:r>
-            <a:endParaRPr lang="en-US" sz="1200" dirty="0"/>
-          </a:p>
-        </p:txBody>
-      </p:sp>
-      <p:sp>
-        <p:nvSpPr>
-          <p:cNvPr id="6" name="Shape 4"/>
-          <p:cNvSpPr/>
-          <p:nvPr/>
-        </p:nvSpPr>
-        <p:spPr>
-          <a:xfrm>
-            <a:off x="548640" y="2103120"/>
-            <a:ext cx="3611880" cy="4160520"/>
+          <p:cNvPr id="5" name="Shape 3"/>
+          <p:cNvSpPr/>
+          <p:nvPr/>
+        </p:nvSpPr>
+        <p:spPr>
+          <a:xfrm>
+            <a:off x="548640" y="1783080"/>
+            <a:ext cx="11064240" cy="749808"/>
           </a:xfrm>
           <a:prstGeom prst="rect">
             <a:avLst/>
@@ -4668,24 +5109,24 @@
       </p:sp>
       <p:sp>
         <p:nvSpPr>
-          <p:cNvPr id="7" name="Shape 5"/>
-          <p:cNvSpPr/>
-          <p:nvPr/>
-        </p:nvSpPr>
-        <p:spPr>
-          <a:xfrm>
-            <a:off x="548640" y="2103120"/>
-            <a:ext cx="3611880" cy="109728"/>
+          <p:cNvPr id="6" name="Shape 4"/>
+          <p:cNvSpPr/>
+          <p:nvPr/>
+        </p:nvSpPr>
+        <p:spPr>
+          <a:xfrm>
+            <a:off x="548640" y="1783080"/>
+            <a:ext cx="822960" cy="749808"/>
           </a:xfrm>
           <a:prstGeom prst="rect">
             <a:avLst/>
           </a:prstGeom>
           <a:solidFill>
-            <a:srgbClr val="0EA5A4"/>
+            <a:srgbClr val="0A1940"/>
           </a:solidFill>
           <a:ln w="12700">
             <a:solidFill>
-              <a:srgbClr val="0EA5A4"/>
+              <a:srgbClr val="0A1940"/>
             </a:solidFill>
             <a:prstDash val="solid"/>
           </a:ln>
@@ -4693,14 +5134,14 @@
       </p:sp>
       <p:sp>
         <p:nvSpPr>
-          <p:cNvPr id="8" name="Text 6"/>
-          <p:cNvSpPr/>
-          <p:nvPr/>
-        </p:nvSpPr>
-        <p:spPr>
-          <a:xfrm>
-            <a:off x="731520" y="2377440"/>
-            <a:ext cx="3246120" cy="457200"/>
+          <p:cNvPr id="7" name="Text 5"/>
+          <p:cNvSpPr/>
+          <p:nvPr/>
+        </p:nvSpPr>
+        <p:spPr>
+          <a:xfrm>
+            <a:off x="548640" y="1783080"/>
+            <a:ext cx="822960" cy="749808"/>
           </a:xfrm>
           <a:prstGeom prst="rect">
             <a:avLst/>
@@ -4716,17 +5157,56 @@
               <a:buNone/>
             </a:pPr>
             <a:r>
-              <a:rPr lang="en-US" sz="2600" b="1" dirty="0">
-                <a:solidFill>
-                  <a:srgbClr val="0A1940"/>
+              <a:rPr lang="en-US" sz="2800" b="1" dirty="0">
+                <a:solidFill>
+                  <a:srgbClr val="1E7BFF"/>
                 </a:solidFill>
                 <a:latin typeface="Georgia" pitchFamily="34" charset="0"/>
                 <a:ea typeface="Georgia" pitchFamily="34" charset="-122"/>
                 <a:cs typeface="Georgia" pitchFamily="34" charset="-120"/>
               </a:rPr>
-              <a:t>Starter</a:t>
-            </a:r>
-            <a:endParaRPr lang="en-US" sz="2600" dirty="0"/>
+              <a:t>1</a:t>
+            </a:r>
+            <a:endParaRPr lang="en-US" sz="2800" dirty="0"/>
+          </a:p>
+        </p:txBody>
+      </p:sp>
+      <p:sp>
+        <p:nvSpPr>
+          <p:cNvPr id="8" name="Text 6"/>
+          <p:cNvSpPr/>
+          <p:nvPr/>
+        </p:nvSpPr>
+        <p:spPr>
+          <a:xfrm>
+            <a:off x="1554480" y="1856232"/>
+            <a:ext cx="9966960" cy="347472"/>
+          </a:xfrm>
+          <a:prstGeom prst="rect">
+            <a:avLst/>
+          </a:prstGeom>
+          <a:noFill/>
+          <a:ln/>
+        </p:spPr>
+        <p:txBody>
+          <a:bodyPr wrap="square" lIns="0" tIns="0" rIns="0" bIns="0" rtlCol="0" anchor="ctr"/>
+          <a:lstStyle/>
+          <a:p>
+            <a:pPr indent="0" marL="0">
+              <a:buNone/>
+            </a:pPr>
+            <a:r>
+              <a:rPr lang="en-US" sz="1400" b="1" dirty="0">
+                <a:solidFill>
+                  <a:srgbClr val="111827"/>
+                </a:solidFill>
+                <a:latin typeface="Calibri" pitchFamily="34" charset="0"/>
+                <a:ea typeface="Calibri" pitchFamily="34" charset="-122"/>
+                <a:cs typeface="Calibri" pitchFamily="34" charset="-120"/>
+              </a:rPr>
+              <a:t>Ampliar a régua de maturidade</a:t>
+            </a:r>
+            <a:endParaRPr lang="en-US" sz="1400" dirty="0"/>
           </a:p>
         </p:txBody>
       </p:sp>
@@ -4738,24 +5218,24 @@
         </p:nvSpPr>
         <p:spPr>
           <a:xfrm>
-            <a:off x="731520" y="2880360"/>
-            <a:ext cx="3246120" cy="274320"/>
-          </a:xfrm>
-          <a:prstGeom prst="rect">
-            <a:avLst/>
-          </a:prstGeom>
-          <a:noFill/>
-          <a:ln/>
-        </p:spPr>
-        <p:txBody>
-          <a:bodyPr wrap="square" lIns="0" tIns="0" rIns="0" bIns="0" rtlCol="0" anchor="ctr"/>
-          <a:lstStyle/>
-          <a:p>
-            <a:pPr algn="ctr" indent="0" marL="0">
-              <a:buNone/>
-            </a:pPr>
-            <a:r>
-              <a:rPr lang="en-US" sz="1100" i="1" dirty="0">
+            <a:off x="1554480" y="2167128"/>
+            <a:ext cx="9966960" cy="347472"/>
+          </a:xfrm>
+          <a:prstGeom prst="rect">
+            <a:avLst/>
+          </a:prstGeom>
+          <a:noFill/>
+          <a:ln/>
+        </p:spPr>
+        <p:txBody>
+          <a:bodyPr wrap="square" lIns="0" tIns="0" rIns="0" bIns="0" rtlCol="0" anchor="ctr"/>
+          <a:lstStyle/>
+          <a:p>
+            <a:pPr indent="0" marL="0">
+              <a:buNone/>
+            </a:pPr>
+            <a:r>
+              <a:rPr lang="en-US" sz="1150" dirty="0">
                 <a:solidFill>
                   <a:srgbClr val="64748B"/>
                 </a:solidFill>
@@ -4763,755 +5243,22 @@
                 <a:ea typeface="Calibri" pitchFamily="34" charset="-122"/>
                 <a:cs typeface="Calibri" pitchFamily="34" charset="-120"/>
               </a:rPr>
-              <a:t>até 2.000 publicações/mês</a:t>
-            </a:r>
-            <a:endParaRPr lang="en-US" sz="1100" dirty="0"/>
-          </a:p>
-        </p:txBody>
-      </p:sp>
-      <p:sp>
-        <p:nvSpPr>
-          <p:cNvPr id="10" name="Text 8"/>
-          <p:cNvSpPr/>
-          <p:nvPr/>
-        </p:nvSpPr>
-        <p:spPr>
-          <a:xfrm>
-            <a:off x="731520" y="3291840"/>
-            <a:ext cx="3246120" cy="548640"/>
-          </a:xfrm>
-          <a:prstGeom prst="rect">
-            <a:avLst/>
-          </a:prstGeom>
-          <a:noFill/>
-          <a:ln/>
-        </p:spPr>
-        <p:txBody>
-          <a:bodyPr wrap="square" lIns="0" tIns="0" rIns="0" bIns="0" rtlCol="0" anchor="ctr"/>
-          <a:lstStyle/>
-          <a:p>
-            <a:pPr algn="ctr" indent="0" marL="0">
-              <a:buNone/>
-            </a:pPr>
-            <a:r>
-              <a:rPr lang="en-US" sz="2800" b="1" dirty="0">
-                <a:solidFill>
-                  <a:srgbClr val="0B7A79"/>
-                </a:solidFill>
-                <a:latin typeface="Georgia" pitchFamily="34" charset="0"/>
-                <a:ea typeface="Georgia" pitchFamily="34" charset="-122"/>
-                <a:cs typeface="Georgia" pitchFamily="34" charset="-120"/>
-              </a:rPr>
-              <a:t>R$ 3.500</a:t>
-            </a:r>
-            <a:endParaRPr lang="en-US" sz="2800" dirty="0"/>
-          </a:p>
-        </p:txBody>
-      </p:sp>
-      <p:sp>
-        <p:nvSpPr>
-          <p:cNvPr id="11" name="Text 9"/>
-          <p:cNvSpPr/>
-          <p:nvPr/>
-        </p:nvSpPr>
-        <p:spPr>
-          <a:xfrm>
-            <a:off x="731520" y="3840480"/>
-            <a:ext cx="3246120" cy="201168"/>
-          </a:xfrm>
-          <a:prstGeom prst="rect">
-            <a:avLst/>
-          </a:prstGeom>
-          <a:noFill/>
-          <a:ln/>
-        </p:spPr>
-        <p:txBody>
-          <a:bodyPr wrap="square" lIns="0" tIns="0" rIns="0" bIns="0" rtlCol="0" anchor="ctr"/>
-          <a:lstStyle/>
-          <a:p>
-            <a:pPr algn="ctr" indent="0" marL="0">
-              <a:buNone/>
-            </a:pPr>
-            <a:r>
-              <a:rPr lang="en-US" sz="1000" dirty="0">
-                <a:solidFill>
-                  <a:srgbClr val="64748B"/>
-                </a:solidFill>
-                <a:latin typeface="Calibri" pitchFamily="34" charset="0"/>
-                <a:ea typeface="Calibri" pitchFamily="34" charset="-122"/>
-                <a:cs typeface="Calibri" pitchFamily="34" charset="-120"/>
-              </a:rPr>
-              <a:t>por mês</a:t>
-            </a:r>
-            <a:endParaRPr lang="en-US" sz="1000" dirty="0"/>
-          </a:p>
-        </p:txBody>
-      </p:sp>
-      <p:sp>
-        <p:nvSpPr>
-          <p:cNvPr id="12" name="Shape 10"/>
-          <p:cNvSpPr/>
-          <p:nvPr/>
-        </p:nvSpPr>
-        <p:spPr>
-          <a:xfrm>
-            <a:off x="1005840" y="4114800"/>
-            <a:ext cx="2697480" cy="0"/>
-          </a:xfrm>
-          <a:prstGeom prst="line">
-            <a:avLst/>
-          </a:prstGeom>
-          <a:noFill/>
-          <a:ln w="9525">
-            <a:solidFill>
-              <a:srgbClr val="E2E8F0"/>
-            </a:solidFill>
-            <a:prstDash val="solid"/>
-          </a:ln>
-        </p:spPr>
-      </p:sp>
-      <p:sp>
-        <p:nvSpPr>
-          <p:cNvPr id="13" name="Text 11"/>
-          <p:cNvSpPr/>
-          <p:nvPr/>
-        </p:nvSpPr>
-        <p:spPr>
-          <a:xfrm>
-            <a:off x="731520" y="4206240"/>
-            <a:ext cx="3246120" cy="274320"/>
-          </a:xfrm>
-          <a:prstGeom prst="rect">
-            <a:avLst/>
-          </a:prstGeom>
-          <a:noFill/>
-          <a:ln/>
-        </p:spPr>
-        <p:txBody>
-          <a:bodyPr wrap="square" lIns="0" tIns="0" rIns="0" bIns="0" rtlCol="0" anchor="ctr"/>
-          <a:lstStyle/>
-          <a:p>
-            <a:pPr algn="ctr" indent="0" marL="0">
-              <a:buNone/>
-            </a:pPr>
-            <a:r>
-              <a:rPr lang="en-US" sz="1100" b="1" dirty="0">
-                <a:solidFill>
-                  <a:srgbClr val="0A1940"/>
-                </a:solidFill>
-                <a:latin typeface="Calibri" pitchFamily="34" charset="0"/>
-                <a:ea typeface="Calibri" pitchFamily="34" charset="-122"/>
-                <a:cs typeface="Calibri" pitchFamily="34" charset="-120"/>
-              </a:rPr>
-              <a:t>+ R$ 15.000 de implementação</a:t>
-            </a:r>
-            <a:endParaRPr lang="en-US" sz="1100" dirty="0"/>
-          </a:p>
-        </p:txBody>
-      </p:sp>
-      <p:sp>
-        <p:nvSpPr>
-          <p:cNvPr id="14" name="Text 12"/>
-          <p:cNvSpPr/>
-          <p:nvPr/>
-        </p:nvSpPr>
-        <p:spPr>
-          <a:xfrm>
-            <a:off x="777240" y="4617720"/>
-            <a:ext cx="3200400" cy="1554480"/>
-          </a:xfrm>
-          <a:prstGeom prst="rect">
-            <a:avLst/>
-          </a:prstGeom>
-          <a:noFill/>
-          <a:ln/>
-        </p:spPr>
-        <p:txBody>
-          <a:bodyPr wrap="square" lIns="0" tIns="0" rIns="0" bIns="0" rtlCol="0" anchor="ctr"/>
-          <a:lstStyle/>
-          <a:p>
-            <a:pPr marL="342900" indent="-342900">
-              <a:spcAft>
-                <a:spcPts val="300"/>
-              </a:spcAft>
-              <a:buSzPct val="100000"/>
-              <a:buChar char="▪"/>
-            </a:pPr>
-            <a:r>
-              <a:rPr lang="en-US" sz="1050" dirty="0">
-                <a:solidFill>
-                  <a:srgbClr val="0A1940"/>
-                </a:solidFill>
-                <a:latin typeface="Calibri" pitchFamily="34" charset="0"/>
-                <a:ea typeface="Calibri" pitchFamily="34" charset="-122"/>
-                <a:cs typeface="Calibri" pitchFamily="34" charset="-120"/>
-              </a:rPr>
-              <a:t>Triagem de publicações com IA (Claude Haiku 4.5)</a:t>
-            </a:r>
-            <a:endParaRPr lang="en-US" sz="1050" dirty="0"/>
-          </a:p>
-          <a:p>
-            <a:pPr marL="342900" indent="-342900">
-              <a:spcAft>
-                <a:spcPts val="300"/>
-              </a:spcAft>
-              <a:buSzPct val="100000"/>
-              <a:buChar char="▪"/>
-            </a:pPr>
-            <a:r>
-              <a:rPr lang="en-US" sz="1050" dirty="0">
-                <a:solidFill>
-                  <a:srgbClr val="0A1940"/>
-                </a:solidFill>
-                <a:latin typeface="Calibri" pitchFamily="34" charset="0"/>
-                <a:ea typeface="Calibri" pitchFamily="34" charset="-122"/>
-                <a:cs typeface="Calibri" pitchFamily="34" charset="-120"/>
-              </a:rPr>
-              <a:t>Monitoramento DJEN + DataJud (CNJ)</a:t>
-            </a:r>
-            <a:endParaRPr lang="en-US" sz="1050" dirty="0"/>
-          </a:p>
-          <a:p>
-            <a:pPr marL="342900" indent="-342900">
-              <a:spcAft>
-                <a:spcPts val="300"/>
-              </a:spcAft>
-              <a:buSzPct val="100000"/>
-              <a:buChar char="▪"/>
-            </a:pPr>
-            <a:r>
-              <a:rPr lang="en-US" sz="1050" dirty="0">
-                <a:solidFill>
-                  <a:srgbClr val="0A1940"/>
-                </a:solidFill>
-                <a:latin typeface="Calibri" pitchFamily="34" charset="0"/>
-                <a:ea typeface="Calibri" pitchFamily="34" charset="-122"/>
-                <a:cs typeface="Calibri" pitchFamily="34" charset="-120"/>
-              </a:rPr>
-              <a:t>Detecção de embargos e agravos em órfãs</a:t>
-            </a:r>
-            <a:endParaRPr lang="en-US" sz="1050" dirty="0"/>
-          </a:p>
-          <a:p>
-            <a:pPr marL="342900" indent="-342900">
-              <a:spcAft>
-                <a:spcPts val="300"/>
-              </a:spcAft>
-              <a:buSzPct val="100000"/>
-              <a:buChar char="▪"/>
-            </a:pPr>
-            <a:r>
-              <a:rPr lang="en-US" sz="1050" dirty="0">
-                <a:solidFill>
-                  <a:srgbClr val="0A1940"/>
-                </a:solidFill>
-                <a:latin typeface="Calibri" pitchFamily="34" charset="0"/>
-                <a:ea typeface="Calibri" pitchFamily="34" charset="-122"/>
-                <a:cs typeface="Calibri" pitchFamily="34" charset="-120"/>
-              </a:rPr>
-              <a:t>1 RPA agendado sobre o Legal One</a:t>
-            </a:r>
-            <a:endParaRPr lang="en-US" sz="1050" dirty="0"/>
-          </a:p>
-          <a:p>
-            <a:pPr marL="342900" indent="-342900">
-              <a:spcAft>
-                <a:spcPts val="300"/>
-              </a:spcAft>
-              <a:buSzPct val="100000"/>
-              <a:buChar char="▪"/>
-            </a:pPr>
-            <a:r>
-              <a:rPr lang="en-US" sz="1050" dirty="0">
-                <a:solidFill>
-                  <a:srgbClr val="0A1940"/>
-                </a:solidFill>
-                <a:latin typeface="Calibri" pitchFamily="34" charset="0"/>
-                <a:ea typeface="Calibri" pitchFamily="34" charset="-122"/>
-                <a:cs typeface="Calibri" pitchFamily="34" charset="-120"/>
-              </a:rPr>
-              <a:t>Suporte em horário comercial</a:t>
-            </a:r>
-            <a:endParaRPr lang="en-US" sz="1050" dirty="0"/>
-          </a:p>
-        </p:txBody>
-      </p:sp>
-      <p:sp>
-        <p:nvSpPr>
-          <p:cNvPr id="15" name="Shape 13"/>
-          <p:cNvSpPr/>
-          <p:nvPr/>
-        </p:nvSpPr>
-        <p:spPr>
-          <a:xfrm>
-            <a:off x="4325112" y="2103120"/>
-            <a:ext cx="3611880" cy="4160520"/>
-          </a:xfrm>
-          <a:prstGeom prst="rect">
-            <a:avLst/>
-          </a:prstGeom>
-          <a:solidFill>
-            <a:srgbClr val="0A1940"/>
-          </a:solidFill>
-          <a:ln w="25400">
-            <a:solidFill>
-              <a:srgbClr val="1E7BFF"/>
-            </a:solidFill>
-            <a:prstDash val="solid"/>
-          </a:ln>
-          <a:effectLst>
-            <a:outerShdw sx="100000" sy="100000" kx="0" ky="0" algn="bl" rotWithShape="0" blurRad="177800" dist="50800" dir="5400000">
-              <a:srgbClr val="000000">
-                <a:alpha val="18000"/>
-              </a:srgbClr>
-            </a:outerShdw>
-          </a:effectLst>
-        </p:spPr>
-      </p:sp>
-      <p:sp>
-        <p:nvSpPr>
-          <p:cNvPr id="16" name="Shape 14"/>
-          <p:cNvSpPr/>
-          <p:nvPr/>
-        </p:nvSpPr>
-        <p:spPr>
-          <a:xfrm>
-            <a:off x="4325112" y="2103120"/>
-            <a:ext cx="3611880" cy="109728"/>
-          </a:xfrm>
-          <a:prstGeom prst="rect">
-            <a:avLst/>
-          </a:prstGeom>
-          <a:solidFill>
-            <a:srgbClr val="1E7BFF"/>
-          </a:solidFill>
-          <a:ln w="12700">
-            <a:solidFill>
-              <a:srgbClr val="1E7BFF"/>
-            </a:solidFill>
-            <a:prstDash val="solid"/>
-          </a:ln>
-        </p:spPr>
-      </p:sp>
-      <p:sp>
-        <p:nvSpPr>
-          <p:cNvPr id="17" name="Shape 15"/>
-          <p:cNvSpPr/>
-          <p:nvPr/>
-        </p:nvSpPr>
-        <p:spPr>
-          <a:xfrm>
-            <a:off x="5079492" y="1901952"/>
-            <a:ext cx="2103120" cy="384048"/>
-          </a:xfrm>
-          <a:prstGeom prst="rect">
-            <a:avLst/>
-          </a:prstGeom>
-          <a:solidFill>
-            <a:srgbClr val="1E7BFF"/>
-          </a:solidFill>
-          <a:ln w="12700">
-            <a:solidFill>
-              <a:srgbClr val="1E7BFF"/>
-            </a:solidFill>
-            <a:prstDash val="solid"/>
-          </a:ln>
-        </p:spPr>
-      </p:sp>
-      <p:sp>
-        <p:nvSpPr>
-          <p:cNvPr id="18" name="Text 16"/>
-          <p:cNvSpPr/>
-          <p:nvPr/>
-        </p:nvSpPr>
-        <p:spPr>
-          <a:xfrm>
-            <a:off x="5079492" y="1901952"/>
-            <a:ext cx="2103120" cy="384048"/>
-          </a:xfrm>
-          <a:prstGeom prst="rect">
-            <a:avLst/>
-          </a:prstGeom>
-          <a:noFill/>
-          <a:ln/>
-        </p:spPr>
-        <p:txBody>
-          <a:bodyPr wrap="square" lIns="0" tIns="0" rIns="0" bIns="0" rtlCol="0" anchor="ctr"/>
-          <a:lstStyle/>
-          <a:p>
-            <a:pPr algn="ctr" indent="0" marL="0">
-              <a:buNone/>
-            </a:pPr>
-            <a:r>
-              <a:rPr lang="en-US" sz="1100" b="1" spc="400" kern="0" dirty="0">
-                <a:solidFill>
-                  <a:srgbClr val="0A1940"/>
-                </a:solidFill>
-                <a:latin typeface="Calibri" pitchFamily="34" charset="0"/>
-                <a:ea typeface="Calibri" pitchFamily="34" charset="-122"/>
-                <a:cs typeface="Calibri" pitchFamily="34" charset="-120"/>
-              </a:rPr>
-              <a:t>★ RECOMENDADO</a:t>
-            </a:r>
-            <a:endParaRPr lang="en-US" sz="1100" dirty="0"/>
-          </a:p>
-        </p:txBody>
-      </p:sp>
-      <p:sp>
-        <p:nvSpPr>
-          <p:cNvPr id="19" name="Text 17"/>
-          <p:cNvSpPr/>
-          <p:nvPr/>
-        </p:nvSpPr>
-        <p:spPr>
-          <a:xfrm>
-            <a:off x="4507992" y="2377440"/>
-            <a:ext cx="3246120" cy="457200"/>
-          </a:xfrm>
-          <a:prstGeom prst="rect">
-            <a:avLst/>
-          </a:prstGeom>
-          <a:noFill/>
-          <a:ln/>
-        </p:spPr>
-        <p:txBody>
-          <a:bodyPr wrap="square" lIns="0" tIns="0" rIns="0" bIns="0" rtlCol="0" anchor="ctr"/>
-          <a:lstStyle/>
-          <a:p>
-            <a:pPr algn="ctr" indent="0" marL="0">
-              <a:buNone/>
-            </a:pPr>
-            <a:r>
-              <a:rPr lang="en-US" sz="2600" b="1" dirty="0">
-                <a:solidFill>
-                  <a:srgbClr val="FFFFFF"/>
-                </a:solidFill>
-                <a:latin typeface="Georgia" pitchFamily="34" charset="0"/>
-                <a:ea typeface="Georgia" pitchFamily="34" charset="-122"/>
-                <a:cs typeface="Georgia" pitchFamily="34" charset="-120"/>
-              </a:rPr>
-              <a:t>Pro</a:t>
-            </a:r>
-            <a:endParaRPr lang="en-US" sz="2600" dirty="0"/>
-          </a:p>
-        </p:txBody>
-      </p:sp>
-      <p:sp>
-        <p:nvSpPr>
-          <p:cNvPr id="20" name="Text 18"/>
-          <p:cNvSpPr/>
-          <p:nvPr/>
-        </p:nvSpPr>
-        <p:spPr>
-          <a:xfrm>
-            <a:off x="4507992" y="2880360"/>
-            <a:ext cx="3246120" cy="274320"/>
-          </a:xfrm>
-          <a:prstGeom prst="rect">
-            <a:avLst/>
-          </a:prstGeom>
-          <a:noFill/>
-          <a:ln/>
-        </p:spPr>
-        <p:txBody>
-          <a:bodyPr wrap="square" lIns="0" tIns="0" rIns="0" bIns="0" rtlCol="0" anchor="ctr"/>
-          <a:lstStyle/>
-          <a:p>
-            <a:pPr algn="ctr" indent="0" marL="0">
-              <a:buNone/>
-            </a:pPr>
-            <a:r>
-              <a:rPr lang="en-US" sz="1100" i="1" dirty="0">
-                <a:solidFill>
-                  <a:srgbClr val="CBD5E1"/>
-                </a:solidFill>
-                <a:latin typeface="Calibri" pitchFamily="34" charset="0"/>
-                <a:ea typeface="Calibri" pitchFamily="34" charset="-122"/>
-                <a:cs typeface="Calibri" pitchFamily="34" charset="-120"/>
-              </a:rPr>
-              <a:t>até 8.000 publicações/mês</a:t>
-            </a:r>
-            <a:endParaRPr lang="en-US" sz="1100" dirty="0"/>
-          </a:p>
-        </p:txBody>
-      </p:sp>
-      <p:sp>
-        <p:nvSpPr>
-          <p:cNvPr id="21" name="Text 19"/>
-          <p:cNvSpPr/>
-          <p:nvPr/>
-        </p:nvSpPr>
-        <p:spPr>
-          <a:xfrm>
-            <a:off x="4507992" y="3291840"/>
-            <a:ext cx="3246120" cy="548640"/>
-          </a:xfrm>
-          <a:prstGeom prst="rect">
-            <a:avLst/>
-          </a:prstGeom>
-          <a:noFill/>
-          <a:ln/>
-        </p:spPr>
-        <p:txBody>
-          <a:bodyPr wrap="square" lIns="0" tIns="0" rIns="0" bIns="0" rtlCol="0" anchor="ctr"/>
-          <a:lstStyle/>
-          <a:p>
-            <a:pPr algn="ctr" indent="0" marL="0">
-              <a:buNone/>
-            </a:pPr>
-            <a:r>
-              <a:rPr lang="en-US" sz="2800" b="1" dirty="0">
-                <a:solidFill>
-                  <a:srgbClr val="1E7BFF"/>
-                </a:solidFill>
-                <a:latin typeface="Georgia" pitchFamily="34" charset="0"/>
-                <a:ea typeface="Georgia" pitchFamily="34" charset="-122"/>
-                <a:cs typeface="Georgia" pitchFamily="34" charset="-120"/>
-              </a:rPr>
-              <a:t>R$ 6.900</a:t>
-            </a:r>
-            <a:endParaRPr lang="en-US" sz="2800" dirty="0"/>
-          </a:p>
-        </p:txBody>
-      </p:sp>
-      <p:sp>
-        <p:nvSpPr>
-          <p:cNvPr id="22" name="Text 20"/>
-          <p:cNvSpPr/>
-          <p:nvPr/>
-        </p:nvSpPr>
-        <p:spPr>
-          <a:xfrm>
-            <a:off x="4507992" y="3840480"/>
-            <a:ext cx="3246120" cy="201168"/>
-          </a:xfrm>
-          <a:prstGeom prst="rect">
-            <a:avLst/>
-          </a:prstGeom>
-          <a:noFill/>
-          <a:ln/>
-        </p:spPr>
-        <p:txBody>
-          <a:bodyPr wrap="square" lIns="0" tIns="0" rIns="0" bIns="0" rtlCol="0" anchor="ctr"/>
-          <a:lstStyle/>
-          <a:p>
-            <a:pPr algn="ctr" indent="0" marL="0">
-              <a:buNone/>
-            </a:pPr>
-            <a:r>
-              <a:rPr lang="en-US" sz="1000" dirty="0">
-                <a:solidFill>
-                  <a:srgbClr val="CBD5E1"/>
-                </a:solidFill>
-                <a:latin typeface="Calibri" pitchFamily="34" charset="0"/>
-                <a:ea typeface="Calibri" pitchFamily="34" charset="-122"/>
-                <a:cs typeface="Calibri" pitchFamily="34" charset="-120"/>
-              </a:rPr>
-              <a:t>por mês</a:t>
-            </a:r>
-            <a:endParaRPr lang="en-US" sz="1000" dirty="0"/>
-          </a:p>
-        </p:txBody>
-      </p:sp>
-      <p:sp>
-        <p:nvSpPr>
-          <p:cNvPr id="23" name="Shape 21"/>
-          <p:cNvSpPr/>
-          <p:nvPr/>
-        </p:nvSpPr>
-        <p:spPr>
-          <a:xfrm>
-            <a:off x="4782312" y="4114800"/>
-            <a:ext cx="2697480" cy="0"/>
-          </a:xfrm>
-          <a:prstGeom prst="line">
-            <a:avLst/>
-          </a:prstGeom>
-          <a:noFill/>
-          <a:ln w="9525">
-            <a:solidFill>
-              <a:srgbClr val="1558CC"/>
-            </a:solidFill>
-            <a:prstDash val="solid"/>
-          </a:ln>
-        </p:spPr>
-      </p:sp>
-      <p:sp>
-        <p:nvSpPr>
-          <p:cNvPr id="24" name="Text 22"/>
-          <p:cNvSpPr/>
-          <p:nvPr/>
-        </p:nvSpPr>
-        <p:spPr>
-          <a:xfrm>
-            <a:off x="4507992" y="4206240"/>
-            <a:ext cx="3246120" cy="274320"/>
-          </a:xfrm>
-          <a:prstGeom prst="rect">
-            <a:avLst/>
-          </a:prstGeom>
-          <a:noFill/>
-          <a:ln/>
-        </p:spPr>
-        <p:txBody>
-          <a:bodyPr wrap="square" lIns="0" tIns="0" rIns="0" bIns="0" rtlCol="0" anchor="ctr"/>
-          <a:lstStyle/>
-          <a:p>
-            <a:pPr algn="ctr" indent="0" marL="0">
-              <a:buNone/>
-            </a:pPr>
-            <a:r>
-              <a:rPr lang="en-US" sz="1100" b="1" dirty="0">
-                <a:solidFill>
-                  <a:srgbClr val="FFFFFF"/>
-                </a:solidFill>
-                <a:latin typeface="Calibri" pitchFamily="34" charset="0"/>
-                <a:ea typeface="Calibri" pitchFamily="34" charset="-122"/>
-                <a:cs typeface="Calibri" pitchFamily="34" charset="-120"/>
-              </a:rPr>
-              <a:t>+ R$ 25.000 de implementação</a:t>
-            </a:r>
-            <a:endParaRPr lang="en-US" sz="1100" dirty="0"/>
-          </a:p>
-        </p:txBody>
-      </p:sp>
-      <p:sp>
-        <p:nvSpPr>
-          <p:cNvPr id="25" name="Text 23"/>
-          <p:cNvSpPr/>
-          <p:nvPr/>
-        </p:nvSpPr>
-        <p:spPr>
-          <a:xfrm>
-            <a:off x="4553712" y="4617720"/>
-            <a:ext cx="3200400" cy="1554480"/>
-          </a:xfrm>
-          <a:prstGeom prst="rect">
-            <a:avLst/>
-          </a:prstGeom>
-          <a:noFill/>
-          <a:ln/>
-        </p:spPr>
-        <p:txBody>
-          <a:bodyPr wrap="square" lIns="0" tIns="0" rIns="0" bIns="0" rtlCol="0" anchor="ctr"/>
-          <a:lstStyle/>
-          <a:p>
-            <a:pPr marL="342900" indent="-342900">
-              <a:spcAft>
-                <a:spcPts val="300"/>
-              </a:spcAft>
-              <a:buSzPct val="100000"/>
-              <a:buChar char="▪"/>
-            </a:pPr>
-            <a:r>
-              <a:rPr lang="en-US" sz="1050" dirty="0">
-                <a:solidFill>
-                  <a:srgbClr val="FFFFFF"/>
-                </a:solidFill>
-                <a:latin typeface="Calibri" pitchFamily="34" charset="0"/>
-                <a:ea typeface="Calibri" pitchFamily="34" charset="-122"/>
-                <a:cs typeface="Calibri" pitchFamily="34" charset="-120"/>
-              </a:rPr>
-              <a:t>Tudo do Starter</a:t>
-            </a:r>
-            <a:endParaRPr lang="en-US" sz="1050" dirty="0"/>
-          </a:p>
-          <a:p>
-            <a:pPr marL="342900" indent="-342900">
-              <a:spcAft>
-                <a:spcPts val="300"/>
-              </a:spcAft>
-              <a:buSzPct val="100000"/>
-              <a:buChar char="▪"/>
-            </a:pPr>
-            <a:r>
-              <a:rPr lang="en-US" sz="1050" dirty="0">
-                <a:solidFill>
-                  <a:srgbClr val="FFFFFF"/>
-                </a:solidFill>
-                <a:latin typeface="Calibri" pitchFamily="34" charset="0"/>
-                <a:ea typeface="Calibri" pitchFamily="34" charset="-122"/>
-                <a:cs typeface="Calibri" pitchFamily="34" charset="-120"/>
-              </a:rPr>
-              <a:t>Até 5 RPAs sob medida</a:t>
-            </a:r>
-            <a:endParaRPr lang="en-US" sz="1050" dirty="0"/>
-          </a:p>
-          <a:p>
-            <a:pPr marL="342900" indent="-342900">
-              <a:spcAft>
-                <a:spcPts val="300"/>
-              </a:spcAft>
-              <a:buSzPct val="100000"/>
-              <a:buChar char="▪"/>
-            </a:pPr>
-            <a:r>
-              <a:rPr lang="en-US" sz="1050" dirty="0">
-                <a:solidFill>
-                  <a:srgbClr val="FFFFFF"/>
-                </a:solidFill>
-                <a:latin typeface="Calibri" pitchFamily="34" charset="0"/>
-                <a:ea typeface="Calibri" pitchFamily="34" charset="-122"/>
-                <a:cs typeface="Calibri" pitchFamily="34" charset="-120"/>
-              </a:rPr>
-              <a:t>Dashboards e filtros customizados</a:t>
-            </a:r>
-            <a:endParaRPr lang="en-US" sz="1050" dirty="0"/>
-          </a:p>
-          <a:p>
-            <a:pPr marL="342900" indent="-342900">
-              <a:spcAft>
-                <a:spcPts val="300"/>
-              </a:spcAft>
-              <a:buSzPct val="100000"/>
-              <a:buChar char="▪"/>
-            </a:pPr>
-            <a:r>
-              <a:rPr lang="en-US" sz="1050" dirty="0">
-                <a:solidFill>
-                  <a:srgbClr val="FFFFFF"/>
-                </a:solidFill>
-                <a:latin typeface="Calibri" pitchFamily="34" charset="0"/>
-                <a:ea typeface="Calibri" pitchFamily="34" charset="-122"/>
-                <a:cs typeface="Calibri" pitchFamily="34" charset="-120"/>
-              </a:rPr>
-              <a:t>SLA de resposta em 8 horas úteis</a:t>
-            </a:r>
-            <a:endParaRPr lang="en-US" sz="1050" dirty="0"/>
-          </a:p>
-          <a:p>
-            <a:pPr marL="342900" indent="-342900">
-              <a:spcAft>
-                <a:spcPts val="300"/>
-              </a:spcAft>
-              <a:buSzPct val="100000"/>
-              <a:buChar char="▪"/>
-            </a:pPr>
-            <a:r>
-              <a:rPr lang="en-US" sz="1050" dirty="0">
-                <a:solidFill>
-                  <a:srgbClr val="FFFFFF"/>
-                </a:solidFill>
-                <a:latin typeface="Calibri" pitchFamily="34" charset="0"/>
-                <a:ea typeface="Calibri" pitchFamily="34" charset="-122"/>
-                <a:cs typeface="Calibri" pitchFamily="34" charset="-120"/>
-              </a:rPr>
-              <a:t>Relatórios mensais de volume e economia</a:t>
-            </a:r>
-            <a:endParaRPr lang="en-US" sz="1050" dirty="0"/>
-          </a:p>
-        </p:txBody>
-      </p:sp>
-      <p:sp>
-        <p:nvSpPr>
-          <p:cNvPr id="26" name="Shape 24"/>
-          <p:cNvSpPr/>
-          <p:nvPr/>
-        </p:nvSpPr>
-        <p:spPr>
-          <a:xfrm>
-            <a:off x="8101584" y="2103120"/>
-            <a:ext cx="3611880" cy="4160520"/>
+              <a:t>Incorporar movimentos processuais críticos e prazos sugeridos.</a:t>
+            </a:r>
+            <a:endParaRPr lang="en-US" sz="1150" dirty="0"/>
+          </a:p>
+        </p:txBody>
+      </p:sp>
+      <p:sp>
+        <p:nvSpPr>
+          <p:cNvPr id="10" name="Shape 8"/>
+          <p:cNvSpPr/>
+          <p:nvPr/>
+        </p:nvSpPr>
+        <p:spPr>
+          <a:xfrm>
+            <a:off x="548640" y="2670048"/>
+            <a:ext cx="11064240" cy="749808"/>
           </a:xfrm>
           <a:prstGeom prst="rect">
             <a:avLst/>
@@ -5536,24 +5283,24 @@
       </p:sp>
       <p:sp>
         <p:nvSpPr>
-          <p:cNvPr id="27" name="Shape 25"/>
-          <p:cNvSpPr/>
-          <p:nvPr/>
-        </p:nvSpPr>
-        <p:spPr>
-          <a:xfrm>
-            <a:off x="8101584" y="2103120"/>
-            <a:ext cx="3611880" cy="109728"/>
+          <p:cNvPr id="11" name="Shape 9"/>
+          <p:cNvSpPr/>
+          <p:nvPr/>
+        </p:nvSpPr>
+        <p:spPr>
+          <a:xfrm>
+            <a:off x="548640" y="2670048"/>
+            <a:ext cx="822960" cy="749808"/>
           </a:xfrm>
           <a:prstGeom prst="rect">
             <a:avLst/>
           </a:prstGeom>
           <a:solidFill>
-            <a:srgbClr val="0EA5A4"/>
+            <a:srgbClr val="0A1940"/>
           </a:solidFill>
           <a:ln w="12700">
             <a:solidFill>
-              <a:srgbClr val="0EA5A4"/>
+              <a:srgbClr val="0A1940"/>
             </a:solidFill>
             <a:prstDash val="solid"/>
           </a:ln>
@@ -5561,14 +5308,14 @@
       </p:sp>
       <p:sp>
         <p:nvSpPr>
-          <p:cNvPr id="28" name="Text 26"/>
-          <p:cNvSpPr/>
-          <p:nvPr/>
-        </p:nvSpPr>
-        <p:spPr>
-          <a:xfrm>
-            <a:off x="8284464" y="2377440"/>
-            <a:ext cx="3246120" cy="457200"/>
+          <p:cNvPr id="12" name="Text 10"/>
+          <p:cNvSpPr/>
+          <p:nvPr/>
+        </p:nvSpPr>
+        <p:spPr>
+          <a:xfrm>
+            <a:off x="548640" y="2670048"/>
+            <a:ext cx="822960" cy="749808"/>
           </a:xfrm>
           <a:prstGeom prst="rect">
             <a:avLst/>
@@ -5584,46 +5331,85 @@
               <a:buNone/>
             </a:pPr>
             <a:r>
-              <a:rPr lang="en-US" sz="2600" b="1" dirty="0">
-                <a:solidFill>
-                  <a:srgbClr val="0A1940"/>
+              <a:rPr lang="en-US" sz="2800" b="1" dirty="0">
+                <a:solidFill>
+                  <a:srgbClr val="1E7BFF"/>
                 </a:solidFill>
                 <a:latin typeface="Georgia" pitchFamily="34" charset="0"/>
                 <a:ea typeface="Georgia" pitchFamily="34" charset="-122"/>
                 <a:cs typeface="Georgia" pitchFamily="34" charset="-120"/>
               </a:rPr>
-              <a:t>Enterprise</a:t>
-            </a:r>
-            <a:endParaRPr lang="en-US" sz="2600" dirty="0"/>
-          </a:p>
-        </p:txBody>
-      </p:sp>
-      <p:sp>
-        <p:nvSpPr>
-          <p:cNvPr id="29" name="Text 27"/>
-          <p:cNvSpPr/>
-          <p:nvPr/>
-        </p:nvSpPr>
-        <p:spPr>
-          <a:xfrm>
-            <a:off x="8284464" y="2880360"/>
-            <a:ext cx="3246120" cy="274320"/>
-          </a:xfrm>
-          <a:prstGeom prst="rect">
-            <a:avLst/>
-          </a:prstGeom>
-          <a:noFill/>
-          <a:ln/>
-        </p:spPr>
-        <p:txBody>
-          <a:bodyPr wrap="square" lIns="0" tIns="0" rIns="0" bIns="0" rtlCol="0" anchor="ctr"/>
-          <a:lstStyle/>
-          <a:p>
-            <a:pPr algn="ctr" indent="0" marL="0">
-              <a:buNone/>
-            </a:pPr>
-            <a:r>
-              <a:rPr lang="en-US" sz="1100" i="1" dirty="0">
+              <a:t>2</a:t>
+            </a:r>
+            <a:endParaRPr lang="en-US" sz="2800" dirty="0"/>
+          </a:p>
+        </p:txBody>
+      </p:sp>
+      <p:sp>
+        <p:nvSpPr>
+          <p:cNvPr id="13" name="Text 11"/>
+          <p:cNvSpPr/>
+          <p:nvPr/>
+        </p:nvSpPr>
+        <p:spPr>
+          <a:xfrm>
+            <a:off x="1554480" y="2743200"/>
+            <a:ext cx="9966960" cy="347472"/>
+          </a:xfrm>
+          <a:prstGeom prst="rect">
+            <a:avLst/>
+          </a:prstGeom>
+          <a:noFill/>
+          <a:ln/>
+        </p:spPr>
+        <p:txBody>
+          <a:bodyPr wrap="square" lIns="0" tIns="0" rIns="0" bIns="0" rtlCol="0" anchor="ctr"/>
+          <a:lstStyle/>
+          <a:p>
+            <a:pPr indent="0" marL="0">
+              <a:buNone/>
+            </a:pPr>
+            <a:r>
+              <a:rPr lang="en-US" sz="1400" b="1" dirty="0">
+                <a:solidFill>
+                  <a:srgbClr val="111827"/>
+                </a:solidFill>
+                <a:latin typeface="Calibri" pitchFamily="34" charset="0"/>
+                <a:ea typeface="Calibri" pitchFamily="34" charset="-122"/>
+                <a:cs typeface="Calibri" pitchFamily="34" charset="-120"/>
+              </a:rPr>
+              <a:t>Expandir as classes detectadas por IA</a:t>
+            </a:r>
+            <a:endParaRPr lang="en-US" sz="1400" dirty="0"/>
+          </a:p>
+        </p:txBody>
+      </p:sp>
+      <p:sp>
+        <p:nvSpPr>
+          <p:cNvPr id="14" name="Text 12"/>
+          <p:cNvSpPr/>
+          <p:nvPr/>
+        </p:nvSpPr>
+        <p:spPr>
+          <a:xfrm>
+            <a:off x="1554480" y="3054096"/>
+            <a:ext cx="9966960" cy="347472"/>
+          </a:xfrm>
+          <a:prstGeom prst="rect">
+            <a:avLst/>
+          </a:prstGeom>
+          <a:noFill/>
+          <a:ln/>
+        </p:spPr>
+        <p:txBody>
+          <a:bodyPr wrap="square" lIns="0" tIns="0" rIns="0" bIns="0" rtlCol="0" anchor="ctr"/>
+          <a:lstStyle/>
+          <a:p>
+            <a:pPr indent="0" marL="0">
+              <a:buNone/>
+            </a:pPr>
+            <a:r>
+              <a:rPr lang="en-US" sz="1150" dirty="0">
                 <a:solidFill>
                   <a:srgbClr val="64748B"/>
                 </a:solidFill>
@@ -5631,162 +5417,79 @@
                 <a:ea typeface="Calibri" pitchFamily="34" charset="-122"/>
                 <a:cs typeface="Calibri" pitchFamily="34" charset="-120"/>
               </a:rPr>
-              <a:t>volume ilimitado</a:t>
-            </a:r>
-            <a:endParaRPr lang="en-US" sz="1100" dirty="0"/>
-          </a:p>
-        </p:txBody>
-      </p:sp>
-      <p:sp>
-        <p:nvSpPr>
-          <p:cNvPr id="30" name="Text 28"/>
-          <p:cNvSpPr/>
-          <p:nvPr/>
-        </p:nvSpPr>
-        <p:spPr>
-          <a:xfrm>
-            <a:off x="8284464" y="3200400"/>
-            <a:ext cx="3246120" cy="256032"/>
-          </a:xfrm>
-          <a:prstGeom prst="rect">
-            <a:avLst/>
-          </a:prstGeom>
-          <a:noFill/>
-          <a:ln/>
-        </p:spPr>
-        <p:txBody>
-          <a:bodyPr wrap="square" lIns="0" tIns="0" rIns="0" bIns="0" rtlCol="0" anchor="ctr"/>
-          <a:lstStyle/>
-          <a:p>
-            <a:pPr algn="ctr" indent="0" marL="0">
-              <a:buNone/>
-            </a:pPr>
-            <a:r>
-              <a:rPr lang="en-US" sz="1100" i="1" dirty="0">
-                <a:solidFill>
-                  <a:srgbClr val="64748B"/>
-                </a:solidFill>
-                <a:latin typeface="Calibri" pitchFamily="34" charset="0"/>
-                <a:ea typeface="Calibri" pitchFamily="34" charset="-122"/>
-                <a:cs typeface="Calibri" pitchFamily="34" charset="-120"/>
-              </a:rPr>
-              <a:t>a partir de</a:t>
-            </a:r>
-            <a:endParaRPr lang="en-US" sz="1100" dirty="0"/>
-          </a:p>
-        </p:txBody>
-      </p:sp>
-      <p:sp>
-        <p:nvSpPr>
-          <p:cNvPr id="31" name="Text 29"/>
-          <p:cNvSpPr/>
-          <p:nvPr/>
-        </p:nvSpPr>
-        <p:spPr>
-          <a:xfrm>
-            <a:off x="8284464" y="3429000"/>
-            <a:ext cx="3246120" cy="502920"/>
-          </a:xfrm>
-          <a:prstGeom prst="rect">
-            <a:avLst/>
-          </a:prstGeom>
-          <a:noFill/>
-          <a:ln/>
-        </p:spPr>
-        <p:txBody>
-          <a:bodyPr wrap="square" lIns="0" tIns="0" rIns="0" bIns="0" rtlCol="0" anchor="ctr"/>
-          <a:lstStyle/>
-          <a:p>
-            <a:pPr algn="ctr" indent="0" marL="0">
-              <a:buNone/>
-            </a:pPr>
-            <a:r>
-              <a:rPr lang="en-US" sz="2800" b="1" dirty="0">
-                <a:solidFill>
-                  <a:srgbClr val="0B7A79"/>
-                </a:solidFill>
-                <a:latin typeface="Georgia" pitchFamily="34" charset="0"/>
-                <a:ea typeface="Georgia" pitchFamily="34" charset="-122"/>
-                <a:cs typeface="Georgia" pitchFamily="34" charset="-120"/>
-              </a:rPr>
-              <a:t>R$ 12.000</a:t>
-            </a:r>
-            <a:endParaRPr lang="en-US" sz="2800" dirty="0"/>
-          </a:p>
-        </p:txBody>
-      </p:sp>
-      <p:sp>
-        <p:nvSpPr>
-          <p:cNvPr id="32" name="Text 30"/>
-          <p:cNvSpPr/>
-          <p:nvPr/>
-        </p:nvSpPr>
-        <p:spPr>
-          <a:xfrm>
-            <a:off x="8284464" y="3931920"/>
-            <a:ext cx="3246120" cy="201168"/>
-          </a:xfrm>
-          <a:prstGeom prst="rect">
-            <a:avLst/>
-          </a:prstGeom>
-          <a:noFill/>
-          <a:ln/>
-        </p:spPr>
-        <p:txBody>
-          <a:bodyPr wrap="square" lIns="0" tIns="0" rIns="0" bIns="0" rtlCol="0" anchor="ctr"/>
-          <a:lstStyle/>
-          <a:p>
-            <a:pPr algn="ctr" indent="0" marL="0">
-              <a:buNone/>
-            </a:pPr>
-            <a:r>
-              <a:rPr lang="en-US" sz="1000" dirty="0">
-                <a:solidFill>
-                  <a:srgbClr val="64748B"/>
-                </a:solidFill>
-                <a:latin typeface="Calibri" pitchFamily="34" charset="0"/>
-                <a:ea typeface="Calibri" pitchFamily="34" charset="-122"/>
-                <a:cs typeface="Calibri" pitchFamily="34" charset="-120"/>
-              </a:rPr>
-              <a:t>por mês</a:t>
-            </a:r>
-            <a:endParaRPr lang="en-US" sz="1000" dirty="0"/>
-          </a:p>
-        </p:txBody>
-      </p:sp>
-      <p:sp>
-        <p:nvSpPr>
-          <p:cNvPr id="33" name="Shape 31"/>
-          <p:cNvSpPr/>
-          <p:nvPr/>
-        </p:nvSpPr>
-        <p:spPr>
-          <a:xfrm>
-            <a:off x="8558784" y="4114800"/>
-            <a:ext cx="2697480" cy="0"/>
-          </a:xfrm>
-          <a:prstGeom prst="line">
-            <a:avLst/>
-          </a:prstGeom>
-          <a:noFill/>
-          <a:ln w="9525">
+              <a:t>A partir dos embargos e agravos, alcançar execuções fiscais, tutelas e recursos especiais.</a:t>
+            </a:r>
+            <a:endParaRPr lang="en-US" sz="1150" dirty="0"/>
+          </a:p>
+        </p:txBody>
+      </p:sp>
+      <p:sp>
+        <p:nvSpPr>
+          <p:cNvPr id="15" name="Shape 13"/>
+          <p:cNvSpPr/>
+          <p:nvPr/>
+        </p:nvSpPr>
+        <p:spPr>
+          <a:xfrm>
+            <a:off x="548640" y="3557016"/>
+            <a:ext cx="11064240" cy="749808"/>
+          </a:xfrm>
+          <a:prstGeom prst="rect">
+            <a:avLst/>
+          </a:prstGeom>
+          <a:solidFill>
+            <a:srgbClr val="FFFFFF"/>
+          </a:solidFill>
+          <a:ln w="6350">
             <a:solidFill>
               <a:srgbClr val="E2E8F0"/>
             </a:solidFill>
             <a:prstDash val="solid"/>
           </a:ln>
-        </p:spPr>
-      </p:sp>
-      <p:sp>
-        <p:nvSpPr>
-          <p:cNvPr id="34" name="Text 32"/>
-          <p:cNvSpPr/>
-          <p:nvPr/>
-        </p:nvSpPr>
-        <p:spPr>
-          <a:xfrm>
-            <a:off x="8284464" y="4206240"/>
-            <a:ext cx="3246120" cy="274320"/>
+          <a:effectLst>
+            <a:outerShdw sx="100000" sy="100000" kx="0" ky="0" algn="bl" rotWithShape="0" blurRad="127000" dist="38100" dir="5400000">
+              <a:srgbClr val="000000">
+                <a:alpha val="10000"/>
+              </a:srgbClr>
+            </a:outerShdw>
+          </a:effectLst>
+        </p:spPr>
+      </p:sp>
+      <p:sp>
+        <p:nvSpPr>
+          <p:cNvPr id="16" name="Shape 14"/>
+          <p:cNvSpPr/>
+          <p:nvPr/>
+        </p:nvSpPr>
+        <p:spPr>
+          <a:xfrm>
+            <a:off x="548640" y="3557016"/>
+            <a:ext cx="822960" cy="749808"/>
+          </a:xfrm>
+          <a:prstGeom prst="rect">
+            <a:avLst/>
+          </a:prstGeom>
+          <a:solidFill>
+            <a:srgbClr val="0A1940"/>
+          </a:solidFill>
+          <a:ln w="12700">
+            <a:solidFill>
+              <a:srgbClr val="0A1940"/>
+            </a:solidFill>
+            <a:prstDash val="solid"/>
+          </a:ln>
+        </p:spPr>
+      </p:sp>
+      <p:sp>
+        <p:nvSpPr>
+          <p:cNvPr id="17" name="Text 15"/>
+          <p:cNvSpPr/>
+          <p:nvPr/>
+        </p:nvSpPr>
+        <p:spPr>
+          <a:xfrm>
+            <a:off x="548640" y="3557016"/>
+            <a:ext cx="822960" cy="749808"/>
           </a:xfrm>
           <a:prstGeom prst="rect">
             <a:avLst/>
@@ -5802,157 +5505,165 @@
               <a:buNone/>
             </a:pPr>
             <a:r>
-              <a:rPr lang="en-US" sz="1100" b="1" dirty="0">
-                <a:solidFill>
-                  <a:srgbClr val="0A1940"/>
-                </a:solidFill>
-                <a:latin typeface="Calibri" pitchFamily="34" charset="0"/>
-                <a:ea typeface="Calibri" pitchFamily="34" charset="-122"/>
-                <a:cs typeface="Calibri" pitchFamily="34" charset="-120"/>
-              </a:rPr>
-              <a:t>+ desde R$ 45.000 de implementação</a:t>
-            </a:r>
-            <a:endParaRPr lang="en-US" sz="1100" dirty="0"/>
-          </a:p>
-        </p:txBody>
-      </p:sp>
-      <p:sp>
-        <p:nvSpPr>
-          <p:cNvPr id="35" name="Text 33"/>
-          <p:cNvSpPr/>
-          <p:nvPr/>
-        </p:nvSpPr>
-        <p:spPr>
-          <a:xfrm>
-            <a:off x="8330184" y="4617720"/>
-            <a:ext cx="3200400" cy="1554480"/>
-          </a:xfrm>
-          <a:prstGeom prst="rect">
-            <a:avLst/>
-          </a:prstGeom>
-          <a:noFill/>
-          <a:ln/>
-        </p:spPr>
-        <p:txBody>
-          <a:bodyPr wrap="square" lIns="0" tIns="0" rIns="0" bIns="0" rtlCol="0" anchor="ctr"/>
-          <a:lstStyle/>
-          <a:p>
-            <a:pPr marL="342900" indent="-342900">
-              <a:spcAft>
-                <a:spcPts val="300"/>
-              </a:spcAft>
-              <a:buSzPct val="100000"/>
-              <a:buChar char="▪"/>
-            </a:pPr>
-            <a:r>
-              <a:rPr lang="en-US" sz="1050" dirty="0">
-                <a:solidFill>
-                  <a:srgbClr val="0A1940"/>
-                </a:solidFill>
-                <a:latin typeface="Calibri" pitchFamily="34" charset="0"/>
-                <a:ea typeface="Calibri" pitchFamily="34" charset="-122"/>
-                <a:cs typeface="Calibri" pitchFamily="34" charset="-120"/>
-              </a:rPr>
-              <a:t>Tudo do Pro</a:t>
-            </a:r>
-            <a:endParaRPr lang="en-US" sz="1050" dirty="0"/>
-          </a:p>
-          <a:p>
-            <a:pPr marL="342900" indent="-342900">
-              <a:spcAft>
-                <a:spcPts val="300"/>
-              </a:spcAft>
-              <a:buSzPct val="100000"/>
-              <a:buChar char="▪"/>
-            </a:pPr>
-            <a:r>
-              <a:rPr lang="en-US" sz="1050" dirty="0">
-                <a:solidFill>
-                  <a:srgbClr val="0A1940"/>
-                </a:solidFill>
-                <a:latin typeface="Calibri" pitchFamily="34" charset="0"/>
-                <a:ea typeface="Calibri" pitchFamily="34" charset="-122"/>
-                <a:cs typeface="Calibri" pitchFamily="34" charset="-120"/>
-              </a:rPr>
-              <a:t>RPAs ilimitados e filas prioritárias</a:t>
-            </a:r>
-            <a:endParaRPr lang="en-US" sz="1050" dirty="0"/>
-          </a:p>
-          <a:p>
-            <a:pPr marL="342900" indent="-342900">
-              <a:spcAft>
-                <a:spcPts val="300"/>
-              </a:spcAft>
-              <a:buSzPct val="100000"/>
-              <a:buChar char="▪"/>
-            </a:pPr>
-            <a:r>
-              <a:rPr lang="en-US" sz="1050" dirty="0">
-                <a:solidFill>
-                  <a:srgbClr val="0A1940"/>
-                </a:solidFill>
-                <a:latin typeface="Calibri" pitchFamily="34" charset="0"/>
-                <a:ea typeface="Calibri" pitchFamily="34" charset="-122"/>
-                <a:cs typeface="Calibri" pitchFamily="34" charset="-120"/>
-              </a:rPr>
-              <a:t>SLA de 4 horas úteis</a:t>
-            </a:r>
-            <a:endParaRPr lang="en-US" sz="1050" dirty="0"/>
-          </a:p>
-          <a:p>
-            <a:pPr marL="342900" indent="-342900">
-              <a:spcAft>
-                <a:spcPts val="300"/>
-              </a:spcAft>
-              <a:buSzPct val="100000"/>
-              <a:buChar char="▪"/>
-            </a:pPr>
-            <a:r>
-              <a:rPr lang="en-US" sz="1050" dirty="0">
-                <a:solidFill>
-                  <a:srgbClr val="0A1940"/>
-                </a:solidFill>
-                <a:latin typeface="Calibri" pitchFamily="34" charset="0"/>
-                <a:ea typeface="Calibri" pitchFamily="34" charset="-122"/>
-                <a:cs typeface="Calibri" pitchFamily="34" charset="-120"/>
-              </a:rPr>
-              <a:t>CSM dedicado + treinamentos recorrentes</a:t>
-            </a:r>
-            <a:endParaRPr lang="en-US" sz="1050" dirty="0"/>
-          </a:p>
-          <a:p>
-            <a:pPr marL="342900" indent="-342900">
-              <a:spcAft>
-                <a:spcPts val="300"/>
-              </a:spcAft>
-              <a:buSzPct val="100000"/>
-              <a:buChar char="▪"/>
-            </a:pPr>
-            <a:r>
-              <a:rPr lang="en-US" sz="1050" dirty="0">
-                <a:solidFill>
-                  <a:srgbClr val="0A1940"/>
-                </a:solidFill>
-                <a:latin typeface="Calibri" pitchFamily="34" charset="0"/>
-                <a:ea typeface="Calibri" pitchFamily="34" charset="-122"/>
-                <a:cs typeface="Calibri" pitchFamily="34" charset="-120"/>
-              </a:rPr>
-              <a:t>SSO, integrações custom e ambiente dedicado</a:t>
-            </a:r>
-            <a:endParaRPr lang="en-US" sz="1050" dirty="0"/>
-          </a:p>
-        </p:txBody>
-      </p:sp>
-      <p:sp>
-        <p:nvSpPr>
-          <p:cNvPr id="36" name="Text 34"/>
-          <p:cNvSpPr/>
-          <p:nvPr/>
-        </p:nvSpPr>
-        <p:spPr>
-          <a:xfrm>
-            <a:off x="548640" y="6263640"/>
-            <a:ext cx="11064240" cy="256032"/>
+              <a:rPr lang="en-US" sz="2800" b="1" dirty="0">
+                <a:solidFill>
+                  <a:srgbClr val="1E7BFF"/>
+                </a:solidFill>
+                <a:latin typeface="Georgia" pitchFamily="34" charset="0"/>
+                <a:ea typeface="Georgia" pitchFamily="34" charset="-122"/>
+                <a:cs typeface="Georgia" pitchFamily="34" charset="-120"/>
+              </a:rPr>
+              <a:t>3</a:t>
+            </a:r>
+            <a:endParaRPr lang="en-US" sz="2800" dirty="0"/>
+          </a:p>
+        </p:txBody>
+      </p:sp>
+      <p:sp>
+        <p:nvSpPr>
+          <p:cNvPr id="18" name="Text 16"/>
+          <p:cNvSpPr/>
+          <p:nvPr/>
+        </p:nvSpPr>
+        <p:spPr>
+          <a:xfrm>
+            <a:off x="1554480" y="3630168"/>
+            <a:ext cx="9966960" cy="347472"/>
+          </a:xfrm>
+          <a:prstGeom prst="rect">
+            <a:avLst/>
+          </a:prstGeom>
+          <a:noFill/>
+          <a:ln/>
+        </p:spPr>
+        <p:txBody>
+          <a:bodyPr wrap="square" lIns="0" tIns="0" rIns="0" bIns="0" rtlCol="0" anchor="ctr"/>
+          <a:lstStyle/>
+          <a:p>
+            <a:pPr indent="0" marL="0">
+              <a:buNone/>
+            </a:pPr>
+            <a:r>
+              <a:rPr lang="en-US" sz="1400" b="1" dirty="0">
+                <a:solidFill>
+                  <a:srgbClr val="111827"/>
+                </a:solidFill>
+                <a:latin typeface="Calibri" pitchFamily="34" charset="0"/>
+                <a:ea typeface="Calibri" pitchFamily="34" charset="-122"/>
+                <a:cs typeface="Calibri" pitchFamily="34" charset="-120"/>
+              </a:rPr>
+              <a:t>Ampliar o painel de riscos</a:t>
+            </a:r>
+            <a:endParaRPr lang="en-US" sz="1400" dirty="0"/>
+          </a:p>
+        </p:txBody>
+      </p:sp>
+      <p:sp>
+        <p:nvSpPr>
+          <p:cNvPr id="19" name="Text 17"/>
+          <p:cNvSpPr/>
+          <p:nvPr/>
+        </p:nvSpPr>
+        <p:spPr>
+          <a:xfrm>
+            <a:off x="1554480" y="3941064"/>
+            <a:ext cx="9966960" cy="347472"/>
+          </a:xfrm>
+          <a:prstGeom prst="rect">
+            <a:avLst/>
+          </a:prstGeom>
+          <a:noFill/>
+          <a:ln/>
+        </p:spPr>
+        <p:txBody>
+          <a:bodyPr wrap="square" lIns="0" tIns="0" rIns="0" bIns="0" rtlCol="0" anchor="ctr"/>
+          <a:lstStyle/>
+          <a:p>
+            <a:pPr indent="0" marL="0">
+              <a:buNone/>
+            </a:pPr>
+            <a:r>
+              <a:rPr lang="en-US" sz="1150" dirty="0">
+                <a:solidFill>
+                  <a:srgbClr val="64748B"/>
+                </a:solidFill>
+                <a:latin typeface="Calibri" pitchFamily="34" charset="0"/>
+                <a:ea typeface="Calibri" pitchFamily="34" charset="-122"/>
+                <a:cs typeface="Calibri" pitchFamily="34" charset="-120"/>
+              </a:rPr>
+              <a:t>Sobre o dashboard atual (KPIs, funil, velocidade), consolidar publicações órfãs, pastas em regressão e prazos em janela crítica.</a:t>
+            </a:r>
+            <a:endParaRPr lang="en-US" sz="1150" dirty="0"/>
+          </a:p>
+        </p:txBody>
+      </p:sp>
+      <p:sp>
+        <p:nvSpPr>
+          <p:cNvPr id="20" name="Shape 18"/>
+          <p:cNvSpPr/>
+          <p:nvPr/>
+        </p:nvSpPr>
+        <p:spPr>
+          <a:xfrm>
+            <a:off x="548640" y="4443984"/>
+            <a:ext cx="11064240" cy="749808"/>
+          </a:xfrm>
+          <a:prstGeom prst="rect">
+            <a:avLst/>
+          </a:prstGeom>
+          <a:solidFill>
+            <a:srgbClr val="FFFFFF"/>
+          </a:solidFill>
+          <a:ln w="6350">
+            <a:solidFill>
+              <a:srgbClr val="E2E8F0"/>
+            </a:solidFill>
+            <a:prstDash val="solid"/>
+          </a:ln>
+          <a:effectLst>
+            <a:outerShdw sx="100000" sy="100000" kx="0" ky="0" algn="bl" rotWithShape="0" blurRad="127000" dist="38100" dir="5400000">
+              <a:srgbClr val="000000">
+                <a:alpha val="10000"/>
+              </a:srgbClr>
+            </a:outerShdw>
+          </a:effectLst>
+        </p:spPr>
+      </p:sp>
+      <p:sp>
+        <p:nvSpPr>
+          <p:cNvPr id="21" name="Shape 19"/>
+          <p:cNvSpPr/>
+          <p:nvPr/>
+        </p:nvSpPr>
+        <p:spPr>
+          <a:xfrm>
+            <a:off x="548640" y="4443984"/>
+            <a:ext cx="822960" cy="749808"/>
+          </a:xfrm>
+          <a:prstGeom prst="rect">
+            <a:avLst/>
+          </a:prstGeom>
+          <a:solidFill>
+            <a:srgbClr val="0A1940"/>
+          </a:solidFill>
+          <a:ln w="12700">
+            <a:solidFill>
+              <a:srgbClr val="0A1940"/>
+            </a:solidFill>
+            <a:prstDash val="solid"/>
+          </a:ln>
+        </p:spPr>
+      </p:sp>
+      <p:sp>
+        <p:nvSpPr>
+          <p:cNvPr id="22" name="Text 20"/>
+          <p:cNvSpPr/>
+          <p:nvPr/>
+        </p:nvSpPr>
+        <p:spPr>
+          <a:xfrm>
+            <a:off x="548640" y="4443984"/>
+            <a:ext cx="822960" cy="749808"/>
           </a:xfrm>
           <a:prstGeom prst="rect">
             <a:avLst/>
@@ -5968,7 +5679,85 @@
               <a:buNone/>
             </a:pPr>
             <a:r>
-              <a:rPr lang="en-US" sz="950" i="1" dirty="0">
+              <a:rPr lang="en-US" sz="2800" b="1" dirty="0">
+                <a:solidFill>
+                  <a:srgbClr val="1E7BFF"/>
+                </a:solidFill>
+                <a:latin typeface="Georgia" pitchFamily="34" charset="0"/>
+                <a:ea typeface="Georgia" pitchFamily="34" charset="-122"/>
+                <a:cs typeface="Georgia" pitchFamily="34" charset="-120"/>
+              </a:rPr>
+              <a:t>4</a:t>
+            </a:r>
+            <a:endParaRPr lang="en-US" sz="2800" dirty="0"/>
+          </a:p>
+        </p:txBody>
+      </p:sp>
+      <p:sp>
+        <p:nvSpPr>
+          <p:cNvPr id="23" name="Text 21"/>
+          <p:cNvSpPr/>
+          <p:nvPr/>
+        </p:nvSpPr>
+        <p:spPr>
+          <a:xfrm>
+            <a:off x="1554480" y="4517136"/>
+            <a:ext cx="9966960" cy="347472"/>
+          </a:xfrm>
+          <a:prstGeom prst="rect">
+            <a:avLst/>
+          </a:prstGeom>
+          <a:noFill/>
+          <a:ln/>
+        </p:spPr>
+        <p:txBody>
+          <a:bodyPr wrap="square" lIns="0" tIns="0" rIns="0" bIns="0" rtlCol="0" anchor="ctr"/>
+          <a:lstStyle/>
+          <a:p>
+            <a:pPr indent="0" marL="0">
+              <a:buNone/>
+            </a:pPr>
+            <a:r>
+              <a:rPr lang="en-US" sz="1400" b="1" dirty="0">
+                <a:solidFill>
+                  <a:srgbClr val="111827"/>
+                </a:solidFill>
+                <a:latin typeface="Calibri" pitchFamily="34" charset="0"/>
+                <a:ea typeface="Calibri" pitchFamily="34" charset="-122"/>
+                <a:cs typeface="Calibri" pitchFamily="34" charset="-120"/>
+              </a:rPr>
+              <a:t>Auto-sugestão de responsável</a:t>
+            </a:r>
+            <a:endParaRPr lang="en-US" sz="1400" dirty="0"/>
+          </a:p>
+        </p:txBody>
+      </p:sp>
+      <p:sp>
+        <p:nvSpPr>
+          <p:cNvPr id="24" name="Text 22"/>
+          <p:cNvSpPr/>
+          <p:nvPr/>
+        </p:nvSpPr>
+        <p:spPr>
+          <a:xfrm>
+            <a:off x="1554480" y="4828032"/>
+            <a:ext cx="9966960" cy="347472"/>
+          </a:xfrm>
+          <a:prstGeom prst="rect">
+            <a:avLst/>
+          </a:prstGeom>
+          <a:noFill/>
+          <a:ln/>
+        </p:spPr>
+        <p:txBody>
+          <a:bodyPr wrap="square" lIns="0" tIns="0" rIns="0" bIns="0" rtlCol="0" anchor="ctr"/>
+          <a:lstStyle/>
+          <a:p>
+            <a:pPr indent="0" marL="0">
+              <a:buNone/>
+            </a:pPr>
+            <a:r>
+              <a:rPr lang="en-US" sz="1150" dirty="0">
                 <a:solidFill>
                   <a:srgbClr val="64748B"/>
                 </a:solidFill>
@@ -5976,15 +5765,189 @@
                 <a:ea typeface="Calibri" pitchFamily="34" charset="-122"/>
                 <a:cs typeface="Calibri" pitchFamily="34" charset="-120"/>
               </a:rPr>
-              <a:t>Contrato mínimo de 12 meses · reajuste anual por IPCA · custo de IA (Claude Haiku 4.5 via Batch API) já incluso · Enterprise com ambiente dedicado opcional</a:t>
-            </a:r>
-            <a:endParaRPr lang="en-US" sz="950" dirty="0"/>
-          </a:p>
-        </p:txBody>
-      </p:sp>
-      <p:sp>
-        <p:nvSpPr>
-          <p:cNvPr id="37" name="Shape 35"/>
+              <a:t>Usar histórico do Legal One para propor o advogado responsável da tarefa.</a:t>
+            </a:r>
+            <a:endParaRPr lang="en-US" sz="1150" dirty="0"/>
+          </a:p>
+        </p:txBody>
+      </p:sp>
+      <p:sp>
+        <p:nvSpPr>
+          <p:cNvPr id="25" name="Shape 23"/>
+          <p:cNvSpPr/>
+          <p:nvPr/>
+        </p:nvSpPr>
+        <p:spPr>
+          <a:xfrm>
+            <a:off x="548640" y="5330952"/>
+            <a:ext cx="11064240" cy="749808"/>
+          </a:xfrm>
+          <a:prstGeom prst="rect">
+            <a:avLst/>
+          </a:prstGeom>
+          <a:solidFill>
+            <a:srgbClr val="FFFFFF"/>
+          </a:solidFill>
+          <a:ln w="6350">
+            <a:solidFill>
+              <a:srgbClr val="E2E8F0"/>
+            </a:solidFill>
+            <a:prstDash val="solid"/>
+          </a:ln>
+          <a:effectLst>
+            <a:outerShdw sx="100000" sy="100000" kx="0" ky="0" algn="bl" rotWithShape="0" blurRad="127000" dist="38100" dir="5400000">
+              <a:srgbClr val="000000">
+                <a:alpha val="10000"/>
+              </a:srgbClr>
+            </a:outerShdw>
+          </a:effectLst>
+        </p:spPr>
+      </p:sp>
+      <p:sp>
+        <p:nvSpPr>
+          <p:cNvPr id="26" name="Shape 24"/>
+          <p:cNvSpPr/>
+          <p:nvPr/>
+        </p:nvSpPr>
+        <p:spPr>
+          <a:xfrm>
+            <a:off x="548640" y="5330952"/>
+            <a:ext cx="822960" cy="749808"/>
+          </a:xfrm>
+          <a:prstGeom prst="rect">
+            <a:avLst/>
+          </a:prstGeom>
+          <a:solidFill>
+            <a:srgbClr val="0A1940"/>
+          </a:solidFill>
+          <a:ln w="12700">
+            <a:solidFill>
+              <a:srgbClr val="0A1940"/>
+            </a:solidFill>
+            <a:prstDash val="solid"/>
+          </a:ln>
+        </p:spPr>
+      </p:sp>
+      <p:sp>
+        <p:nvSpPr>
+          <p:cNvPr id="27" name="Text 25"/>
+          <p:cNvSpPr/>
+          <p:nvPr/>
+        </p:nvSpPr>
+        <p:spPr>
+          <a:xfrm>
+            <a:off x="548640" y="5330952"/>
+            <a:ext cx="822960" cy="749808"/>
+          </a:xfrm>
+          <a:prstGeom prst="rect">
+            <a:avLst/>
+          </a:prstGeom>
+          <a:noFill/>
+          <a:ln/>
+        </p:spPr>
+        <p:txBody>
+          <a:bodyPr wrap="square" lIns="0" tIns="0" rIns="0" bIns="0" rtlCol="0" anchor="ctr"/>
+          <a:lstStyle/>
+          <a:p>
+            <a:pPr algn="ctr" indent="0" marL="0">
+              <a:buNone/>
+            </a:pPr>
+            <a:r>
+              <a:rPr lang="en-US" sz="2800" b="1" dirty="0">
+                <a:solidFill>
+                  <a:srgbClr val="1E7BFF"/>
+                </a:solidFill>
+                <a:latin typeface="Georgia" pitchFamily="34" charset="0"/>
+                <a:ea typeface="Georgia" pitchFamily="34" charset="-122"/>
+                <a:cs typeface="Georgia" pitchFamily="34" charset="-120"/>
+              </a:rPr>
+              <a:t>5</a:t>
+            </a:r>
+            <a:endParaRPr lang="en-US" sz="2800" dirty="0"/>
+          </a:p>
+        </p:txBody>
+      </p:sp>
+      <p:sp>
+        <p:nvSpPr>
+          <p:cNvPr id="28" name="Text 26"/>
+          <p:cNvSpPr/>
+          <p:nvPr/>
+        </p:nvSpPr>
+        <p:spPr>
+          <a:xfrm>
+            <a:off x="1554480" y="5404104"/>
+            <a:ext cx="9966960" cy="347472"/>
+          </a:xfrm>
+          <a:prstGeom prst="rect">
+            <a:avLst/>
+          </a:prstGeom>
+          <a:noFill/>
+          <a:ln/>
+        </p:spPr>
+        <p:txBody>
+          <a:bodyPr wrap="square" lIns="0" tIns="0" rIns="0" bIns="0" rtlCol="0" anchor="ctr"/>
+          <a:lstStyle/>
+          <a:p>
+            <a:pPr indent="0" marL="0">
+              <a:buNone/>
+            </a:pPr>
+            <a:r>
+              <a:rPr lang="en-US" sz="1400" b="1" dirty="0">
+                <a:solidFill>
+                  <a:srgbClr val="111827"/>
+                </a:solidFill>
+                <a:latin typeface="Calibri" pitchFamily="34" charset="0"/>
+                <a:ea typeface="Calibri" pitchFamily="34" charset="-122"/>
+                <a:cs typeface="Calibri" pitchFamily="34" charset="-120"/>
+              </a:rPr>
+              <a:t>APIs públicas internas</a:t>
+            </a:r>
+            <a:endParaRPr lang="en-US" sz="1400" dirty="0"/>
+          </a:p>
+        </p:txBody>
+      </p:sp>
+      <p:sp>
+        <p:nvSpPr>
+          <p:cNvPr id="29" name="Text 27"/>
+          <p:cNvSpPr/>
+          <p:nvPr/>
+        </p:nvSpPr>
+        <p:spPr>
+          <a:xfrm>
+            <a:off x="1554480" y="5715000"/>
+            <a:ext cx="9966960" cy="347472"/>
+          </a:xfrm>
+          <a:prstGeom prst="rect">
+            <a:avLst/>
+          </a:prstGeom>
+          <a:noFill/>
+          <a:ln/>
+        </p:spPr>
+        <p:txBody>
+          <a:bodyPr wrap="square" lIns="0" tIns="0" rIns="0" bIns="0" rtlCol="0" anchor="ctr"/>
+          <a:lstStyle/>
+          <a:p>
+            <a:pPr indent="0" marL="0">
+              <a:buNone/>
+            </a:pPr>
+            <a:r>
+              <a:rPr lang="en-US" sz="1150" dirty="0">
+                <a:solidFill>
+                  <a:srgbClr val="64748B"/>
+                </a:solidFill>
+                <a:latin typeface="Calibri" pitchFamily="34" charset="0"/>
+                <a:ea typeface="Calibri" pitchFamily="34" charset="-122"/>
+                <a:cs typeface="Calibri" pitchFamily="34" charset="-120"/>
+              </a:rPr>
+              <a:t>Abrir endpoints seguros para que outras áreas consumam dados consolidados.</a:t>
+            </a:r>
+            <a:endParaRPr lang="en-US" sz="1150" dirty="0"/>
+          </a:p>
+        </p:txBody>
+      </p:sp>
+      <p:sp>
+        <p:nvSpPr>
+          <p:cNvPr id="30" name="Shape 28"/>
           <p:cNvSpPr/>
           <p:nvPr/>
         </p:nvSpPr>
@@ -6007,7 +5970,7 @@
       </p:sp>
       <p:sp>
         <p:nvSpPr>
-          <p:cNvPr id="38" name="Text 36"/>
+          <p:cNvPr id="31" name="Text 29"/>
           <p:cNvSpPr/>
           <p:nvPr/>
         </p:nvSpPr>
@@ -6046,7 +6009,7 @@
       </p:sp>
       <p:sp>
         <p:nvSpPr>
-          <p:cNvPr id="39" name="Text 37"/>
+          <p:cNvPr id="32" name="Text 30"/>
           <p:cNvSpPr/>
           <p:nvPr/>
         </p:nvSpPr>
@@ -6077,7 +6040,7 @@
                 <a:ea typeface="Calibri" pitchFamily="34" charset="-122"/>
                 <a:cs typeface="Calibri" pitchFamily="34" charset="-120"/>
               </a:rPr>
-              <a:t>12 / 14</a:t>
+              <a:t>12 / 15</a:t>
             </a:r>
             <a:endParaRPr lang="en-US" sz="900" dirty="0"/>
           </a:p>
@@ -6148,7 +6111,7 @@
                 <a:ea typeface="Calibri" pitchFamily="34" charset="-122"/>
                 <a:cs typeface="Calibri" pitchFamily="34" charset="-120"/>
               </a:rPr>
-              <a:t>POR QUE ISSO SE PAGA</a:t>
+              <a:t>PROPOSTA COMERCIAL</a:t>
             </a:r>
             <a:endParaRPr lang="en-US" sz="1100" dirty="0"/>
           </a:p>
@@ -6187,7 +6150,7 @@
                 <a:ea typeface="Georgia" pitchFamily="34" charset="-122"/>
                 <a:cs typeface="Georgia" pitchFamily="34" charset="-120"/>
               </a:rPr>
-              <a:t>Retorno sobre o investimento</a:t>
+              <a:t>Planos por volume de publicações</a:t>
             </a:r>
             <a:endParaRPr lang="en-US" sz="3000" dirty="0"/>
           </a:p>
@@ -6227,33 +6190,33 @@
         <p:spPr>
           <a:xfrm>
             <a:off x="548640" y="1508760"/>
-            <a:ext cx="11064240" cy="548640"/>
-          </a:xfrm>
-          <a:prstGeom prst="rect">
-            <a:avLst/>
-          </a:prstGeom>
-          <a:noFill/>
-          <a:ln/>
-        </p:spPr>
-        <p:txBody>
-          <a:bodyPr wrap="square" lIns="0" tIns="0" rIns="0" bIns="0" rtlCol="0" anchor="ctr"/>
-          <a:lstStyle/>
-          <a:p>
-            <a:pPr indent="0" marL="0">
-              <a:buNone/>
-            </a:pPr>
-            <a:r>
-              <a:rPr lang="en-US" sz="1300" dirty="0">
-                <a:solidFill>
-                  <a:srgbClr val="1E293B"/>
-                </a:solidFill>
-                <a:latin typeface="Calibri" pitchFamily="34" charset="0"/>
-                <a:ea typeface="Calibri" pitchFamily="34" charset="-122"/>
-                <a:cs typeface="Calibri" pitchFamily="34" charset="-120"/>
-              </a:rPr>
-              <a:t>O DunaFlow libera horas de advogado, reduz exposição a perdas de prazo e transforma publicações órfãs em operação ativa. A mensalidade se paga em poucas semanas de uso efetivo.</a:t>
-            </a:r>
-            <a:endParaRPr lang="en-US" sz="1300" dirty="0"/>
+            <a:ext cx="11064240" cy="457200"/>
+          </a:xfrm>
+          <a:prstGeom prst="rect">
+            <a:avLst/>
+          </a:prstGeom>
+          <a:noFill/>
+          <a:ln/>
+        </p:spPr>
+        <p:txBody>
+          <a:bodyPr wrap="square" lIns="0" tIns="0" rIns="0" bIns="0" rtlCol="0" anchor="ctr"/>
+          <a:lstStyle/>
+          <a:p>
+            <a:pPr indent="0" marL="0">
+              <a:buNone/>
+            </a:pPr>
+            <a:r>
+              <a:rPr lang="en-US" sz="1200" i="1" dirty="0">
+                <a:solidFill>
+                  <a:srgbClr val="64748B"/>
+                </a:solidFill>
+                <a:latin typeface="Calibri" pitchFamily="34" charset="0"/>
+                <a:ea typeface="Calibri" pitchFamily="34" charset="-122"/>
+                <a:cs typeface="Calibri" pitchFamily="34" charset="-120"/>
+              </a:rPr>
+              <a:t>Modelo SaaS sob medida para escritórios de porte (30+ advogados) — implementação única + mensalidade indexada ao volume efetivo de publicações processadas.</a:t>
+            </a:r>
+            <a:endParaRPr lang="en-US" sz="1200" dirty="0"/>
           </a:p>
         </p:txBody>
       </p:sp>
@@ -6265,8 +6228,8 @@
         </p:nvSpPr>
         <p:spPr>
           <a:xfrm>
-            <a:off x="548640" y="2240280"/>
-            <a:ext cx="3611880" cy="1920240"/>
+            <a:off x="548640" y="2103120"/>
+            <a:ext cx="3611880" cy="4160520"/>
           </a:xfrm>
           <a:prstGeom prst="rect">
             <a:avLst/>
@@ -6297,8 +6260,8 @@
         </p:nvSpPr>
         <p:spPr>
           <a:xfrm>
-            <a:off x="548640" y="2240280"/>
-            <a:ext cx="109728" cy="1920240"/>
+            <a:off x="548640" y="2103120"/>
+            <a:ext cx="3611880" cy="109728"/>
           </a:xfrm>
           <a:prstGeom prst="rect">
             <a:avLst/>
@@ -6322,34 +6285,34 @@
         </p:nvSpPr>
         <p:spPr>
           <a:xfrm>
-            <a:off x="777240" y="2514600"/>
-            <a:ext cx="3246120" cy="868680"/>
-          </a:xfrm>
-          <a:prstGeom prst="rect">
-            <a:avLst/>
-          </a:prstGeom>
-          <a:noFill/>
-          <a:ln/>
-        </p:spPr>
-        <p:txBody>
-          <a:bodyPr wrap="square" lIns="0" tIns="0" rIns="0" bIns="0" rtlCol="0" anchor="ctr"/>
-          <a:lstStyle/>
-          <a:p>
-            <a:pPr indent="0" marL="0">
-              <a:buNone/>
-            </a:pPr>
-            <a:r>
-              <a:rPr lang="en-US" sz="3800" b="1" dirty="0">
-                <a:solidFill>
-                  <a:srgbClr val="0EA5A4"/>
+            <a:off x="731520" y="2377440"/>
+            <a:ext cx="3246120" cy="457200"/>
+          </a:xfrm>
+          <a:prstGeom prst="rect">
+            <a:avLst/>
+          </a:prstGeom>
+          <a:noFill/>
+          <a:ln/>
+        </p:spPr>
+        <p:txBody>
+          <a:bodyPr wrap="square" lIns="0" tIns="0" rIns="0" bIns="0" rtlCol="0" anchor="ctr"/>
+          <a:lstStyle/>
+          <a:p>
+            <a:pPr algn="ctr" indent="0" marL="0">
+              <a:buNone/>
+            </a:pPr>
+            <a:r>
+              <a:rPr lang="en-US" sz="2600" b="1" dirty="0">
+                <a:solidFill>
+                  <a:srgbClr val="0A1940"/>
                 </a:solidFill>
                 <a:latin typeface="Georgia" pitchFamily="34" charset="0"/>
                 <a:ea typeface="Georgia" pitchFamily="34" charset="-122"/>
                 <a:cs typeface="Georgia" pitchFamily="34" charset="-120"/>
               </a:rPr>
-              <a:t>20–40h</a:t>
-            </a:r>
-            <a:endParaRPr lang="en-US" sz="3800" dirty="0"/>
+              <a:t>Starter</a:t>
+            </a:r>
+            <a:endParaRPr lang="en-US" sz="2600" dirty="0"/>
           </a:p>
         </p:txBody>
       </p:sp>
@@ -6361,47 +6324,780 @@
         </p:nvSpPr>
         <p:spPr>
           <a:xfrm>
-            <a:off x="777240" y="3429000"/>
-            <a:ext cx="3246120" cy="640080"/>
-          </a:xfrm>
-          <a:prstGeom prst="rect">
-            <a:avLst/>
-          </a:prstGeom>
-          <a:noFill/>
-          <a:ln/>
-        </p:spPr>
-        <p:txBody>
-          <a:bodyPr wrap="square" lIns="0" tIns="0" rIns="0" bIns="0" rtlCol="0" anchor="ctr"/>
-          <a:lstStyle/>
-          <a:p>
-            <a:pPr indent="0" marL="0">
-              <a:buNone/>
-            </a:pPr>
-            <a:r>
-              <a:rPr lang="en-US" sz="1200" dirty="0">
-                <a:solidFill>
-                  <a:srgbClr val="1E293B"/>
-                </a:solidFill>
-                <a:latin typeface="Calibri" pitchFamily="34" charset="0"/>
-                <a:ea typeface="Calibri" pitchFamily="34" charset="-122"/>
-                <a:cs typeface="Calibri" pitchFamily="34" charset="-120"/>
-              </a:rPr>
-              <a:t>Horas de triagem devolvidas ao time por mês</a:t>
-            </a:r>
-            <a:endParaRPr lang="en-US" sz="1200" dirty="0"/>
-          </a:p>
-        </p:txBody>
-      </p:sp>
-      <p:sp>
-        <p:nvSpPr>
-          <p:cNvPr id="10" name="Shape 8"/>
-          <p:cNvSpPr/>
-          <p:nvPr/>
-        </p:nvSpPr>
-        <p:spPr>
-          <a:xfrm>
-            <a:off x="4325112" y="2240280"/>
-            <a:ext cx="3611880" cy="1920240"/>
+            <a:off x="731520" y="2880360"/>
+            <a:ext cx="3246120" cy="274320"/>
+          </a:xfrm>
+          <a:prstGeom prst="rect">
+            <a:avLst/>
+          </a:prstGeom>
+          <a:noFill/>
+          <a:ln/>
+        </p:spPr>
+        <p:txBody>
+          <a:bodyPr wrap="square" lIns="0" tIns="0" rIns="0" bIns="0" rtlCol="0" anchor="ctr"/>
+          <a:lstStyle/>
+          <a:p>
+            <a:pPr algn="ctr" indent="0" marL="0">
+              <a:buNone/>
+            </a:pPr>
+            <a:r>
+              <a:rPr lang="en-US" sz="1100" i="1" dirty="0">
+                <a:solidFill>
+                  <a:srgbClr val="64748B"/>
+                </a:solidFill>
+                <a:latin typeface="Calibri" pitchFamily="34" charset="0"/>
+                <a:ea typeface="Calibri" pitchFamily="34" charset="-122"/>
+                <a:cs typeface="Calibri" pitchFamily="34" charset="-120"/>
+              </a:rPr>
+              <a:t>até 2.000 publicações/mês</a:t>
+            </a:r>
+            <a:endParaRPr lang="en-US" sz="1100" dirty="0"/>
+          </a:p>
+        </p:txBody>
+      </p:sp>
+      <p:sp>
+        <p:nvSpPr>
+          <p:cNvPr id="10" name="Text 8"/>
+          <p:cNvSpPr/>
+          <p:nvPr/>
+        </p:nvSpPr>
+        <p:spPr>
+          <a:xfrm>
+            <a:off x="731520" y="3291840"/>
+            <a:ext cx="3246120" cy="548640"/>
+          </a:xfrm>
+          <a:prstGeom prst="rect">
+            <a:avLst/>
+          </a:prstGeom>
+          <a:noFill/>
+          <a:ln/>
+        </p:spPr>
+        <p:txBody>
+          <a:bodyPr wrap="square" lIns="0" tIns="0" rIns="0" bIns="0" rtlCol="0" anchor="ctr"/>
+          <a:lstStyle/>
+          <a:p>
+            <a:pPr algn="ctr" indent="0" marL="0">
+              <a:buNone/>
+            </a:pPr>
+            <a:r>
+              <a:rPr lang="en-US" sz="2800" b="1" dirty="0">
+                <a:solidFill>
+                  <a:srgbClr val="0B7A79"/>
+                </a:solidFill>
+                <a:latin typeface="Georgia" pitchFamily="34" charset="0"/>
+                <a:ea typeface="Georgia" pitchFamily="34" charset="-122"/>
+                <a:cs typeface="Georgia" pitchFamily="34" charset="-120"/>
+              </a:rPr>
+              <a:t>R$ 3.500</a:t>
+            </a:r>
+            <a:endParaRPr lang="en-US" sz="2800" dirty="0"/>
+          </a:p>
+        </p:txBody>
+      </p:sp>
+      <p:sp>
+        <p:nvSpPr>
+          <p:cNvPr id="11" name="Text 9"/>
+          <p:cNvSpPr/>
+          <p:nvPr/>
+        </p:nvSpPr>
+        <p:spPr>
+          <a:xfrm>
+            <a:off x="731520" y="3840480"/>
+            <a:ext cx="3246120" cy="201168"/>
+          </a:xfrm>
+          <a:prstGeom prst="rect">
+            <a:avLst/>
+          </a:prstGeom>
+          <a:noFill/>
+          <a:ln/>
+        </p:spPr>
+        <p:txBody>
+          <a:bodyPr wrap="square" lIns="0" tIns="0" rIns="0" bIns="0" rtlCol="0" anchor="ctr"/>
+          <a:lstStyle/>
+          <a:p>
+            <a:pPr algn="ctr" indent="0" marL="0">
+              <a:buNone/>
+            </a:pPr>
+            <a:r>
+              <a:rPr lang="en-US" sz="1000" dirty="0">
+                <a:solidFill>
+                  <a:srgbClr val="64748B"/>
+                </a:solidFill>
+                <a:latin typeface="Calibri" pitchFamily="34" charset="0"/>
+                <a:ea typeface="Calibri" pitchFamily="34" charset="-122"/>
+                <a:cs typeface="Calibri" pitchFamily="34" charset="-120"/>
+              </a:rPr>
+              <a:t>por mês</a:t>
+            </a:r>
+            <a:endParaRPr lang="en-US" sz="1000" dirty="0"/>
+          </a:p>
+        </p:txBody>
+      </p:sp>
+      <p:sp>
+        <p:nvSpPr>
+          <p:cNvPr id="12" name="Shape 10"/>
+          <p:cNvSpPr/>
+          <p:nvPr/>
+        </p:nvSpPr>
+        <p:spPr>
+          <a:xfrm>
+            <a:off x="1005840" y="4114800"/>
+            <a:ext cx="2697480" cy="0"/>
+          </a:xfrm>
+          <a:prstGeom prst="line">
+            <a:avLst/>
+          </a:prstGeom>
+          <a:noFill/>
+          <a:ln w="9525">
+            <a:solidFill>
+              <a:srgbClr val="E2E8F0"/>
+            </a:solidFill>
+            <a:prstDash val="solid"/>
+          </a:ln>
+        </p:spPr>
+      </p:sp>
+      <p:sp>
+        <p:nvSpPr>
+          <p:cNvPr id="13" name="Text 11"/>
+          <p:cNvSpPr/>
+          <p:nvPr/>
+        </p:nvSpPr>
+        <p:spPr>
+          <a:xfrm>
+            <a:off x="731520" y="4206240"/>
+            <a:ext cx="3246120" cy="274320"/>
+          </a:xfrm>
+          <a:prstGeom prst="rect">
+            <a:avLst/>
+          </a:prstGeom>
+          <a:noFill/>
+          <a:ln/>
+        </p:spPr>
+        <p:txBody>
+          <a:bodyPr wrap="square" lIns="0" tIns="0" rIns="0" bIns="0" rtlCol="0" anchor="ctr"/>
+          <a:lstStyle/>
+          <a:p>
+            <a:pPr algn="ctr" indent="0" marL="0">
+              <a:buNone/>
+            </a:pPr>
+            <a:r>
+              <a:rPr lang="en-US" sz="1100" b="1" dirty="0">
+                <a:solidFill>
+                  <a:srgbClr val="0A1940"/>
+                </a:solidFill>
+                <a:latin typeface="Calibri" pitchFamily="34" charset="0"/>
+                <a:ea typeface="Calibri" pitchFamily="34" charset="-122"/>
+                <a:cs typeface="Calibri" pitchFamily="34" charset="-120"/>
+              </a:rPr>
+              <a:t>+ R$ 15.000 de implementação</a:t>
+            </a:r>
+            <a:endParaRPr lang="en-US" sz="1100" dirty="0"/>
+          </a:p>
+        </p:txBody>
+      </p:sp>
+      <p:sp>
+        <p:nvSpPr>
+          <p:cNvPr id="14" name="Text 12"/>
+          <p:cNvSpPr/>
+          <p:nvPr/>
+        </p:nvSpPr>
+        <p:spPr>
+          <a:xfrm>
+            <a:off x="777240" y="4617720"/>
+            <a:ext cx="3200400" cy="1554480"/>
+          </a:xfrm>
+          <a:prstGeom prst="rect">
+            <a:avLst/>
+          </a:prstGeom>
+          <a:noFill/>
+          <a:ln/>
+        </p:spPr>
+        <p:txBody>
+          <a:bodyPr wrap="square" lIns="0" tIns="0" rIns="0" bIns="0" rtlCol="0" anchor="ctr"/>
+          <a:lstStyle/>
+          <a:p>
+            <a:pPr marL="342900" indent="-342900">
+              <a:spcAft>
+                <a:spcPts val="300"/>
+              </a:spcAft>
+              <a:buSzPct val="100000"/>
+              <a:buChar char="▪"/>
+            </a:pPr>
+            <a:r>
+              <a:rPr lang="en-US" sz="1050" dirty="0">
+                <a:solidFill>
+                  <a:srgbClr val="0A1940"/>
+                </a:solidFill>
+                <a:latin typeface="Calibri" pitchFamily="34" charset="0"/>
+                <a:ea typeface="Calibri" pitchFamily="34" charset="-122"/>
+                <a:cs typeface="Calibri" pitchFamily="34" charset="-120"/>
+              </a:rPr>
+              <a:t>Triagem de publicações com IA (Claude Haiku 4.5)</a:t>
+            </a:r>
+            <a:endParaRPr lang="en-US" sz="1050" dirty="0"/>
+          </a:p>
+          <a:p>
+            <a:pPr marL="342900" indent="-342900">
+              <a:spcAft>
+                <a:spcPts val="300"/>
+              </a:spcAft>
+              <a:buSzPct val="100000"/>
+              <a:buChar char="▪"/>
+            </a:pPr>
+            <a:r>
+              <a:rPr lang="en-US" sz="1050" dirty="0">
+                <a:solidFill>
+                  <a:srgbClr val="0A1940"/>
+                </a:solidFill>
+                <a:latin typeface="Calibri" pitchFamily="34" charset="0"/>
+                <a:ea typeface="Calibri" pitchFamily="34" charset="-122"/>
+                <a:cs typeface="Calibri" pitchFamily="34" charset="-120"/>
+              </a:rPr>
+              <a:t>Monitoramento DJEN + DataJud (CNJ)</a:t>
+            </a:r>
+            <a:endParaRPr lang="en-US" sz="1050" dirty="0"/>
+          </a:p>
+          <a:p>
+            <a:pPr marL="342900" indent="-342900">
+              <a:spcAft>
+                <a:spcPts val="300"/>
+              </a:spcAft>
+              <a:buSzPct val="100000"/>
+              <a:buChar char="▪"/>
+            </a:pPr>
+            <a:r>
+              <a:rPr lang="en-US" sz="1050" dirty="0">
+                <a:solidFill>
+                  <a:srgbClr val="0A1940"/>
+                </a:solidFill>
+                <a:latin typeface="Calibri" pitchFamily="34" charset="0"/>
+                <a:ea typeface="Calibri" pitchFamily="34" charset="-122"/>
+                <a:cs typeface="Calibri" pitchFamily="34" charset="-120"/>
+              </a:rPr>
+              <a:t>Detecção de embargos e agravos em órfãs</a:t>
+            </a:r>
+            <a:endParaRPr lang="en-US" sz="1050" dirty="0"/>
+          </a:p>
+          <a:p>
+            <a:pPr marL="342900" indent="-342900">
+              <a:spcAft>
+                <a:spcPts val="300"/>
+              </a:spcAft>
+              <a:buSzPct val="100000"/>
+              <a:buChar char="▪"/>
+            </a:pPr>
+            <a:r>
+              <a:rPr lang="en-US" sz="1050" dirty="0">
+                <a:solidFill>
+                  <a:srgbClr val="0A1940"/>
+                </a:solidFill>
+                <a:latin typeface="Calibri" pitchFamily="34" charset="0"/>
+                <a:ea typeface="Calibri" pitchFamily="34" charset="-122"/>
+                <a:cs typeface="Calibri" pitchFamily="34" charset="-120"/>
+              </a:rPr>
+              <a:t>1 RPA agendado sobre o Legal One</a:t>
+            </a:r>
+            <a:endParaRPr lang="en-US" sz="1050" dirty="0"/>
+          </a:p>
+          <a:p>
+            <a:pPr marL="342900" indent="-342900">
+              <a:spcAft>
+                <a:spcPts val="300"/>
+              </a:spcAft>
+              <a:buSzPct val="100000"/>
+              <a:buChar char="▪"/>
+            </a:pPr>
+            <a:r>
+              <a:rPr lang="en-US" sz="1050" dirty="0">
+                <a:solidFill>
+                  <a:srgbClr val="0A1940"/>
+                </a:solidFill>
+                <a:latin typeface="Calibri" pitchFamily="34" charset="0"/>
+                <a:ea typeface="Calibri" pitchFamily="34" charset="-122"/>
+                <a:cs typeface="Calibri" pitchFamily="34" charset="-120"/>
+              </a:rPr>
+              <a:t>Suporte em horário comercial</a:t>
+            </a:r>
+            <a:endParaRPr lang="en-US" sz="1050" dirty="0"/>
+          </a:p>
+        </p:txBody>
+      </p:sp>
+      <p:sp>
+        <p:nvSpPr>
+          <p:cNvPr id="15" name="Shape 13"/>
+          <p:cNvSpPr/>
+          <p:nvPr/>
+        </p:nvSpPr>
+        <p:spPr>
+          <a:xfrm>
+            <a:off x="4325112" y="2103120"/>
+            <a:ext cx="3611880" cy="4160520"/>
+          </a:xfrm>
+          <a:prstGeom prst="rect">
+            <a:avLst/>
+          </a:prstGeom>
+          <a:solidFill>
+            <a:srgbClr val="0A1940"/>
+          </a:solidFill>
+          <a:ln w="25400">
+            <a:solidFill>
+              <a:srgbClr val="1E7BFF"/>
+            </a:solidFill>
+            <a:prstDash val="solid"/>
+          </a:ln>
+          <a:effectLst>
+            <a:outerShdw sx="100000" sy="100000" kx="0" ky="0" algn="bl" rotWithShape="0" blurRad="177800" dist="50800" dir="5400000">
+              <a:srgbClr val="000000">
+                <a:alpha val="18000"/>
+              </a:srgbClr>
+            </a:outerShdw>
+          </a:effectLst>
+        </p:spPr>
+      </p:sp>
+      <p:sp>
+        <p:nvSpPr>
+          <p:cNvPr id="16" name="Shape 14"/>
+          <p:cNvSpPr/>
+          <p:nvPr/>
+        </p:nvSpPr>
+        <p:spPr>
+          <a:xfrm>
+            <a:off x="4325112" y="2103120"/>
+            <a:ext cx="3611880" cy="109728"/>
+          </a:xfrm>
+          <a:prstGeom prst="rect">
+            <a:avLst/>
+          </a:prstGeom>
+          <a:solidFill>
+            <a:srgbClr val="1E7BFF"/>
+          </a:solidFill>
+          <a:ln w="12700">
+            <a:solidFill>
+              <a:srgbClr val="1E7BFF"/>
+            </a:solidFill>
+            <a:prstDash val="solid"/>
+          </a:ln>
+        </p:spPr>
+      </p:sp>
+      <p:sp>
+        <p:nvSpPr>
+          <p:cNvPr id="17" name="Shape 15"/>
+          <p:cNvSpPr/>
+          <p:nvPr/>
+        </p:nvSpPr>
+        <p:spPr>
+          <a:xfrm>
+            <a:off x="5079492" y="1901952"/>
+            <a:ext cx="2103120" cy="384048"/>
+          </a:xfrm>
+          <a:prstGeom prst="rect">
+            <a:avLst/>
+          </a:prstGeom>
+          <a:solidFill>
+            <a:srgbClr val="1E7BFF"/>
+          </a:solidFill>
+          <a:ln w="12700">
+            <a:solidFill>
+              <a:srgbClr val="1E7BFF"/>
+            </a:solidFill>
+            <a:prstDash val="solid"/>
+          </a:ln>
+        </p:spPr>
+      </p:sp>
+      <p:sp>
+        <p:nvSpPr>
+          <p:cNvPr id="18" name="Text 16"/>
+          <p:cNvSpPr/>
+          <p:nvPr/>
+        </p:nvSpPr>
+        <p:spPr>
+          <a:xfrm>
+            <a:off x="5079492" y="1901952"/>
+            <a:ext cx="2103120" cy="384048"/>
+          </a:xfrm>
+          <a:prstGeom prst="rect">
+            <a:avLst/>
+          </a:prstGeom>
+          <a:noFill/>
+          <a:ln/>
+        </p:spPr>
+        <p:txBody>
+          <a:bodyPr wrap="square" lIns="0" tIns="0" rIns="0" bIns="0" rtlCol="0" anchor="ctr"/>
+          <a:lstStyle/>
+          <a:p>
+            <a:pPr algn="ctr" indent="0" marL="0">
+              <a:buNone/>
+            </a:pPr>
+            <a:r>
+              <a:rPr lang="en-US" sz="1100" b="1" spc="400" kern="0" dirty="0">
+                <a:solidFill>
+                  <a:srgbClr val="0A1940"/>
+                </a:solidFill>
+                <a:latin typeface="Calibri" pitchFamily="34" charset="0"/>
+                <a:ea typeface="Calibri" pitchFamily="34" charset="-122"/>
+                <a:cs typeface="Calibri" pitchFamily="34" charset="-120"/>
+              </a:rPr>
+              <a:t>★ RECOMENDADO</a:t>
+            </a:r>
+            <a:endParaRPr lang="en-US" sz="1100" dirty="0"/>
+          </a:p>
+        </p:txBody>
+      </p:sp>
+      <p:sp>
+        <p:nvSpPr>
+          <p:cNvPr id="19" name="Text 17"/>
+          <p:cNvSpPr/>
+          <p:nvPr/>
+        </p:nvSpPr>
+        <p:spPr>
+          <a:xfrm>
+            <a:off x="4507992" y="2377440"/>
+            <a:ext cx="3246120" cy="457200"/>
+          </a:xfrm>
+          <a:prstGeom prst="rect">
+            <a:avLst/>
+          </a:prstGeom>
+          <a:noFill/>
+          <a:ln/>
+        </p:spPr>
+        <p:txBody>
+          <a:bodyPr wrap="square" lIns="0" tIns="0" rIns="0" bIns="0" rtlCol="0" anchor="ctr"/>
+          <a:lstStyle/>
+          <a:p>
+            <a:pPr algn="ctr" indent="0" marL="0">
+              <a:buNone/>
+            </a:pPr>
+            <a:r>
+              <a:rPr lang="en-US" sz="2600" b="1" dirty="0">
+                <a:solidFill>
+                  <a:srgbClr val="FFFFFF"/>
+                </a:solidFill>
+                <a:latin typeface="Georgia" pitchFamily="34" charset="0"/>
+                <a:ea typeface="Georgia" pitchFamily="34" charset="-122"/>
+                <a:cs typeface="Georgia" pitchFamily="34" charset="-120"/>
+              </a:rPr>
+              <a:t>Pro</a:t>
+            </a:r>
+            <a:endParaRPr lang="en-US" sz="2600" dirty="0"/>
+          </a:p>
+        </p:txBody>
+      </p:sp>
+      <p:sp>
+        <p:nvSpPr>
+          <p:cNvPr id="20" name="Text 18"/>
+          <p:cNvSpPr/>
+          <p:nvPr/>
+        </p:nvSpPr>
+        <p:spPr>
+          <a:xfrm>
+            <a:off x="4507992" y="2880360"/>
+            <a:ext cx="3246120" cy="274320"/>
+          </a:xfrm>
+          <a:prstGeom prst="rect">
+            <a:avLst/>
+          </a:prstGeom>
+          <a:noFill/>
+          <a:ln/>
+        </p:spPr>
+        <p:txBody>
+          <a:bodyPr wrap="square" lIns="0" tIns="0" rIns="0" bIns="0" rtlCol="0" anchor="ctr"/>
+          <a:lstStyle/>
+          <a:p>
+            <a:pPr algn="ctr" indent="0" marL="0">
+              <a:buNone/>
+            </a:pPr>
+            <a:r>
+              <a:rPr lang="en-US" sz="1100" i="1" dirty="0">
+                <a:solidFill>
+                  <a:srgbClr val="CBD5E1"/>
+                </a:solidFill>
+                <a:latin typeface="Calibri" pitchFamily="34" charset="0"/>
+                <a:ea typeface="Calibri" pitchFamily="34" charset="-122"/>
+                <a:cs typeface="Calibri" pitchFamily="34" charset="-120"/>
+              </a:rPr>
+              <a:t>até 8.000 publicações/mês</a:t>
+            </a:r>
+            <a:endParaRPr lang="en-US" sz="1100" dirty="0"/>
+          </a:p>
+        </p:txBody>
+      </p:sp>
+      <p:sp>
+        <p:nvSpPr>
+          <p:cNvPr id="21" name="Text 19"/>
+          <p:cNvSpPr/>
+          <p:nvPr/>
+        </p:nvSpPr>
+        <p:spPr>
+          <a:xfrm>
+            <a:off x="4507992" y="3291840"/>
+            <a:ext cx="3246120" cy="548640"/>
+          </a:xfrm>
+          <a:prstGeom prst="rect">
+            <a:avLst/>
+          </a:prstGeom>
+          <a:noFill/>
+          <a:ln/>
+        </p:spPr>
+        <p:txBody>
+          <a:bodyPr wrap="square" lIns="0" tIns="0" rIns="0" bIns="0" rtlCol="0" anchor="ctr"/>
+          <a:lstStyle/>
+          <a:p>
+            <a:pPr algn="ctr" indent="0" marL="0">
+              <a:buNone/>
+            </a:pPr>
+            <a:r>
+              <a:rPr lang="en-US" sz="2800" b="1" dirty="0">
+                <a:solidFill>
+                  <a:srgbClr val="1E7BFF"/>
+                </a:solidFill>
+                <a:latin typeface="Georgia" pitchFamily="34" charset="0"/>
+                <a:ea typeface="Georgia" pitchFamily="34" charset="-122"/>
+                <a:cs typeface="Georgia" pitchFamily="34" charset="-120"/>
+              </a:rPr>
+              <a:t>R$ 6.900</a:t>
+            </a:r>
+            <a:endParaRPr lang="en-US" sz="2800" dirty="0"/>
+          </a:p>
+        </p:txBody>
+      </p:sp>
+      <p:sp>
+        <p:nvSpPr>
+          <p:cNvPr id="22" name="Text 20"/>
+          <p:cNvSpPr/>
+          <p:nvPr/>
+        </p:nvSpPr>
+        <p:spPr>
+          <a:xfrm>
+            <a:off x="4507992" y="3840480"/>
+            <a:ext cx="3246120" cy="201168"/>
+          </a:xfrm>
+          <a:prstGeom prst="rect">
+            <a:avLst/>
+          </a:prstGeom>
+          <a:noFill/>
+          <a:ln/>
+        </p:spPr>
+        <p:txBody>
+          <a:bodyPr wrap="square" lIns="0" tIns="0" rIns="0" bIns="0" rtlCol="0" anchor="ctr"/>
+          <a:lstStyle/>
+          <a:p>
+            <a:pPr algn="ctr" indent="0" marL="0">
+              <a:buNone/>
+            </a:pPr>
+            <a:r>
+              <a:rPr lang="en-US" sz="1000" dirty="0">
+                <a:solidFill>
+                  <a:srgbClr val="CBD5E1"/>
+                </a:solidFill>
+                <a:latin typeface="Calibri" pitchFamily="34" charset="0"/>
+                <a:ea typeface="Calibri" pitchFamily="34" charset="-122"/>
+                <a:cs typeface="Calibri" pitchFamily="34" charset="-120"/>
+              </a:rPr>
+              <a:t>por mês</a:t>
+            </a:r>
+            <a:endParaRPr lang="en-US" sz="1000" dirty="0"/>
+          </a:p>
+        </p:txBody>
+      </p:sp>
+      <p:sp>
+        <p:nvSpPr>
+          <p:cNvPr id="23" name="Shape 21"/>
+          <p:cNvSpPr/>
+          <p:nvPr/>
+        </p:nvSpPr>
+        <p:spPr>
+          <a:xfrm>
+            <a:off x="4782312" y="4114800"/>
+            <a:ext cx="2697480" cy="0"/>
+          </a:xfrm>
+          <a:prstGeom prst="line">
+            <a:avLst/>
+          </a:prstGeom>
+          <a:noFill/>
+          <a:ln w="9525">
+            <a:solidFill>
+              <a:srgbClr val="1558CC"/>
+            </a:solidFill>
+            <a:prstDash val="solid"/>
+          </a:ln>
+        </p:spPr>
+      </p:sp>
+      <p:sp>
+        <p:nvSpPr>
+          <p:cNvPr id="24" name="Text 22"/>
+          <p:cNvSpPr/>
+          <p:nvPr/>
+        </p:nvSpPr>
+        <p:spPr>
+          <a:xfrm>
+            <a:off x="4507992" y="4206240"/>
+            <a:ext cx="3246120" cy="274320"/>
+          </a:xfrm>
+          <a:prstGeom prst="rect">
+            <a:avLst/>
+          </a:prstGeom>
+          <a:noFill/>
+          <a:ln/>
+        </p:spPr>
+        <p:txBody>
+          <a:bodyPr wrap="square" lIns="0" tIns="0" rIns="0" bIns="0" rtlCol="0" anchor="ctr"/>
+          <a:lstStyle/>
+          <a:p>
+            <a:pPr algn="ctr" indent="0" marL="0">
+              <a:buNone/>
+            </a:pPr>
+            <a:r>
+              <a:rPr lang="en-US" sz="1100" b="1" dirty="0">
+                <a:solidFill>
+                  <a:srgbClr val="FFFFFF"/>
+                </a:solidFill>
+                <a:latin typeface="Calibri" pitchFamily="34" charset="0"/>
+                <a:ea typeface="Calibri" pitchFamily="34" charset="-122"/>
+                <a:cs typeface="Calibri" pitchFamily="34" charset="-120"/>
+              </a:rPr>
+              <a:t>+ R$ 25.000 de implementação</a:t>
+            </a:r>
+            <a:endParaRPr lang="en-US" sz="1100" dirty="0"/>
+          </a:p>
+        </p:txBody>
+      </p:sp>
+      <p:sp>
+        <p:nvSpPr>
+          <p:cNvPr id="25" name="Text 23"/>
+          <p:cNvSpPr/>
+          <p:nvPr/>
+        </p:nvSpPr>
+        <p:spPr>
+          <a:xfrm>
+            <a:off x="4553712" y="4617720"/>
+            <a:ext cx="3200400" cy="1554480"/>
+          </a:xfrm>
+          <a:prstGeom prst="rect">
+            <a:avLst/>
+          </a:prstGeom>
+          <a:noFill/>
+          <a:ln/>
+        </p:spPr>
+        <p:txBody>
+          <a:bodyPr wrap="square" lIns="0" tIns="0" rIns="0" bIns="0" rtlCol="0" anchor="ctr"/>
+          <a:lstStyle/>
+          <a:p>
+            <a:pPr marL="342900" indent="-342900">
+              <a:spcAft>
+                <a:spcPts val="300"/>
+              </a:spcAft>
+              <a:buSzPct val="100000"/>
+              <a:buChar char="▪"/>
+            </a:pPr>
+            <a:r>
+              <a:rPr lang="en-US" sz="1050" dirty="0">
+                <a:solidFill>
+                  <a:srgbClr val="FFFFFF"/>
+                </a:solidFill>
+                <a:latin typeface="Calibri" pitchFamily="34" charset="0"/>
+                <a:ea typeface="Calibri" pitchFamily="34" charset="-122"/>
+                <a:cs typeface="Calibri" pitchFamily="34" charset="-120"/>
+              </a:rPr>
+              <a:t>Tudo do Starter</a:t>
+            </a:r>
+            <a:endParaRPr lang="en-US" sz="1050" dirty="0"/>
+          </a:p>
+          <a:p>
+            <a:pPr marL="342900" indent="-342900">
+              <a:spcAft>
+                <a:spcPts val="300"/>
+              </a:spcAft>
+              <a:buSzPct val="100000"/>
+              <a:buChar char="▪"/>
+            </a:pPr>
+            <a:r>
+              <a:rPr lang="en-US" sz="1050" dirty="0">
+                <a:solidFill>
+                  <a:srgbClr val="FFFFFF"/>
+                </a:solidFill>
+                <a:latin typeface="Calibri" pitchFamily="34" charset="0"/>
+                <a:ea typeface="Calibri" pitchFamily="34" charset="-122"/>
+                <a:cs typeface="Calibri" pitchFamily="34" charset="-120"/>
+              </a:rPr>
+              <a:t>Até 5 RPAs sob medida</a:t>
+            </a:r>
+            <a:endParaRPr lang="en-US" sz="1050" dirty="0"/>
+          </a:p>
+          <a:p>
+            <a:pPr marL="342900" indent="-342900">
+              <a:spcAft>
+                <a:spcPts val="300"/>
+              </a:spcAft>
+              <a:buSzPct val="100000"/>
+              <a:buChar char="▪"/>
+            </a:pPr>
+            <a:r>
+              <a:rPr lang="en-US" sz="1050" dirty="0">
+                <a:solidFill>
+                  <a:srgbClr val="FFFFFF"/>
+                </a:solidFill>
+                <a:latin typeface="Calibri" pitchFamily="34" charset="0"/>
+                <a:ea typeface="Calibri" pitchFamily="34" charset="-122"/>
+                <a:cs typeface="Calibri" pitchFamily="34" charset="-120"/>
+              </a:rPr>
+              <a:t>Dashboards e filtros customizados</a:t>
+            </a:r>
+            <a:endParaRPr lang="en-US" sz="1050" dirty="0"/>
+          </a:p>
+          <a:p>
+            <a:pPr marL="342900" indent="-342900">
+              <a:spcAft>
+                <a:spcPts val="300"/>
+              </a:spcAft>
+              <a:buSzPct val="100000"/>
+              <a:buChar char="▪"/>
+            </a:pPr>
+            <a:r>
+              <a:rPr lang="en-US" sz="1050" dirty="0">
+                <a:solidFill>
+                  <a:srgbClr val="FFFFFF"/>
+                </a:solidFill>
+                <a:latin typeface="Calibri" pitchFamily="34" charset="0"/>
+                <a:ea typeface="Calibri" pitchFamily="34" charset="-122"/>
+                <a:cs typeface="Calibri" pitchFamily="34" charset="-120"/>
+              </a:rPr>
+              <a:t>SLA de resposta em 8 horas úteis</a:t>
+            </a:r>
+            <a:endParaRPr lang="en-US" sz="1050" dirty="0"/>
+          </a:p>
+          <a:p>
+            <a:pPr marL="342900" indent="-342900">
+              <a:spcAft>
+                <a:spcPts val="300"/>
+              </a:spcAft>
+              <a:buSzPct val="100000"/>
+              <a:buChar char="▪"/>
+            </a:pPr>
+            <a:r>
+              <a:rPr lang="en-US" sz="1050" dirty="0">
+                <a:solidFill>
+                  <a:srgbClr val="FFFFFF"/>
+                </a:solidFill>
+                <a:latin typeface="Calibri" pitchFamily="34" charset="0"/>
+                <a:ea typeface="Calibri" pitchFamily="34" charset="-122"/>
+                <a:cs typeface="Calibri" pitchFamily="34" charset="-120"/>
+              </a:rPr>
+              <a:t>Relatórios mensais de volume e economia</a:t>
+            </a:r>
+            <a:endParaRPr lang="en-US" sz="1050" dirty="0"/>
+          </a:p>
+        </p:txBody>
+      </p:sp>
+      <p:sp>
+        <p:nvSpPr>
+          <p:cNvPr id="26" name="Shape 24"/>
+          <p:cNvSpPr/>
+          <p:nvPr/>
+        </p:nvSpPr>
+        <p:spPr>
+          <a:xfrm>
+            <a:off x="8101584" y="2103120"/>
+            <a:ext cx="3611880" cy="4160520"/>
           </a:xfrm>
           <a:prstGeom prst="rect">
             <a:avLst/>
@@ -6426,24 +7122,24 @@
       </p:sp>
       <p:sp>
         <p:nvSpPr>
-          <p:cNvPr id="11" name="Shape 9"/>
-          <p:cNvSpPr/>
-          <p:nvPr/>
-        </p:nvSpPr>
-        <p:spPr>
-          <a:xfrm>
-            <a:off x="4325112" y="2240280"/>
-            <a:ext cx="109728" cy="1920240"/>
+          <p:cNvPr id="27" name="Shape 25"/>
+          <p:cNvSpPr/>
+          <p:nvPr/>
+        </p:nvSpPr>
+        <p:spPr>
+          <a:xfrm>
+            <a:off x="8101584" y="2103120"/>
+            <a:ext cx="3611880" cy="109728"/>
           </a:xfrm>
           <a:prstGeom prst="rect">
             <a:avLst/>
           </a:prstGeom>
           <a:solidFill>
-            <a:srgbClr val="D65A4B"/>
+            <a:srgbClr val="0EA5A4"/>
           </a:solidFill>
           <a:ln w="12700">
             <a:solidFill>
-              <a:srgbClr val="D65A4B"/>
+              <a:srgbClr val="0EA5A4"/>
             </a:solidFill>
             <a:prstDash val="solid"/>
           </a:ln>
@@ -6451,69 +7147,689 @@
       </p:sp>
       <p:sp>
         <p:nvSpPr>
-          <p:cNvPr id="12" name="Text 10"/>
-          <p:cNvSpPr/>
-          <p:nvPr/>
-        </p:nvSpPr>
-        <p:spPr>
-          <a:xfrm>
-            <a:off x="4553712" y="2514600"/>
-            <a:ext cx="3246120" cy="868680"/>
-          </a:xfrm>
-          <a:prstGeom prst="rect">
-            <a:avLst/>
-          </a:prstGeom>
-          <a:noFill/>
-          <a:ln/>
-        </p:spPr>
-        <p:txBody>
-          <a:bodyPr wrap="square" lIns="0" tIns="0" rIns="0" bIns="0" rtlCol="0" anchor="ctr"/>
-          <a:lstStyle/>
-          <a:p>
-            <a:pPr indent="0" marL="0">
-              <a:buNone/>
-            </a:pPr>
-            <a:r>
-              <a:rPr lang="en-US" sz="3800" b="1" dirty="0">
-                <a:solidFill>
-                  <a:srgbClr val="D65A4B"/>
+          <p:cNvPr id="28" name="Text 26"/>
+          <p:cNvSpPr/>
+          <p:nvPr/>
+        </p:nvSpPr>
+        <p:spPr>
+          <a:xfrm>
+            <a:off x="8284464" y="2377440"/>
+            <a:ext cx="3246120" cy="457200"/>
+          </a:xfrm>
+          <a:prstGeom prst="rect">
+            <a:avLst/>
+          </a:prstGeom>
+          <a:noFill/>
+          <a:ln/>
+        </p:spPr>
+        <p:txBody>
+          <a:bodyPr wrap="square" lIns="0" tIns="0" rIns="0" bIns="0" rtlCol="0" anchor="ctr"/>
+          <a:lstStyle/>
+          <a:p>
+            <a:pPr algn="ctr" indent="0" marL="0">
+              <a:buNone/>
+            </a:pPr>
+            <a:r>
+              <a:rPr lang="en-US" sz="2600" b="1" dirty="0">
+                <a:solidFill>
+                  <a:srgbClr val="0A1940"/>
                 </a:solidFill>
                 <a:latin typeface="Georgia" pitchFamily="34" charset="0"/>
                 <a:ea typeface="Georgia" pitchFamily="34" charset="-122"/>
                 <a:cs typeface="Georgia" pitchFamily="34" charset="-120"/>
               </a:rPr>
-              <a:t>R$ 50k+</a:t>
-            </a:r>
-            <a:endParaRPr lang="en-US" sz="3800" dirty="0"/>
-          </a:p>
-        </p:txBody>
-      </p:sp>
-      <p:sp>
-        <p:nvSpPr>
-          <p:cNvPr id="13" name="Text 11"/>
-          <p:cNvSpPr/>
-          <p:nvPr/>
-        </p:nvSpPr>
-        <p:spPr>
-          <a:xfrm>
-            <a:off x="4553712" y="3429000"/>
-            <a:ext cx="3246120" cy="640080"/>
-          </a:xfrm>
-          <a:prstGeom prst="rect">
-            <a:avLst/>
-          </a:prstGeom>
-          <a:noFill/>
-          <a:ln/>
-        </p:spPr>
-        <p:txBody>
-          <a:bodyPr wrap="square" lIns="0" tIns="0" rIns="0" bIns="0" rtlCol="0" anchor="ctr"/>
-          <a:lstStyle/>
-          <a:p>
-            <a:pPr indent="0" marL="0">
-              <a:buNone/>
-            </a:pPr>
-            <a:r>
-              <a:rPr lang="en-US" sz="1200" dirty="0">
+              <a:t>Enterprise</a:t>
+            </a:r>
+            <a:endParaRPr lang="en-US" sz="2600" dirty="0"/>
+          </a:p>
+        </p:txBody>
+      </p:sp>
+      <p:sp>
+        <p:nvSpPr>
+          <p:cNvPr id="29" name="Text 27"/>
+          <p:cNvSpPr/>
+          <p:nvPr/>
+        </p:nvSpPr>
+        <p:spPr>
+          <a:xfrm>
+            <a:off x="8284464" y="2880360"/>
+            <a:ext cx="3246120" cy="274320"/>
+          </a:xfrm>
+          <a:prstGeom prst="rect">
+            <a:avLst/>
+          </a:prstGeom>
+          <a:noFill/>
+          <a:ln/>
+        </p:spPr>
+        <p:txBody>
+          <a:bodyPr wrap="square" lIns="0" tIns="0" rIns="0" bIns="0" rtlCol="0" anchor="ctr"/>
+          <a:lstStyle/>
+          <a:p>
+            <a:pPr algn="ctr" indent="0" marL="0">
+              <a:buNone/>
+            </a:pPr>
+            <a:r>
+              <a:rPr lang="en-US" sz="1100" i="1" dirty="0">
+                <a:solidFill>
+                  <a:srgbClr val="64748B"/>
+                </a:solidFill>
+                <a:latin typeface="Calibri" pitchFamily="34" charset="0"/>
+                <a:ea typeface="Calibri" pitchFamily="34" charset="-122"/>
+                <a:cs typeface="Calibri" pitchFamily="34" charset="-120"/>
+              </a:rPr>
+              <a:t>volume ilimitado</a:t>
+            </a:r>
+            <a:endParaRPr lang="en-US" sz="1100" dirty="0"/>
+          </a:p>
+        </p:txBody>
+      </p:sp>
+      <p:sp>
+        <p:nvSpPr>
+          <p:cNvPr id="30" name="Text 28"/>
+          <p:cNvSpPr/>
+          <p:nvPr/>
+        </p:nvSpPr>
+        <p:spPr>
+          <a:xfrm>
+            <a:off x="8284464" y="3200400"/>
+            <a:ext cx="3246120" cy="256032"/>
+          </a:xfrm>
+          <a:prstGeom prst="rect">
+            <a:avLst/>
+          </a:prstGeom>
+          <a:noFill/>
+          <a:ln/>
+        </p:spPr>
+        <p:txBody>
+          <a:bodyPr wrap="square" lIns="0" tIns="0" rIns="0" bIns="0" rtlCol="0" anchor="ctr"/>
+          <a:lstStyle/>
+          <a:p>
+            <a:pPr algn="ctr" indent="0" marL="0">
+              <a:buNone/>
+            </a:pPr>
+            <a:r>
+              <a:rPr lang="en-US" sz="1100" i="1" dirty="0">
+                <a:solidFill>
+                  <a:srgbClr val="64748B"/>
+                </a:solidFill>
+                <a:latin typeface="Calibri" pitchFamily="34" charset="0"/>
+                <a:ea typeface="Calibri" pitchFamily="34" charset="-122"/>
+                <a:cs typeface="Calibri" pitchFamily="34" charset="-120"/>
+              </a:rPr>
+              <a:t>a partir de</a:t>
+            </a:r>
+            <a:endParaRPr lang="en-US" sz="1100" dirty="0"/>
+          </a:p>
+        </p:txBody>
+      </p:sp>
+      <p:sp>
+        <p:nvSpPr>
+          <p:cNvPr id="31" name="Text 29"/>
+          <p:cNvSpPr/>
+          <p:nvPr/>
+        </p:nvSpPr>
+        <p:spPr>
+          <a:xfrm>
+            <a:off x="8284464" y="3429000"/>
+            <a:ext cx="3246120" cy="502920"/>
+          </a:xfrm>
+          <a:prstGeom prst="rect">
+            <a:avLst/>
+          </a:prstGeom>
+          <a:noFill/>
+          <a:ln/>
+        </p:spPr>
+        <p:txBody>
+          <a:bodyPr wrap="square" lIns="0" tIns="0" rIns="0" bIns="0" rtlCol="0" anchor="ctr"/>
+          <a:lstStyle/>
+          <a:p>
+            <a:pPr algn="ctr" indent="0" marL="0">
+              <a:buNone/>
+            </a:pPr>
+            <a:r>
+              <a:rPr lang="en-US" sz="2800" b="1" dirty="0">
+                <a:solidFill>
+                  <a:srgbClr val="0B7A79"/>
+                </a:solidFill>
+                <a:latin typeface="Georgia" pitchFamily="34" charset="0"/>
+                <a:ea typeface="Georgia" pitchFamily="34" charset="-122"/>
+                <a:cs typeface="Georgia" pitchFamily="34" charset="-120"/>
+              </a:rPr>
+              <a:t>R$ 12.000</a:t>
+            </a:r>
+            <a:endParaRPr lang="en-US" sz="2800" dirty="0"/>
+          </a:p>
+        </p:txBody>
+      </p:sp>
+      <p:sp>
+        <p:nvSpPr>
+          <p:cNvPr id="32" name="Text 30"/>
+          <p:cNvSpPr/>
+          <p:nvPr/>
+        </p:nvSpPr>
+        <p:spPr>
+          <a:xfrm>
+            <a:off x="8284464" y="3931920"/>
+            <a:ext cx="3246120" cy="201168"/>
+          </a:xfrm>
+          <a:prstGeom prst="rect">
+            <a:avLst/>
+          </a:prstGeom>
+          <a:noFill/>
+          <a:ln/>
+        </p:spPr>
+        <p:txBody>
+          <a:bodyPr wrap="square" lIns="0" tIns="0" rIns="0" bIns="0" rtlCol="0" anchor="ctr"/>
+          <a:lstStyle/>
+          <a:p>
+            <a:pPr algn="ctr" indent="0" marL="0">
+              <a:buNone/>
+            </a:pPr>
+            <a:r>
+              <a:rPr lang="en-US" sz="1000" dirty="0">
+                <a:solidFill>
+                  <a:srgbClr val="64748B"/>
+                </a:solidFill>
+                <a:latin typeface="Calibri" pitchFamily="34" charset="0"/>
+                <a:ea typeface="Calibri" pitchFamily="34" charset="-122"/>
+                <a:cs typeface="Calibri" pitchFamily="34" charset="-120"/>
+              </a:rPr>
+              <a:t>por mês</a:t>
+            </a:r>
+            <a:endParaRPr lang="en-US" sz="1000" dirty="0"/>
+          </a:p>
+        </p:txBody>
+      </p:sp>
+      <p:sp>
+        <p:nvSpPr>
+          <p:cNvPr id="33" name="Shape 31"/>
+          <p:cNvSpPr/>
+          <p:nvPr/>
+        </p:nvSpPr>
+        <p:spPr>
+          <a:xfrm>
+            <a:off x="8558784" y="4114800"/>
+            <a:ext cx="2697480" cy="0"/>
+          </a:xfrm>
+          <a:prstGeom prst="line">
+            <a:avLst/>
+          </a:prstGeom>
+          <a:noFill/>
+          <a:ln w="9525">
+            <a:solidFill>
+              <a:srgbClr val="E2E8F0"/>
+            </a:solidFill>
+            <a:prstDash val="solid"/>
+          </a:ln>
+        </p:spPr>
+      </p:sp>
+      <p:sp>
+        <p:nvSpPr>
+          <p:cNvPr id="34" name="Text 32"/>
+          <p:cNvSpPr/>
+          <p:nvPr/>
+        </p:nvSpPr>
+        <p:spPr>
+          <a:xfrm>
+            <a:off x="8284464" y="4206240"/>
+            <a:ext cx="3246120" cy="274320"/>
+          </a:xfrm>
+          <a:prstGeom prst="rect">
+            <a:avLst/>
+          </a:prstGeom>
+          <a:noFill/>
+          <a:ln/>
+        </p:spPr>
+        <p:txBody>
+          <a:bodyPr wrap="square" lIns="0" tIns="0" rIns="0" bIns="0" rtlCol="0" anchor="ctr"/>
+          <a:lstStyle/>
+          <a:p>
+            <a:pPr algn="ctr" indent="0" marL="0">
+              <a:buNone/>
+            </a:pPr>
+            <a:r>
+              <a:rPr lang="en-US" sz="1100" b="1" dirty="0">
+                <a:solidFill>
+                  <a:srgbClr val="0A1940"/>
+                </a:solidFill>
+                <a:latin typeface="Calibri" pitchFamily="34" charset="0"/>
+                <a:ea typeface="Calibri" pitchFamily="34" charset="-122"/>
+                <a:cs typeface="Calibri" pitchFamily="34" charset="-120"/>
+              </a:rPr>
+              <a:t>+ desde R$ 45.000 de implementação</a:t>
+            </a:r>
+            <a:endParaRPr lang="en-US" sz="1100" dirty="0"/>
+          </a:p>
+        </p:txBody>
+      </p:sp>
+      <p:sp>
+        <p:nvSpPr>
+          <p:cNvPr id="35" name="Text 33"/>
+          <p:cNvSpPr/>
+          <p:nvPr/>
+        </p:nvSpPr>
+        <p:spPr>
+          <a:xfrm>
+            <a:off x="8330184" y="4617720"/>
+            <a:ext cx="3200400" cy="1554480"/>
+          </a:xfrm>
+          <a:prstGeom prst="rect">
+            <a:avLst/>
+          </a:prstGeom>
+          <a:noFill/>
+          <a:ln/>
+        </p:spPr>
+        <p:txBody>
+          <a:bodyPr wrap="square" lIns="0" tIns="0" rIns="0" bIns="0" rtlCol="0" anchor="ctr"/>
+          <a:lstStyle/>
+          <a:p>
+            <a:pPr marL="342900" indent="-342900">
+              <a:spcAft>
+                <a:spcPts val="300"/>
+              </a:spcAft>
+              <a:buSzPct val="100000"/>
+              <a:buChar char="▪"/>
+            </a:pPr>
+            <a:r>
+              <a:rPr lang="en-US" sz="1050" dirty="0">
+                <a:solidFill>
+                  <a:srgbClr val="0A1940"/>
+                </a:solidFill>
+                <a:latin typeface="Calibri" pitchFamily="34" charset="0"/>
+                <a:ea typeface="Calibri" pitchFamily="34" charset="-122"/>
+                <a:cs typeface="Calibri" pitchFamily="34" charset="-120"/>
+              </a:rPr>
+              <a:t>Tudo do Pro</a:t>
+            </a:r>
+            <a:endParaRPr lang="en-US" sz="1050" dirty="0"/>
+          </a:p>
+          <a:p>
+            <a:pPr marL="342900" indent="-342900">
+              <a:spcAft>
+                <a:spcPts val="300"/>
+              </a:spcAft>
+              <a:buSzPct val="100000"/>
+              <a:buChar char="▪"/>
+            </a:pPr>
+            <a:r>
+              <a:rPr lang="en-US" sz="1050" dirty="0">
+                <a:solidFill>
+                  <a:srgbClr val="0A1940"/>
+                </a:solidFill>
+                <a:latin typeface="Calibri" pitchFamily="34" charset="0"/>
+                <a:ea typeface="Calibri" pitchFamily="34" charset="-122"/>
+                <a:cs typeface="Calibri" pitchFamily="34" charset="-120"/>
+              </a:rPr>
+              <a:t>RPAs ilimitados e filas prioritárias</a:t>
+            </a:r>
+            <a:endParaRPr lang="en-US" sz="1050" dirty="0"/>
+          </a:p>
+          <a:p>
+            <a:pPr marL="342900" indent="-342900">
+              <a:spcAft>
+                <a:spcPts val="300"/>
+              </a:spcAft>
+              <a:buSzPct val="100000"/>
+              <a:buChar char="▪"/>
+            </a:pPr>
+            <a:r>
+              <a:rPr lang="en-US" sz="1050" dirty="0">
+                <a:solidFill>
+                  <a:srgbClr val="0A1940"/>
+                </a:solidFill>
+                <a:latin typeface="Calibri" pitchFamily="34" charset="0"/>
+                <a:ea typeface="Calibri" pitchFamily="34" charset="-122"/>
+                <a:cs typeface="Calibri" pitchFamily="34" charset="-120"/>
+              </a:rPr>
+              <a:t>SLA de 4 horas úteis</a:t>
+            </a:r>
+            <a:endParaRPr lang="en-US" sz="1050" dirty="0"/>
+          </a:p>
+          <a:p>
+            <a:pPr marL="342900" indent="-342900">
+              <a:spcAft>
+                <a:spcPts val="300"/>
+              </a:spcAft>
+              <a:buSzPct val="100000"/>
+              <a:buChar char="▪"/>
+            </a:pPr>
+            <a:r>
+              <a:rPr lang="en-US" sz="1050" dirty="0">
+                <a:solidFill>
+                  <a:srgbClr val="0A1940"/>
+                </a:solidFill>
+                <a:latin typeface="Calibri" pitchFamily="34" charset="0"/>
+                <a:ea typeface="Calibri" pitchFamily="34" charset="-122"/>
+                <a:cs typeface="Calibri" pitchFamily="34" charset="-120"/>
+              </a:rPr>
+              <a:t>CSM dedicado + treinamentos recorrentes</a:t>
+            </a:r>
+            <a:endParaRPr lang="en-US" sz="1050" dirty="0"/>
+          </a:p>
+          <a:p>
+            <a:pPr marL="342900" indent="-342900">
+              <a:spcAft>
+                <a:spcPts val="300"/>
+              </a:spcAft>
+              <a:buSzPct val="100000"/>
+              <a:buChar char="▪"/>
+            </a:pPr>
+            <a:r>
+              <a:rPr lang="en-US" sz="1050" dirty="0">
+                <a:solidFill>
+                  <a:srgbClr val="0A1940"/>
+                </a:solidFill>
+                <a:latin typeface="Calibri" pitchFamily="34" charset="0"/>
+                <a:ea typeface="Calibri" pitchFamily="34" charset="-122"/>
+                <a:cs typeface="Calibri" pitchFamily="34" charset="-120"/>
+              </a:rPr>
+              <a:t>SSO, integrações custom e ambiente dedicado</a:t>
+            </a:r>
+            <a:endParaRPr lang="en-US" sz="1050" dirty="0"/>
+          </a:p>
+        </p:txBody>
+      </p:sp>
+      <p:sp>
+        <p:nvSpPr>
+          <p:cNvPr id="36" name="Text 34"/>
+          <p:cNvSpPr/>
+          <p:nvPr/>
+        </p:nvSpPr>
+        <p:spPr>
+          <a:xfrm>
+            <a:off x="548640" y="6263640"/>
+            <a:ext cx="11064240" cy="256032"/>
+          </a:xfrm>
+          <a:prstGeom prst="rect">
+            <a:avLst/>
+          </a:prstGeom>
+          <a:noFill/>
+          <a:ln/>
+        </p:spPr>
+        <p:txBody>
+          <a:bodyPr wrap="square" lIns="0" tIns="0" rIns="0" bIns="0" rtlCol="0" anchor="ctr"/>
+          <a:lstStyle/>
+          <a:p>
+            <a:pPr algn="ctr" indent="0" marL="0">
+              <a:buNone/>
+            </a:pPr>
+            <a:r>
+              <a:rPr lang="en-US" sz="950" i="1" dirty="0">
+                <a:solidFill>
+                  <a:srgbClr val="64748B"/>
+                </a:solidFill>
+                <a:latin typeface="Calibri" pitchFamily="34" charset="0"/>
+                <a:ea typeface="Calibri" pitchFamily="34" charset="-122"/>
+                <a:cs typeface="Calibri" pitchFamily="34" charset="-120"/>
+              </a:rPr>
+              <a:t>Contrato mínimo de 12 meses · reajuste anual por IPCA · custo de IA (Claude Haiku 4.5 via Batch API) já incluso · Enterprise com ambiente dedicado opcional</a:t>
+            </a:r>
+            <a:endParaRPr lang="en-US" sz="950" dirty="0"/>
+          </a:p>
+        </p:txBody>
+      </p:sp>
+      <p:sp>
+        <p:nvSpPr>
+          <p:cNvPr id="37" name="Shape 35"/>
+          <p:cNvSpPr/>
+          <p:nvPr/>
+        </p:nvSpPr>
+        <p:spPr>
+          <a:xfrm>
+            <a:off x="548640" y="6537960"/>
+            <a:ext cx="11064240" cy="0"/>
+          </a:xfrm>
+          <a:prstGeom prst="line">
+            <a:avLst/>
+          </a:prstGeom>
+          <a:noFill/>
+          <a:ln w="9525">
+            <a:solidFill>
+              <a:srgbClr val="CBD5E1"/>
+            </a:solidFill>
+            <a:prstDash val="solid"/>
+          </a:ln>
+        </p:spPr>
+      </p:sp>
+      <p:sp>
+        <p:nvSpPr>
+          <p:cNvPr id="38" name="Text 36"/>
+          <p:cNvSpPr/>
+          <p:nvPr/>
+        </p:nvSpPr>
+        <p:spPr>
+          <a:xfrm>
+            <a:off x="548640" y="6583680"/>
+            <a:ext cx="5486400" cy="274320"/>
+          </a:xfrm>
+          <a:prstGeom prst="rect">
+            <a:avLst/>
+          </a:prstGeom>
+          <a:noFill/>
+          <a:ln/>
+        </p:spPr>
+        <p:txBody>
+          <a:bodyPr wrap="square" lIns="0" tIns="0" rIns="0" bIns="0" rtlCol="0" anchor="ctr"/>
+          <a:lstStyle/>
+          <a:p>
+            <a:pPr algn="l" indent="0" marL="0">
+              <a:buNone/>
+            </a:pPr>
+            <a:r>
+              <a:rPr lang="en-US" sz="900" dirty="0">
+                <a:solidFill>
+                  <a:srgbClr val="64748B"/>
+                </a:solidFill>
+                <a:latin typeface="Calibri" pitchFamily="34" charset="0"/>
+                <a:ea typeface="Calibri" pitchFamily="34" charset="-122"/>
+                <a:cs typeface="Calibri" pitchFamily="34" charset="-120"/>
+              </a:rPr>
+              <a:t>DunaFlow · MDR Advocacia</a:t>
+            </a:r>
+            <a:endParaRPr lang="en-US" sz="900" dirty="0"/>
+          </a:p>
+        </p:txBody>
+      </p:sp>
+      <p:sp>
+        <p:nvSpPr>
+          <p:cNvPr id="39" name="Text 37"/>
+          <p:cNvSpPr/>
+          <p:nvPr/>
+        </p:nvSpPr>
+        <p:spPr>
+          <a:xfrm>
+            <a:off x="10149840" y="6583680"/>
+            <a:ext cx="1463040" cy="274320"/>
+          </a:xfrm>
+          <a:prstGeom prst="rect">
+            <a:avLst/>
+          </a:prstGeom>
+          <a:noFill/>
+          <a:ln/>
+        </p:spPr>
+        <p:txBody>
+          <a:bodyPr wrap="square" lIns="0" tIns="0" rIns="0" bIns="0" rtlCol="0" anchor="ctr"/>
+          <a:lstStyle/>
+          <a:p>
+            <a:pPr algn="r" indent="0" marL="0">
+              <a:buNone/>
+            </a:pPr>
+            <a:r>
+              <a:rPr lang="en-US" sz="900" dirty="0">
+                <a:solidFill>
+                  <a:srgbClr val="64748B"/>
+                </a:solidFill>
+                <a:latin typeface="Calibri" pitchFamily="34" charset="0"/>
+                <a:ea typeface="Calibri" pitchFamily="34" charset="-122"/>
+                <a:cs typeface="Calibri" pitchFamily="34" charset="-120"/>
+              </a:rPr>
+              <a:t>13 / 15</a:t>
+            </a:r>
+            <a:endParaRPr lang="en-US" sz="900" dirty="0"/>
+          </a:p>
+        </p:txBody>
+      </p:sp>
+    </p:spTree>
+  </p:cSld>
+  <p:clrMapOvr>
+    <a:masterClrMapping/>
+  </p:clrMapOvr>
+</p:sld>
+</file>
+
+<file path=ppt/slides/slide14.xml><?xml version="1.0" encoding="utf-8"?>
+<p:sld xmlns:a="http://schemas.openxmlformats.org/drawingml/2006/main" xmlns:r="http://schemas.openxmlformats.org/officeDocument/2006/relationships" xmlns:p="http://schemas.openxmlformats.org/presentationml/2006/main">
+  <p:cSld name="Slide 14">
+    <p:bg>
+      <p:bgPr>
+        <a:solidFill>
+          <a:srgbClr val="F4F6FB"/>
+        </a:solidFill>
+      </p:bgPr>
+    </p:bg>
+    <p:spTree>
+      <p:nvGrpSpPr>
+        <p:cNvPr id="1" name=""/>
+        <p:cNvGrpSpPr/>
+        <p:nvPr/>
+      </p:nvGrpSpPr>
+      <p:grpSpPr>
+        <a:xfrm>
+          <a:off x="0" y="0"/>
+          <a:ext cx="0" cy="0"/>
+          <a:chOff x="0" y="0"/>
+          <a:chExt cx="0" cy="0"/>
+        </a:xfrm>
+      </p:grpSpPr>
+      <p:sp>
+        <p:nvSpPr>
+          <p:cNvPr id="2" name="Text 0"/>
+          <p:cNvSpPr/>
+          <p:nvPr/>
+        </p:nvSpPr>
+        <p:spPr>
+          <a:xfrm>
+            <a:off x="548640" y="320040"/>
+            <a:ext cx="10972800" cy="274320"/>
+          </a:xfrm>
+          <a:prstGeom prst="rect">
+            <a:avLst/>
+          </a:prstGeom>
+          <a:noFill/>
+          <a:ln/>
+        </p:spPr>
+        <p:txBody>
+          <a:bodyPr wrap="square" lIns="0" tIns="0" rIns="0" bIns="0" rtlCol="0" anchor="ctr"/>
+          <a:lstStyle/>
+          <a:p>
+            <a:pPr indent="0" marL="0">
+              <a:buNone/>
+            </a:pPr>
+            <a:r>
+              <a:rPr lang="en-US" sz="1100" b="1" spc="600" kern="0" dirty="0">
+                <a:solidFill>
+                  <a:srgbClr val="1558CC"/>
+                </a:solidFill>
+                <a:latin typeface="Calibri" pitchFamily="34" charset="0"/>
+                <a:ea typeface="Calibri" pitchFamily="34" charset="-122"/>
+                <a:cs typeface="Calibri" pitchFamily="34" charset="-120"/>
+              </a:rPr>
+              <a:t>POR QUE ISSO SE PAGA</a:t>
+            </a:r>
+            <a:endParaRPr lang="en-US" sz="1100" dirty="0"/>
+          </a:p>
+        </p:txBody>
+      </p:sp>
+      <p:sp>
+        <p:nvSpPr>
+          <p:cNvPr id="3" name="Text 1"/>
+          <p:cNvSpPr/>
+          <p:nvPr/>
+        </p:nvSpPr>
+        <p:spPr>
+          <a:xfrm>
+            <a:off x="548640" y="640080"/>
+            <a:ext cx="11430000" cy="640080"/>
+          </a:xfrm>
+          <a:prstGeom prst="rect">
+            <a:avLst/>
+          </a:prstGeom>
+          <a:noFill/>
+          <a:ln/>
+        </p:spPr>
+        <p:txBody>
+          <a:bodyPr wrap="square" lIns="0" tIns="0" rIns="0" bIns="0" rtlCol="0" anchor="ctr"/>
+          <a:lstStyle/>
+          <a:p>
+            <a:pPr indent="0" marL="0">
+              <a:buNone/>
+            </a:pPr>
+            <a:r>
+              <a:rPr lang="en-US" sz="3000" b="1" dirty="0">
+                <a:solidFill>
+                  <a:srgbClr val="0A1940"/>
+                </a:solidFill>
+                <a:latin typeface="Georgia" pitchFamily="34" charset="0"/>
+                <a:ea typeface="Georgia" pitchFamily="34" charset="-122"/>
+                <a:cs typeface="Georgia" pitchFamily="34" charset="-120"/>
+              </a:rPr>
+              <a:t>Retorno sobre o investimento</a:t>
+            </a:r>
+            <a:endParaRPr lang="en-US" sz="3000" dirty="0"/>
+          </a:p>
+        </p:txBody>
+      </p:sp>
+      <p:sp>
+        <p:nvSpPr>
+          <p:cNvPr id="4" name="Shape 2"/>
+          <p:cNvSpPr/>
+          <p:nvPr/>
+        </p:nvSpPr>
+        <p:spPr>
+          <a:xfrm>
+            <a:off x="548640" y="1353312"/>
+            <a:ext cx="548640" cy="54864"/>
+          </a:xfrm>
+          <a:prstGeom prst="rect">
+            <a:avLst/>
+          </a:prstGeom>
+          <a:solidFill>
+            <a:srgbClr val="1E7BFF"/>
+          </a:solidFill>
+          <a:ln w="12700">
+            <a:solidFill>
+              <a:srgbClr val="1E7BFF"/>
+            </a:solidFill>
+            <a:prstDash val="solid"/>
+          </a:ln>
+        </p:spPr>
+      </p:sp>
+      <p:sp>
+        <p:nvSpPr>
+          <p:cNvPr id="5" name="Text 3"/>
+          <p:cNvSpPr/>
+          <p:nvPr/>
+        </p:nvSpPr>
+        <p:spPr>
+          <a:xfrm>
+            <a:off x="548640" y="1508760"/>
+            <a:ext cx="11064240" cy="548640"/>
+          </a:xfrm>
+          <a:prstGeom prst="rect">
+            <a:avLst/>
+          </a:prstGeom>
+          <a:noFill/>
+          <a:ln/>
+        </p:spPr>
+        <p:txBody>
+          <a:bodyPr wrap="square" lIns="0" tIns="0" rIns="0" bIns="0" rtlCol="0" anchor="ctr"/>
+          <a:lstStyle/>
+          <a:p>
+            <a:pPr indent="0" marL="0">
+              <a:buNone/>
+            </a:pPr>
+            <a:r>
+              <a:rPr lang="en-US" sz="1300" dirty="0">
                 <a:solidFill>
                   <a:srgbClr val="1E293B"/>
                 </a:solidFill>
@@ -6521,21 +7837,21 @@
                 <a:ea typeface="Calibri" pitchFamily="34" charset="-122"/>
                 <a:cs typeface="Calibri" pitchFamily="34" charset="-120"/>
               </a:rPr>
-              <a:t>Exposição típica de um único embargo perdido</a:t>
-            </a:r>
-            <a:endParaRPr lang="en-US" sz="1200" dirty="0"/>
-          </a:p>
-        </p:txBody>
-      </p:sp>
-      <p:sp>
-        <p:nvSpPr>
-          <p:cNvPr id="14" name="Shape 12"/>
-          <p:cNvSpPr/>
-          <p:nvPr/>
-        </p:nvSpPr>
-        <p:spPr>
-          <a:xfrm>
-            <a:off x="8101584" y="2240280"/>
+              <a:t>O DunaFlow libera horas de advogado, reduz exposição a perdas de prazo e transforma publicações órfãs em operação ativa. A mensalidade se paga em poucas semanas de uso efetivo.</a:t>
+            </a:r>
+            <a:endParaRPr lang="en-US" sz="1300" dirty="0"/>
+          </a:p>
+        </p:txBody>
+      </p:sp>
+      <p:sp>
+        <p:nvSpPr>
+          <p:cNvPr id="6" name="Shape 4"/>
+          <p:cNvSpPr/>
+          <p:nvPr/>
+        </p:nvSpPr>
+        <p:spPr>
+          <a:xfrm>
+            <a:off x="548640" y="2240280"/>
             <a:ext cx="3611880" cy="1920240"/>
           </a:xfrm>
           <a:prstGeom prst="rect">
@@ -6561,6 +7877,276 @@
       </p:sp>
       <p:sp>
         <p:nvSpPr>
+          <p:cNvPr id="7" name="Shape 5"/>
+          <p:cNvSpPr/>
+          <p:nvPr/>
+        </p:nvSpPr>
+        <p:spPr>
+          <a:xfrm>
+            <a:off x="548640" y="2240280"/>
+            <a:ext cx="109728" cy="1920240"/>
+          </a:xfrm>
+          <a:prstGeom prst="rect">
+            <a:avLst/>
+          </a:prstGeom>
+          <a:solidFill>
+            <a:srgbClr val="0EA5A4"/>
+          </a:solidFill>
+          <a:ln w="12700">
+            <a:solidFill>
+              <a:srgbClr val="0EA5A4"/>
+            </a:solidFill>
+            <a:prstDash val="solid"/>
+          </a:ln>
+        </p:spPr>
+      </p:sp>
+      <p:sp>
+        <p:nvSpPr>
+          <p:cNvPr id="8" name="Text 6"/>
+          <p:cNvSpPr/>
+          <p:nvPr/>
+        </p:nvSpPr>
+        <p:spPr>
+          <a:xfrm>
+            <a:off x="777240" y="2514600"/>
+            <a:ext cx="3246120" cy="868680"/>
+          </a:xfrm>
+          <a:prstGeom prst="rect">
+            <a:avLst/>
+          </a:prstGeom>
+          <a:noFill/>
+          <a:ln/>
+        </p:spPr>
+        <p:txBody>
+          <a:bodyPr wrap="square" lIns="0" tIns="0" rIns="0" bIns="0" rtlCol="0" anchor="ctr"/>
+          <a:lstStyle/>
+          <a:p>
+            <a:pPr indent="0" marL="0">
+              <a:buNone/>
+            </a:pPr>
+            <a:r>
+              <a:rPr lang="en-US" sz="3800" b="1" dirty="0">
+                <a:solidFill>
+                  <a:srgbClr val="0EA5A4"/>
+                </a:solidFill>
+                <a:latin typeface="Georgia" pitchFamily="34" charset="0"/>
+                <a:ea typeface="Georgia" pitchFamily="34" charset="-122"/>
+                <a:cs typeface="Georgia" pitchFamily="34" charset="-120"/>
+              </a:rPr>
+              <a:t>20–40h</a:t>
+            </a:r>
+            <a:endParaRPr lang="en-US" sz="3800" dirty="0"/>
+          </a:p>
+        </p:txBody>
+      </p:sp>
+      <p:sp>
+        <p:nvSpPr>
+          <p:cNvPr id="9" name="Text 7"/>
+          <p:cNvSpPr/>
+          <p:nvPr/>
+        </p:nvSpPr>
+        <p:spPr>
+          <a:xfrm>
+            <a:off x="777240" y="3429000"/>
+            <a:ext cx="3246120" cy="640080"/>
+          </a:xfrm>
+          <a:prstGeom prst="rect">
+            <a:avLst/>
+          </a:prstGeom>
+          <a:noFill/>
+          <a:ln/>
+        </p:spPr>
+        <p:txBody>
+          <a:bodyPr wrap="square" lIns="0" tIns="0" rIns="0" bIns="0" rtlCol="0" anchor="ctr"/>
+          <a:lstStyle/>
+          <a:p>
+            <a:pPr indent="0" marL="0">
+              <a:buNone/>
+            </a:pPr>
+            <a:r>
+              <a:rPr lang="en-US" sz="1200" dirty="0">
+                <a:solidFill>
+                  <a:srgbClr val="1E293B"/>
+                </a:solidFill>
+                <a:latin typeface="Calibri" pitchFamily="34" charset="0"/>
+                <a:ea typeface="Calibri" pitchFamily="34" charset="-122"/>
+                <a:cs typeface="Calibri" pitchFamily="34" charset="-120"/>
+              </a:rPr>
+              <a:t>Horas de triagem devolvidas ao time por mês</a:t>
+            </a:r>
+            <a:endParaRPr lang="en-US" sz="1200" dirty="0"/>
+          </a:p>
+        </p:txBody>
+      </p:sp>
+      <p:sp>
+        <p:nvSpPr>
+          <p:cNvPr id="10" name="Shape 8"/>
+          <p:cNvSpPr/>
+          <p:nvPr/>
+        </p:nvSpPr>
+        <p:spPr>
+          <a:xfrm>
+            <a:off x="4325112" y="2240280"/>
+            <a:ext cx="3611880" cy="1920240"/>
+          </a:xfrm>
+          <a:prstGeom prst="rect">
+            <a:avLst/>
+          </a:prstGeom>
+          <a:solidFill>
+            <a:srgbClr val="FFFFFF"/>
+          </a:solidFill>
+          <a:ln w="6350">
+            <a:solidFill>
+              <a:srgbClr val="E2E8F0"/>
+            </a:solidFill>
+            <a:prstDash val="solid"/>
+          </a:ln>
+          <a:effectLst>
+            <a:outerShdw sx="100000" sy="100000" kx="0" ky="0" algn="bl" rotWithShape="0" blurRad="127000" dist="38100" dir="5400000">
+              <a:srgbClr val="000000">
+                <a:alpha val="10000"/>
+              </a:srgbClr>
+            </a:outerShdw>
+          </a:effectLst>
+        </p:spPr>
+      </p:sp>
+      <p:sp>
+        <p:nvSpPr>
+          <p:cNvPr id="11" name="Shape 9"/>
+          <p:cNvSpPr/>
+          <p:nvPr/>
+        </p:nvSpPr>
+        <p:spPr>
+          <a:xfrm>
+            <a:off x="4325112" y="2240280"/>
+            <a:ext cx="109728" cy="1920240"/>
+          </a:xfrm>
+          <a:prstGeom prst="rect">
+            <a:avLst/>
+          </a:prstGeom>
+          <a:solidFill>
+            <a:srgbClr val="D65A4B"/>
+          </a:solidFill>
+          <a:ln w="12700">
+            <a:solidFill>
+              <a:srgbClr val="D65A4B"/>
+            </a:solidFill>
+            <a:prstDash val="solid"/>
+          </a:ln>
+        </p:spPr>
+      </p:sp>
+      <p:sp>
+        <p:nvSpPr>
+          <p:cNvPr id="12" name="Text 10"/>
+          <p:cNvSpPr/>
+          <p:nvPr/>
+        </p:nvSpPr>
+        <p:spPr>
+          <a:xfrm>
+            <a:off x="4553712" y="2514600"/>
+            <a:ext cx="3246120" cy="868680"/>
+          </a:xfrm>
+          <a:prstGeom prst="rect">
+            <a:avLst/>
+          </a:prstGeom>
+          <a:noFill/>
+          <a:ln/>
+        </p:spPr>
+        <p:txBody>
+          <a:bodyPr wrap="square" lIns="0" tIns="0" rIns="0" bIns="0" rtlCol="0" anchor="ctr"/>
+          <a:lstStyle/>
+          <a:p>
+            <a:pPr indent="0" marL="0">
+              <a:buNone/>
+            </a:pPr>
+            <a:r>
+              <a:rPr lang="en-US" sz="3800" b="1" dirty="0">
+                <a:solidFill>
+                  <a:srgbClr val="D65A4B"/>
+                </a:solidFill>
+                <a:latin typeface="Georgia" pitchFamily="34" charset="0"/>
+                <a:ea typeface="Georgia" pitchFamily="34" charset="-122"/>
+                <a:cs typeface="Georgia" pitchFamily="34" charset="-120"/>
+              </a:rPr>
+              <a:t>R$ 50k+</a:t>
+            </a:r>
+            <a:endParaRPr lang="en-US" sz="3800" dirty="0"/>
+          </a:p>
+        </p:txBody>
+      </p:sp>
+      <p:sp>
+        <p:nvSpPr>
+          <p:cNvPr id="13" name="Text 11"/>
+          <p:cNvSpPr/>
+          <p:nvPr/>
+        </p:nvSpPr>
+        <p:spPr>
+          <a:xfrm>
+            <a:off x="4553712" y="3429000"/>
+            <a:ext cx="3246120" cy="640080"/>
+          </a:xfrm>
+          <a:prstGeom prst="rect">
+            <a:avLst/>
+          </a:prstGeom>
+          <a:noFill/>
+          <a:ln/>
+        </p:spPr>
+        <p:txBody>
+          <a:bodyPr wrap="square" lIns="0" tIns="0" rIns="0" bIns="0" rtlCol="0" anchor="ctr"/>
+          <a:lstStyle/>
+          <a:p>
+            <a:pPr indent="0" marL="0">
+              <a:buNone/>
+            </a:pPr>
+            <a:r>
+              <a:rPr lang="en-US" sz="1200" dirty="0">
+                <a:solidFill>
+                  <a:srgbClr val="1E293B"/>
+                </a:solidFill>
+                <a:latin typeface="Calibri" pitchFamily="34" charset="0"/>
+                <a:ea typeface="Calibri" pitchFamily="34" charset="-122"/>
+                <a:cs typeface="Calibri" pitchFamily="34" charset="-120"/>
+              </a:rPr>
+              <a:t>Exposição típica de um único embargo perdido</a:t>
+            </a:r>
+            <a:endParaRPr lang="en-US" sz="1200" dirty="0"/>
+          </a:p>
+        </p:txBody>
+      </p:sp>
+      <p:sp>
+        <p:nvSpPr>
+          <p:cNvPr id="14" name="Shape 12"/>
+          <p:cNvSpPr/>
+          <p:nvPr/>
+        </p:nvSpPr>
+        <p:spPr>
+          <a:xfrm>
+            <a:off x="8101584" y="2240280"/>
+            <a:ext cx="3611880" cy="1920240"/>
+          </a:xfrm>
+          <a:prstGeom prst="rect">
+            <a:avLst/>
+          </a:prstGeom>
+          <a:solidFill>
+            <a:srgbClr val="FFFFFF"/>
+          </a:solidFill>
+          <a:ln w="6350">
+            <a:solidFill>
+              <a:srgbClr val="E2E8F0"/>
+            </a:solidFill>
+            <a:prstDash val="solid"/>
+          </a:ln>
+          <a:effectLst>
+            <a:outerShdw sx="100000" sy="100000" kx="0" ky="0" algn="bl" rotWithShape="0" blurRad="127000" dist="38100" dir="5400000">
+              <a:srgbClr val="000000">
+                <a:alpha val="10000"/>
+              </a:srgbClr>
+            </a:outerShdw>
+          </a:effectLst>
+        </p:spPr>
+      </p:sp>
+      <p:sp>
+        <p:nvSpPr>
           <p:cNvPr id="15" name="Shape 13"/>
           <p:cNvSpPr/>
           <p:nvPr/>
@@ -7036,7 +8622,7 @@
                 <a:ea typeface="Calibri" pitchFamily="34" charset="-122"/>
                 <a:cs typeface="Calibri" pitchFamily="34" charset="-120"/>
               </a:rPr>
-              <a:t>13 / 14</a:t>
+              <a:t>14 / 15</a:t>
             </a:r>
             <a:endParaRPr lang="en-US" sz="900" dirty="0"/>
           </a:p>
@@ -7050,9 +8636,9 @@
 </p:sld>
 </file>
 
-<file path=ppt/slides/slide14.xml><?xml version="1.0" encoding="utf-8"?>
+<file path=ppt/slides/slide15.xml><?xml version="1.0" encoding="utf-8"?>
 <p:sld xmlns:a="http://schemas.openxmlformats.org/drawingml/2006/main" xmlns:r="http://schemas.openxmlformats.org/officeDocument/2006/relationships" xmlns:p="http://schemas.openxmlformats.org/presentationml/2006/main">
-  <p:cSld name="Slide 14">
+  <p:cSld name="Slide 15">
     <p:bg>
       <p:bgPr>
         <a:solidFill>
@@ -7408,7 +8994,7 @@
                 <a:ea typeface="Calibri" pitchFamily="34" charset="-122"/>
                 <a:cs typeface="Calibri" pitchFamily="34" charset="-120"/>
               </a:rPr>
-              <a:t>MDR Advocacia  ·  DunaFlow v1.4 · by DUNATECH  ·  Abril · 2026</a:t>
+              <a:t>MDR Advocacia  ·  DunaFlow v1.5 · by DUNATECH  ·  Abril · 2026</a:t>
             </a:r>
             <a:endParaRPr lang="en-US" sz="1000" dirty="0"/>
           </a:p>
@@ -8361,7 +9947,7 @@
                 <a:ea typeface="Calibri" pitchFamily="34" charset="-122"/>
                 <a:cs typeface="Calibri" pitchFamily="34" charset="-120"/>
               </a:rPr>
-              <a:t>2 / 14</a:t>
+              <a:t>2 / 15</a:t>
             </a:r>
             <a:endParaRPr lang="en-US" sz="900" dirty="0"/>
           </a:p>
@@ -9095,7 +10681,7 @@
                 <a:ea typeface="Calibri" pitchFamily="34" charset="-122"/>
                 <a:cs typeface="Calibri" pitchFamily="34" charset="-120"/>
               </a:rPr>
-              <a:t>3 / 14</a:t>
+              <a:t>3 / 15</a:t>
             </a:r>
             <a:endParaRPr lang="en-US" sz="900" dirty="0"/>
           </a:p>
@@ -9205,7 +10791,7 @@
                 <a:ea typeface="Georgia" pitchFamily="34" charset="-122"/>
                 <a:cs typeface="Georgia" pitchFamily="34" charset="-120"/>
               </a:rPr>
-              <a:t>Sete módulos, uma única base operacional</a:t>
+              <a:t>Oito módulos, uma única base operacional</a:t>
             </a:r>
             <a:endParaRPr lang="en-US" sz="3000" dirty="0"/>
           </a:p>
@@ -9827,7 +11413,7 @@
                 <a:ea typeface="Georgia" pitchFamily="34" charset="-122"/>
                 <a:cs typeface="Georgia" pitchFamily="34" charset="-120"/>
               </a:rPr>
-              <a:t>Monitoramento processual</a:t>
+              <a:t>Prazos Iniciais</a:t>
             </a:r>
             <a:endParaRPr lang="en-US" sz="1500" dirty="0"/>
           </a:p>
@@ -9866,7 +11452,7 @@
                 <a:ea typeface="Calibri" pitchFamily="34" charset="-122"/>
                 <a:cs typeface="Calibri" pitchFamily="34" charset="-120"/>
               </a:rPr>
-              <a:t>DataJud e DJEN com régua de maturidade.</a:t>
+              <a:t>Intake da PI, classificação IA e prazo fatal por CPC 25.</a:t>
             </a:r>
             <a:endParaRPr lang="en-US" sz="1100" dirty="0"/>
           </a:p>
@@ -9880,7 +11466,7 @@
         </p:nvSpPr>
         <p:spPr>
           <a:xfrm>
-            <a:off x="1842516" y="4069080"/>
+            <a:off x="402336" y="4069080"/>
             <a:ext cx="2743200" cy="2194560"/>
           </a:xfrm>
           <a:prstGeom prst="rect">
@@ -9912,7 +11498,7 @@
         </p:nvSpPr>
         <p:spPr>
           <a:xfrm>
-            <a:off x="1842516" y="4069080"/>
+            <a:off x="402336" y="4069080"/>
             <a:ext cx="2743200" cy="73152"/>
           </a:xfrm>
           <a:prstGeom prst="rect">
@@ -9945,7 +11531,7 @@
         </p:blipFill>
         <p:spPr>
           <a:xfrm>
-            <a:off x="2116836" y="4434840"/>
+            <a:off x="676656" y="4434840"/>
             <a:ext cx="548640" cy="548640"/>
           </a:xfrm>
           <a:prstGeom prst="rect">
@@ -9961,7 +11547,7 @@
         </p:nvSpPr>
         <p:spPr>
           <a:xfrm>
-            <a:off x="2071116" y="5120640"/>
+            <a:off x="630936" y="5120640"/>
             <a:ext cx="2286000" cy="365760"/>
           </a:xfrm>
           <a:prstGeom prst="rect">
@@ -9986,7 +11572,7 @@
                 <a:ea typeface="Georgia" pitchFamily="34" charset="-122"/>
                 <a:cs typeface="Georgia" pitchFamily="34" charset="-120"/>
               </a:rPr>
-              <a:t>Automações agendadas</a:t>
+              <a:t>Monitoramento processual</a:t>
             </a:r>
             <a:endParaRPr lang="en-US" sz="1500" dirty="0"/>
           </a:p>
@@ -10000,7 +11586,7 @@
         </p:nvSpPr>
         <p:spPr>
           <a:xfrm>
-            <a:off x="2071116" y="5440680"/>
+            <a:off x="630936" y="5440680"/>
             <a:ext cx="2286000" cy="777240"/>
           </a:xfrm>
           <a:prstGeom prst="rect">
@@ -10025,7 +11611,7 @@
                 <a:ea typeface="Calibri" pitchFamily="34" charset="-122"/>
                 <a:cs typeface="Calibri" pitchFamily="34" charset="-120"/>
               </a:rPr>
-              <a:t>APScheduler em alta disponibilidade.</a:t>
+              <a:t>DataJud e DJEN com régua de maturidade.</a:t>
             </a:r>
             <a:endParaRPr lang="en-US" sz="1100" dirty="0"/>
           </a:p>
@@ -10039,7 +11625,7 @@
         </p:nvSpPr>
         <p:spPr>
           <a:xfrm>
-            <a:off x="4722876" y="4069080"/>
+            <a:off x="3282696" y="4069080"/>
             <a:ext cx="2743200" cy="2194560"/>
           </a:xfrm>
           <a:prstGeom prst="rect">
@@ -10071,7 +11657,7 @@
         </p:nvSpPr>
         <p:spPr>
           <a:xfrm>
-            <a:off x="4722876" y="4069080"/>
+            <a:off x="3282696" y="4069080"/>
             <a:ext cx="2743200" cy="73152"/>
           </a:xfrm>
           <a:prstGeom prst="rect">
@@ -10104,7 +11690,7 @@
         </p:blipFill>
         <p:spPr>
           <a:xfrm>
-            <a:off x="4997196" y="4434840"/>
+            <a:off x="3557016" y="4434840"/>
             <a:ext cx="548640" cy="548640"/>
           </a:xfrm>
           <a:prstGeom prst="rect">
@@ -10120,7 +11706,7 @@
         </p:nvSpPr>
         <p:spPr>
           <a:xfrm>
-            <a:off x="4951476" y="5120640"/>
+            <a:off x="3511296" y="5120640"/>
             <a:ext cx="2286000" cy="365760"/>
           </a:xfrm>
           <a:prstGeom prst="rect">
@@ -10145,7 +11731,7 @@
                 <a:ea typeface="Georgia" pitchFamily="34" charset="-122"/>
                 <a:cs typeface="Georgia" pitchFamily="34" charset="-120"/>
               </a:rPr>
-              <a:t>Painéis e métricas</a:t>
+              <a:t>Automações agendadas</a:t>
             </a:r>
             <a:endParaRPr lang="en-US" sz="1500" dirty="0"/>
           </a:p>
@@ -10159,7 +11745,7 @@
         </p:nvSpPr>
         <p:spPr>
           <a:xfrm>
-            <a:off x="4951476" y="5440680"/>
+            <a:off x="3511296" y="5440680"/>
             <a:ext cx="2286000" cy="777240"/>
           </a:xfrm>
           <a:prstGeom prst="rect">
@@ -10184,7 +11770,7 @@
                 <a:ea typeface="Calibri" pitchFamily="34" charset="-122"/>
                 <a:cs typeface="Calibri" pitchFamily="34" charset="-120"/>
               </a:rPr>
-              <a:t>Visibilidade do que foi feito, está pendente e travou.</a:t>
+              <a:t>APScheduler em alta disponibilidade.</a:t>
             </a:r>
             <a:endParaRPr lang="en-US" sz="1100" dirty="0"/>
           </a:p>
@@ -10198,7 +11784,7 @@
         </p:nvSpPr>
         <p:spPr>
           <a:xfrm>
-            <a:off x="7603236" y="4069080"/>
+            <a:off x="6163056" y="4069080"/>
             <a:ext cx="2743200" cy="2194560"/>
           </a:xfrm>
           <a:prstGeom prst="rect">
@@ -10230,7 +11816,7 @@
         </p:nvSpPr>
         <p:spPr>
           <a:xfrm>
-            <a:off x="7603236" y="4069080"/>
+            <a:off x="6163056" y="4069080"/>
             <a:ext cx="2743200" cy="73152"/>
           </a:xfrm>
           <a:prstGeom prst="rect">
@@ -10263,7 +11849,7 @@
         </p:blipFill>
         <p:spPr>
           <a:xfrm>
-            <a:off x="7877556" y="4434840"/>
+            <a:off x="6437376" y="4434840"/>
             <a:ext cx="548640" cy="548640"/>
           </a:xfrm>
           <a:prstGeom prst="rect">
@@ -10279,7 +11865,7 @@
         </p:nvSpPr>
         <p:spPr>
           <a:xfrm>
-            <a:off x="7831836" y="5120640"/>
+            <a:off x="6391656" y="5120640"/>
             <a:ext cx="2286000" cy="365760"/>
           </a:xfrm>
           <a:prstGeom prst="rect">
@@ -10304,6 +11890,165 @@
                 <a:ea typeface="Georgia" pitchFamily="34" charset="-122"/>
                 <a:cs typeface="Georgia" pitchFamily="34" charset="-120"/>
               </a:rPr>
+              <a:t>Painéis e métricas</a:t>
+            </a:r>
+            <a:endParaRPr lang="en-US" sz="1500" dirty="0"/>
+          </a:p>
+        </p:txBody>
+      </p:sp>
+      <p:sp>
+        <p:nvSpPr>
+          <p:cNvPr id="39" name="Text 30"/>
+          <p:cNvSpPr/>
+          <p:nvPr/>
+        </p:nvSpPr>
+        <p:spPr>
+          <a:xfrm>
+            <a:off x="6391656" y="5440680"/>
+            <a:ext cx="2286000" cy="777240"/>
+          </a:xfrm>
+          <a:prstGeom prst="rect">
+            <a:avLst/>
+          </a:prstGeom>
+          <a:noFill/>
+          <a:ln/>
+        </p:spPr>
+        <p:txBody>
+          <a:bodyPr wrap="square" lIns="0" tIns="0" rIns="0" bIns="0" rtlCol="0" anchor="ctr"/>
+          <a:lstStyle/>
+          <a:p>
+            <a:pPr indent="0" marL="0">
+              <a:buNone/>
+            </a:pPr>
+            <a:r>
+              <a:rPr lang="en-US" sz="1100" dirty="0">
+                <a:solidFill>
+                  <a:srgbClr val="1E293B"/>
+                </a:solidFill>
+                <a:latin typeface="Calibri" pitchFamily="34" charset="0"/>
+                <a:ea typeface="Calibri" pitchFamily="34" charset="-122"/>
+                <a:cs typeface="Calibri" pitchFamily="34" charset="-120"/>
+              </a:rPr>
+              <a:t>Visibilidade do que foi feito, está pendente e travou.</a:t>
+            </a:r>
+            <a:endParaRPr lang="en-US" sz="1100" dirty="0"/>
+          </a:p>
+        </p:txBody>
+      </p:sp>
+      <p:sp>
+        <p:nvSpPr>
+          <p:cNvPr id="40" name="Shape 31"/>
+          <p:cNvSpPr/>
+          <p:nvPr/>
+        </p:nvSpPr>
+        <p:spPr>
+          <a:xfrm>
+            <a:off x="9043416" y="4069080"/>
+            <a:ext cx="2743200" cy="2194560"/>
+          </a:xfrm>
+          <a:prstGeom prst="rect">
+            <a:avLst/>
+          </a:prstGeom>
+          <a:solidFill>
+            <a:srgbClr val="FFFFFF"/>
+          </a:solidFill>
+          <a:ln w="6350">
+            <a:solidFill>
+              <a:srgbClr val="E2E8F0"/>
+            </a:solidFill>
+            <a:prstDash val="solid"/>
+          </a:ln>
+          <a:effectLst>
+            <a:outerShdw sx="100000" sy="100000" kx="0" ky="0" algn="bl" rotWithShape="0" blurRad="127000" dist="38100" dir="5400000">
+              <a:srgbClr val="000000">
+                <a:alpha val="10000"/>
+              </a:srgbClr>
+            </a:outerShdw>
+          </a:effectLst>
+        </p:spPr>
+      </p:sp>
+      <p:sp>
+        <p:nvSpPr>
+          <p:cNvPr id="41" name="Shape 32"/>
+          <p:cNvSpPr/>
+          <p:nvPr/>
+        </p:nvSpPr>
+        <p:spPr>
+          <a:xfrm>
+            <a:off x="9043416" y="4069080"/>
+            <a:ext cx="2743200" cy="73152"/>
+          </a:xfrm>
+          <a:prstGeom prst="rect">
+            <a:avLst/>
+          </a:prstGeom>
+          <a:solidFill>
+            <a:srgbClr val="0A1940"/>
+          </a:solidFill>
+          <a:ln w="12700">
+            <a:solidFill>
+              <a:srgbClr val="0A1940"/>
+            </a:solidFill>
+            <a:prstDash val="solid"/>
+          </a:ln>
+        </p:spPr>
+      </p:sp>
+      <p:pic>
+        <p:nvPicPr>
+          <p:cNvPr id="42" name="Image 7" descr="preencoded.png">    </p:cNvPr>
+          <p:cNvPicPr>
+            <a:picLocks noChangeAspect="1"/>
+          </p:cNvPicPr>
+          <p:nvPr/>
+        </p:nvPicPr>
+        <p:blipFill>
+          <a:blip r:embed="rId8"/>
+          <a:stretch>
+            <a:fillRect/>
+          </a:stretch>
+        </p:blipFill>
+        <p:spPr>
+          <a:xfrm>
+            <a:off x="9317736" y="4434840"/>
+            <a:ext cx="548640" cy="548640"/>
+          </a:xfrm>
+          <a:prstGeom prst="rect">
+            <a:avLst/>
+          </a:prstGeom>
+        </p:spPr>
+      </p:pic>
+      <p:sp>
+        <p:nvSpPr>
+          <p:cNvPr id="43" name="Text 33"/>
+          <p:cNvSpPr/>
+          <p:nvPr/>
+        </p:nvSpPr>
+        <p:spPr>
+          <a:xfrm>
+            <a:off x="9272016" y="5120640"/>
+            <a:ext cx="2286000" cy="365760"/>
+          </a:xfrm>
+          <a:prstGeom prst="rect">
+            <a:avLst/>
+          </a:prstGeom>
+          <a:noFill/>
+          <a:ln/>
+        </p:spPr>
+        <p:txBody>
+          <a:bodyPr wrap="square" lIns="0" tIns="0" rIns="0" bIns="0" rtlCol="0" anchor="ctr"/>
+          <a:lstStyle/>
+          <a:p>
+            <a:pPr indent="0" marL="0">
+              <a:buNone/>
+            </a:pPr>
+            <a:r>
+              <a:rPr lang="en-US" sz="1500" b="1" dirty="0">
+                <a:solidFill>
+                  <a:srgbClr val="0A1940"/>
+                </a:solidFill>
+                <a:latin typeface="Georgia" pitchFamily="34" charset="0"/>
+                <a:ea typeface="Georgia" pitchFamily="34" charset="-122"/>
+                <a:cs typeface="Georgia" pitchFamily="34" charset="-120"/>
+              </a:rPr>
               <a:t>Administração</a:t>
             </a:r>
             <a:endParaRPr lang="en-US" sz="1500" dirty="0"/>
@@ -10312,13 +12057,13 @@
       </p:sp>
       <p:sp>
         <p:nvSpPr>
-          <p:cNvPr id="39" name="Text 30"/>
-          <p:cNvSpPr/>
-          <p:nvPr/>
-        </p:nvSpPr>
-        <p:spPr>
-          <a:xfrm>
-            <a:off x="7831836" y="5440680"/>
+          <p:cNvPr id="44" name="Text 34"/>
+          <p:cNvSpPr/>
+          <p:nvPr/>
+        </p:nvSpPr>
+        <p:spPr>
+          <a:xfrm>
+            <a:off x="9272016" y="5440680"/>
             <a:ext cx="2286000" cy="777240"/>
           </a:xfrm>
           <a:prstGeom prst="rect">
@@ -10351,7 +12096,7 @@
       </p:sp>
       <p:sp>
         <p:nvSpPr>
-          <p:cNvPr id="40" name="Shape 31"/>
+          <p:cNvPr id="45" name="Shape 35"/>
           <p:cNvSpPr/>
           <p:nvPr/>
         </p:nvSpPr>
@@ -10374,7 +12119,7 @@
       </p:sp>
       <p:sp>
         <p:nvSpPr>
-          <p:cNvPr id="41" name="Text 32"/>
+          <p:cNvPr id="46" name="Text 36"/>
           <p:cNvSpPr/>
           <p:nvPr/>
         </p:nvSpPr>
@@ -10413,7 +12158,7 @@
       </p:sp>
       <p:sp>
         <p:nvSpPr>
-          <p:cNvPr id="42" name="Text 33"/>
+          <p:cNvPr id="47" name="Text 37"/>
           <p:cNvSpPr/>
           <p:nvPr/>
         </p:nvSpPr>
@@ -10444,7 +12189,7 @@
                 <a:ea typeface="Calibri" pitchFamily="34" charset="-122"/>
                 <a:cs typeface="Calibri" pitchFamily="34" charset="-120"/>
               </a:rPr>
-              <a:t>4 / 14</a:t>
+              <a:t>4 / 15</a:t>
             </a:r>
             <a:endParaRPr lang="en-US" sz="900" dirty="0"/>
           </a:p>
@@ -11880,7 +13625,7 @@
                 <a:ea typeface="Calibri" pitchFamily="34" charset="-122"/>
                 <a:cs typeface="Calibri" pitchFamily="34" charset="-120"/>
               </a:rPr>
-              <a:t>5 / 14</a:t>
+              <a:t>5 / 15</a:t>
             </a:r>
             <a:endParaRPr lang="en-US" sz="900" dirty="0"/>
           </a:p>
@@ -12884,7 +14629,7 @@
                 <a:ea typeface="Calibri" pitchFamily="34" charset="-122"/>
                 <a:cs typeface="Calibri" pitchFamily="34" charset="-120"/>
               </a:rPr>
-              <a:t>6 / 14</a:t>
+              <a:t>6 / 15</a:t>
             </a:r>
             <a:endParaRPr lang="en-US" sz="900" dirty="0"/>
           </a:p>
@@ -14421,7 +16166,7 @@
                 <a:ea typeface="Calibri" pitchFamily="34" charset="-122"/>
                 <a:cs typeface="Calibri" pitchFamily="34" charset="-120"/>
               </a:rPr>
-              <a:t>7 / 14</a:t>
+              <a:t>7 / 15</a:t>
             </a:r>
             <a:endParaRPr lang="en-US" sz="900" dirty="0"/>
           </a:p>
@@ -15799,7 +17544,7 @@
                 <a:ea typeface="Calibri" pitchFamily="34" charset="-122"/>
                 <a:cs typeface="Calibri" pitchFamily="34" charset="-120"/>
               </a:rPr>
-              <a:t>8 / 14</a:t>
+              <a:t>8 / 15</a:t>
             </a:r>
             <a:endParaRPr lang="en-US" sz="900" dirty="0"/>
           </a:p>
@@ -17073,7 +18818,7 @@
                 <a:ea typeface="Calibri" pitchFamily="34" charset="-122"/>
                 <a:cs typeface="Calibri" pitchFamily="34" charset="-120"/>
               </a:rPr>
-              <a:t>9 / 14</a:t>
+              <a:t>9 / 15</a:t>
             </a:r>
             <a:endParaRPr lang="en-US" sz="900" dirty="0"/>
           </a:p>
